--- a/docs/webinar-resources/Module5-BMC-American-System-Hamiltonian-Workforce-Strategy.pptx
+++ b/docs/webinar-resources/Module5-BMC-American-System-Hamiltonian-Workforce-Strategy.pptx
@@ -1833,13 +1833,6 @@
 <file path=ppt/slides/slide1.xml><?xml version="1.0" encoding="utf-8"?>
 <p:sld xmlns:a="http://schemas.openxmlformats.org/drawingml/2006/main" xmlns:r="http://schemas.openxmlformats.org/officeDocument/2006/relationships" xmlns:p="http://schemas.openxmlformats.org/presentationml/2006/main">
   <p:cSld name="Slide 1">
-    <p:bg>
-      <p:bgPr>
-        <a:solidFill>
-          <a:srgbClr val="111111"/>
-        </a:solidFill>
-      </p:bgPr>
-    </p:bg>
     <p:spTree>
       <p:nvGrpSpPr>
         <p:cNvPr id="1" name=""/>
@@ -1856,13 +1849,38 @@
       </p:grpSpPr>
       <p:sp>
         <p:nvSpPr>
-          <p:cNvPr id="2" name="Text 0"/>
-          <p:cNvSpPr/>
-          <p:nvPr/>
-        </p:nvSpPr>
-        <p:spPr>
-          <a:xfrm>
-            <a:off x="548640" y="1188720"/>
+          <p:cNvPr id="2" name="Shape 0"/>
+          <p:cNvSpPr/>
+          <p:nvPr/>
+        </p:nvSpPr>
+        <p:spPr>
+          <a:xfrm>
+            <a:off x="0" y="0"/>
+            <a:ext cx="9144000" cy="5143500"/>
+          </a:xfrm>
+          <a:prstGeom prst="rect">
+            <a:avLst/>
+          </a:prstGeom>
+          <a:solidFill>
+            <a:srgbClr val="111111"/>
+          </a:solidFill>
+          <a:ln w="12700">
+            <a:solidFill>
+              <a:srgbClr val="111111"/>
+            </a:solidFill>
+            <a:prstDash val="solid"/>
+          </a:ln>
+        </p:spPr>
+      </p:sp>
+      <p:sp>
+        <p:nvSpPr>
+          <p:cNvPr id="3" name="Text 1"/>
+          <p:cNvSpPr/>
+          <p:nvPr/>
+        </p:nvSpPr>
+        <p:spPr>
+          <a:xfrm>
+            <a:off x="548640" y="1143000"/>
             <a:ext cx="8046720" cy="320040"/>
           </a:xfrm>
           <a:prstGeom prst="rect">
@@ -1879,9 +1897,9 @@
               <a:buNone/>
             </a:pPr>
             <a:r>
-              <a:rPr lang="en-US" sz="1400" spc="300" kern="0" dirty="0">
-                <a:solidFill>
-                  <a:srgbClr val="AAAAAA"/>
+              <a:rPr lang="en-US" sz="1400" b="1" spc="200" kern="0" dirty="0">
+                <a:solidFill>
+                  <a:srgbClr val="C9A227"/>
                 </a:solidFill>
                 <a:latin typeface="Arial" pitchFamily="34" charset="0"/>
                 <a:ea typeface="Arial" pitchFamily="34" charset="-122"/>
@@ -1895,32 +1913,32 @@
       </p:sp>
       <p:sp>
         <p:nvSpPr>
-          <p:cNvPr id="3" name="Text 1"/>
-          <p:cNvSpPr/>
-          <p:nvPr/>
-        </p:nvSpPr>
-        <p:spPr>
-          <a:xfrm>
-            <a:off x="548640" y="1645920"/>
-            <a:ext cx="8046720" cy="1280160"/>
-          </a:xfrm>
-          <a:prstGeom prst="rect">
-            <a:avLst/>
-          </a:prstGeom>
-          <a:noFill/>
-          <a:ln/>
-        </p:spPr>
-        <p:txBody>
-          <a:bodyPr wrap="square" lIns="0" tIns="0" rIns="0" bIns="0" rtlCol="0" anchor="ctr"/>
-          <a:lstStyle/>
-          <a:p>
-            <a:pPr indent="0" marL="0">
-              <a:buNone/>
-            </a:pPr>
-            <a:r>
-              <a:rPr lang="en-US" sz="3000" b="1" dirty="0">
-                <a:solidFill>
-                  <a:srgbClr val="F5F5F5"/>
+          <p:cNvPr id="4" name="Text 2"/>
+          <p:cNvSpPr/>
+          <p:nvPr/>
+        </p:nvSpPr>
+        <p:spPr>
+          <a:xfrm>
+            <a:off x="548640" y="1600200"/>
+            <a:ext cx="8046720" cy="1097280"/>
+          </a:xfrm>
+          <a:prstGeom prst="rect">
+            <a:avLst/>
+          </a:prstGeom>
+          <a:noFill/>
+          <a:ln/>
+        </p:spPr>
+        <p:txBody>
+          <a:bodyPr wrap="square" lIns="0" tIns="0" rIns="0" bIns="0" rtlCol="0" anchor="ctr"/>
+          <a:lstStyle/>
+          <a:p>
+            <a:pPr indent="0" marL="0">
+              <a:buNone/>
+            </a:pPr>
+            <a:r>
+              <a:rPr lang="en-US" sz="2600" b="1" dirty="0">
+                <a:solidFill>
+                  <a:srgbClr val="FFFFFF"/>
                 </a:solidFill>
                 <a:latin typeface="Arial" pitchFamily="34" charset="0"/>
                 <a:ea typeface="Arial" pitchFamily="34" charset="-122"/>
@@ -1928,16 +1946,16 @@
               </a:rPr>
               <a:t>Building a Sovereign American</a:t>
             </a:r>
-            <a:endParaRPr lang="en-US" sz="3000" dirty="0"/>
-          </a:p>
-          <a:p>
-            <a:pPr indent="0" marL="0">
-              <a:buNone/>
-            </a:pPr>
-            <a:r>
-              <a:rPr lang="en-US" sz="3000" b="1" dirty="0">
-                <a:solidFill>
-                  <a:srgbClr val="F5F5F5"/>
+            <a:endParaRPr lang="en-US" sz="2600" dirty="0"/>
+          </a:p>
+          <a:p>
+            <a:pPr indent="0" marL="0">
+              <a:buNone/>
+            </a:pPr>
+            <a:r>
+              <a:rPr lang="en-US" sz="2600" b="1" dirty="0">
+                <a:solidFill>
+                  <a:srgbClr val="FFFFFF"/>
                 </a:solidFill>
                 <a:latin typeface="Arial" pitchFamily="34" charset="0"/>
                 <a:ea typeface="Arial" pitchFamily="34" charset="-122"/>
@@ -1945,38 +1963,63 @@
               </a:rPr>
               <a:t>Workforce Strategy</a:t>
             </a:r>
-            <a:endParaRPr lang="en-US" sz="3000" dirty="0"/>
-          </a:p>
-        </p:txBody>
-      </p:sp>
-      <p:sp>
-        <p:nvSpPr>
-          <p:cNvPr id="4" name="Text 2"/>
-          <p:cNvSpPr/>
-          <p:nvPr/>
-        </p:nvSpPr>
-        <p:spPr>
-          <a:xfrm>
-            <a:off x="548640" y="3108960"/>
-            <a:ext cx="8046720" cy="365760"/>
-          </a:xfrm>
-          <a:prstGeom prst="rect">
-            <a:avLst/>
-          </a:prstGeom>
-          <a:noFill/>
-          <a:ln/>
-        </p:spPr>
-        <p:txBody>
-          <a:bodyPr wrap="square" lIns="0" tIns="0" rIns="0" bIns="0" rtlCol="0" anchor="ctr"/>
-          <a:lstStyle/>
-          <a:p>
-            <a:pPr indent="0" marL="0">
-              <a:buNone/>
-            </a:pPr>
-            <a:r>
-              <a:rPr lang="en-US" sz="1800" dirty="0">
-                <a:solidFill>
-                  <a:srgbClr val="CCCCCC"/>
+            <a:endParaRPr lang="en-US" sz="2600" dirty="0"/>
+          </a:p>
+        </p:txBody>
+      </p:sp>
+      <p:sp>
+        <p:nvSpPr>
+          <p:cNvPr id="5" name="Shape 3"/>
+          <p:cNvSpPr/>
+          <p:nvPr/>
+        </p:nvSpPr>
+        <p:spPr>
+          <a:xfrm>
+            <a:off x="548640" y="2834640"/>
+            <a:ext cx="1645920" cy="54864"/>
+          </a:xfrm>
+          <a:prstGeom prst="rect">
+            <a:avLst/>
+          </a:prstGeom>
+          <a:solidFill>
+            <a:srgbClr val="C9A227"/>
+          </a:solidFill>
+          <a:ln w="12700">
+            <a:solidFill>
+              <a:srgbClr val="C9A227"/>
+            </a:solidFill>
+            <a:prstDash val="solid"/>
+          </a:ln>
+        </p:spPr>
+      </p:sp>
+      <p:sp>
+        <p:nvSpPr>
+          <p:cNvPr id="6" name="Text 4"/>
+          <p:cNvSpPr/>
+          <p:nvPr/>
+        </p:nvSpPr>
+        <p:spPr>
+          <a:xfrm>
+            <a:off x="548640" y="3063240"/>
+            <a:ext cx="8046720" cy="320040"/>
+          </a:xfrm>
+          <a:prstGeom prst="rect">
+            <a:avLst/>
+          </a:prstGeom>
+          <a:noFill/>
+          <a:ln/>
+        </p:spPr>
+        <p:txBody>
+          <a:bodyPr wrap="square" lIns="0" tIns="0" rIns="0" bIns="0" rtlCol="0" anchor="ctr"/>
+          <a:lstStyle/>
+          <a:p>
+            <a:pPr indent="0" marL="0">
+              <a:buNone/>
+            </a:pPr>
+            <a:r>
+              <a:rPr lang="en-US" sz="1500" dirty="0">
+                <a:solidFill>
+                  <a:srgbClr val="C8C8C8"/>
                 </a:solidFill>
                 <a:latin typeface="Arial" pitchFamily="34" charset="0"/>
                 <a:ea typeface="Arial" pitchFamily="34" charset="-122"/>
@@ -1984,19 +2027,19 @@
               </a:rPr>
               <a:t>Skills, Pipelines &amp; Productive Capability</a:t>
             </a:r>
-            <a:endParaRPr lang="en-US" sz="1800" dirty="0"/>
-          </a:p>
-        </p:txBody>
-      </p:sp>
-      <p:sp>
-        <p:nvSpPr>
-          <p:cNvPr id="5" name="Text 3"/>
-          <p:cNvSpPr/>
-          <p:nvPr/>
-        </p:nvSpPr>
-        <p:spPr>
-          <a:xfrm>
-            <a:off x="548640" y="4114800"/>
+            <a:endParaRPr lang="en-US" sz="1500" dirty="0"/>
+          </a:p>
+        </p:txBody>
+      </p:sp>
+      <p:sp>
+        <p:nvSpPr>
+          <p:cNvPr id="7" name="Text 5"/>
+          <p:cNvSpPr/>
+          <p:nvPr/>
+        </p:nvSpPr>
+        <p:spPr>
+          <a:xfrm>
+            <a:off x="548640" y="4160520"/>
             <a:ext cx="8046720" cy="274320"/>
           </a:xfrm>
           <a:prstGeom prst="rect">
@@ -2013,9 +2056,9 @@
               <a:buNone/>
             </a:pPr>
             <a:r>
-              <a:rPr lang="en-US" sz="1400" dirty="0">
-                <a:solidFill>
-                  <a:srgbClr val="999999"/>
+              <a:rPr lang="en-US" sz="1300" dirty="0">
+                <a:solidFill>
+                  <a:srgbClr val="A0A0A0"/>
                 </a:solidFill>
                 <a:latin typeface="Arial" pitchFamily="34" charset="0"/>
                 <a:ea typeface="Arial" pitchFamily="34" charset="-122"/>
@@ -2023,7 +2066,7 @@
               </a:rPr>
               <a:t>Joshua Konkle  ·  Chief of Staff Strategist</a:t>
             </a:r>
-            <a:endParaRPr lang="en-US" sz="1400" dirty="0"/>
+            <a:endParaRPr lang="en-US" sz="1300" dirty="0"/>
           </a:p>
         </p:txBody>
       </p:sp>
@@ -2038,13 +2081,6 @@
 <file path=ppt/slides/slide10.xml><?xml version="1.0" encoding="utf-8"?>
 <p:sld xmlns:a="http://schemas.openxmlformats.org/drawingml/2006/main" xmlns:r="http://schemas.openxmlformats.org/officeDocument/2006/relationships" xmlns:p="http://schemas.openxmlformats.org/presentationml/2006/main">
   <p:cSld name="Slide 10">
-    <p:bg>
-      <p:bgPr>
-        <a:solidFill>
-          <a:srgbClr val="FFFFFF"/>
-        </a:solidFill>
-      </p:bgPr>
-    </p:bg>
     <p:spTree>
       <p:nvGrpSpPr>
         <p:cNvPr id="1" name=""/>
@@ -2061,32 +2097,57 @@
       </p:grpSpPr>
       <p:sp>
         <p:nvSpPr>
-          <p:cNvPr id="2" name="Text 0"/>
-          <p:cNvSpPr/>
-          <p:nvPr/>
-        </p:nvSpPr>
-        <p:spPr>
-          <a:xfrm>
-            <a:off x="457200" y="320040"/>
-            <a:ext cx="8229600" cy="457200"/>
-          </a:xfrm>
-          <a:prstGeom prst="rect">
-            <a:avLst/>
-          </a:prstGeom>
-          <a:noFill/>
-          <a:ln/>
-        </p:spPr>
-        <p:txBody>
-          <a:bodyPr wrap="square" lIns="0" tIns="0" rIns="0" bIns="0" rtlCol="0" anchor="ctr"/>
-          <a:lstStyle/>
-          <a:p>
-            <a:pPr indent="0" marL="0">
-              <a:buNone/>
-            </a:pPr>
-            <a:r>
-              <a:rPr lang="en-US" sz="2800" b="1" dirty="0">
-                <a:solidFill>
-                  <a:srgbClr val="1A1A1A"/>
+          <p:cNvPr id="2" name="Shape 0"/>
+          <p:cNvSpPr/>
+          <p:nvPr/>
+        </p:nvSpPr>
+        <p:spPr>
+          <a:xfrm>
+            <a:off x="0" y="0"/>
+            <a:ext cx="9144000" cy="5143500"/>
+          </a:xfrm>
+          <a:prstGeom prst="rect">
+            <a:avLst/>
+          </a:prstGeom>
+          <a:solidFill>
+            <a:srgbClr val="FFFFFF"/>
+          </a:solidFill>
+          <a:ln w="12700">
+            <a:solidFill>
+              <a:srgbClr val="FFFFFF"/>
+            </a:solidFill>
+            <a:prstDash val="solid"/>
+          </a:ln>
+        </p:spPr>
+      </p:sp>
+      <p:sp>
+        <p:nvSpPr>
+          <p:cNvPr id="3" name="Text 1"/>
+          <p:cNvSpPr/>
+          <p:nvPr/>
+        </p:nvSpPr>
+        <p:spPr>
+          <a:xfrm>
+            <a:off x="457200" y="274320"/>
+            <a:ext cx="8229600" cy="365760"/>
+          </a:xfrm>
+          <a:prstGeom prst="rect">
+            <a:avLst/>
+          </a:prstGeom>
+          <a:noFill/>
+          <a:ln/>
+        </p:spPr>
+        <p:txBody>
+          <a:bodyPr wrap="square" lIns="0" tIns="0" rIns="0" bIns="0" rtlCol="0" anchor="ctr"/>
+          <a:lstStyle/>
+          <a:p>
+            <a:pPr indent="0" marL="0">
+              <a:buNone/>
+            </a:pPr>
+            <a:r>
+              <a:rPr lang="en-US" sz="2400" b="1" dirty="0">
+                <a:solidFill>
+                  <a:srgbClr val="1B2A4A"/>
                 </a:solidFill>
                 <a:latin typeface="Arial" pitchFamily="34" charset="0"/>
                 <a:ea typeface="Arial" pitchFamily="34" charset="-122"/>
@@ -2094,29 +2155,9 @@
               </a:rPr>
               <a:t>Exercise</a:t>
             </a:r>
-            <a:endParaRPr lang="en-US" sz="2800" dirty="0"/>
-          </a:p>
-        </p:txBody>
-      </p:sp>
-      <p:sp>
-        <p:nvSpPr>
-          <p:cNvPr id="3" name="Shape 1"/>
-          <p:cNvSpPr/>
-          <p:nvPr/>
-        </p:nvSpPr>
-        <p:spPr>
-          <a:xfrm>
-            <a:off x="457200" y="1051560"/>
-            <a:ext cx="8229600" cy="3108960"/>
-          </a:xfrm>
-          <a:prstGeom prst="rect">
-            <a:avLst/>
-          </a:prstGeom>
-          <a:solidFill>
-            <a:srgbClr val="F7F7F7"/>
-          </a:solidFill>
-          <a:ln/>
-        </p:spPr>
+            <a:endParaRPr lang="en-US" sz="2400" dirty="0"/>
+          </a:p>
+        </p:txBody>
       </p:sp>
       <p:sp>
         <p:nvSpPr>
@@ -2126,26 +2167,26 @@
         </p:nvSpPr>
         <p:spPr>
           <a:xfrm>
-            <a:off x="731520" y="1280160"/>
-            <a:ext cx="7680960" cy="365760"/>
-          </a:xfrm>
-          <a:prstGeom prst="rect">
-            <a:avLst/>
-          </a:prstGeom>
-          <a:noFill/>
-          <a:ln/>
-        </p:spPr>
-        <p:txBody>
-          <a:bodyPr wrap="square" lIns="0" tIns="0" rIns="0" bIns="0" rtlCol="0" anchor="ctr"/>
-          <a:lstStyle/>
-          <a:p>
-            <a:pPr indent="0" marL="0">
-              <a:buNone/>
-            </a:pPr>
-            <a:r>
-              <a:rPr lang="en-US" sz="1700" b="1" dirty="0">
-                <a:solidFill>
-                  <a:srgbClr val="1A1A1A"/>
+            <a:off x="457200" y="868680"/>
+            <a:ext cx="8229600" cy="822960"/>
+          </a:xfrm>
+          <a:prstGeom prst="rect">
+            <a:avLst/>
+          </a:prstGeom>
+          <a:noFill/>
+          <a:ln/>
+        </p:spPr>
+        <p:txBody>
+          <a:bodyPr wrap="square" lIns="0" tIns="0" rIns="0" bIns="0" rtlCol="0" anchor="ctr"/>
+          <a:lstStyle/>
+          <a:p>
+            <a:pPr indent="0" marL="0">
+              <a:buNone/>
+            </a:pPr>
+            <a:r>
+              <a:rPr lang="en-US" sz="1500" dirty="0">
+                <a:solidFill>
+                  <a:srgbClr val="2A2A2A"/>
                 </a:solidFill>
                 <a:latin typeface="Arial" pitchFamily="34" charset="0"/>
                 <a:ea typeface="Arial" pitchFamily="34" charset="-122"/>
@@ -2153,7 +2194,24 @@
               </a:rPr>
               <a:t>Choose one critical role family.</a:t>
             </a:r>
-            <a:endParaRPr lang="en-US" sz="1700" dirty="0"/>
+            <a:endParaRPr lang="en-US" sz="1500" dirty="0"/>
+          </a:p>
+          <a:p>
+            <a:pPr indent="0" marL="0">
+              <a:buNone/>
+            </a:pPr>
+            <a:r>
+              <a:rPr lang="en-US" sz="1500" dirty="0">
+                <a:solidFill>
+                  <a:srgbClr val="2A2A2A"/>
+                </a:solidFill>
+                <a:latin typeface="Arial" pitchFamily="34" charset="0"/>
+                <a:ea typeface="Arial" pitchFamily="34" charset="-122"/>
+                <a:cs typeface="Arial" pitchFamily="34" charset="-120"/>
+              </a:rPr>
+              <a:t>Map the current reality — how these roles are actually filled today.</a:t>
+            </a:r>
+            <a:endParaRPr lang="en-US" sz="1500" dirty="0"/>
           </a:p>
         </p:txBody>
       </p:sp>
@@ -2165,8 +2223,8 @@
         </p:nvSpPr>
         <p:spPr>
           <a:xfrm>
-            <a:off x="731520" y="1828800"/>
-            <a:ext cx="7680960" cy="2011680"/>
+            <a:off x="457200" y="1828800"/>
+            <a:ext cx="8229600" cy="365760"/>
           </a:xfrm>
           <a:prstGeom prst="rect">
             <a:avLst/>
@@ -2184,137 +2242,202 @@
             <a:r>
               <a:rPr lang="en-US" sz="1500" dirty="0">
                 <a:solidFill>
-                  <a:srgbClr val="1A1A1A"/>
-                </a:solidFill>
-                <a:latin typeface="Arial" pitchFamily="34" charset="0"/>
-                <a:ea typeface="Arial" pitchFamily="34" charset="-122"/>
-                <a:cs typeface="Arial" pitchFamily="34" charset="-120"/>
-              </a:rPr>
-              <a:t>Map the current reality — how these roles are actually filled today.</a:t>
+                  <a:srgbClr val="2A2A2A"/>
+                </a:solidFill>
+                <a:latin typeface="Arial" pitchFamily="34" charset="0"/>
+                <a:ea typeface="Arial" pitchFamily="34" charset="-122"/>
+                <a:cs typeface="Arial" pitchFamily="34" charset="-120"/>
+              </a:rPr>
+              <a:t>Then sketch what a deliberate 3–5 year American talent pipeline would need to include:</a:t>
             </a:r>
             <a:endParaRPr lang="en-US" sz="1500" dirty="0"/>
           </a:p>
-          <a:p>
-            <a:pPr indent="0" marL="0">
-              <a:buNone/>
-            </a:pPr>
+        </p:txBody>
+      </p:sp>
+      <p:sp>
+        <p:nvSpPr>
+          <p:cNvPr id="6" name="Text 4"/>
+          <p:cNvSpPr/>
+          <p:nvPr/>
+        </p:nvSpPr>
+        <p:spPr>
+          <a:xfrm>
+            <a:off x="640080" y="2331720"/>
+            <a:ext cx="7772400" cy="365760"/>
+          </a:xfrm>
+          <a:prstGeom prst="rect">
+            <a:avLst/>
+          </a:prstGeom>
+          <a:noFill/>
+          <a:ln/>
+        </p:spPr>
+        <p:txBody>
+          <a:bodyPr wrap="square" lIns="0" tIns="0" rIns="0" bIns="0" rtlCol="0" anchor="ctr"/>
+          <a:lstStyle/>
+          <a:p>
+            <a:pPr indent="0" marL="0">
+              <a:buNone/>
+            </a:pPr>
+            <a:r>
+              <a:rPr lang="en-US" sz="1500" b="1" dirty="0">
+                <a:solidFill>
+                  <a:srgbClr val="1B2A4A"/>
+                </a:solidFill>
+                <a:latin typeface="Arial" pitchFamily="34" charset="0"/>
+                <a:ea typeface="Arial" pitchFamily="34" charset="-122"/>
+                <a:cs typeface="Arial" pitchFamily="34" charset="-120"/>
+              </a:rPr>
+              <a:t>•  Sources</a:t>
+            </a:r>
             <a:endParaRPr lang="en-US" sz="1500" dirty="0"/>
           </a:p>
-          <a:p>
-            <a:pPr indent="0" marL="0">
-              <a:buNone/>
-            </a:pPr>
-            <a:r>
-              <a:rPr lang="en-US" sz="1500" dirty="0">
-                <a:solidFill>
-                  <a:srgbClr val="1A1A1A"/>
-                </a:solidFill>
-                <a:latin typeface="Arial" pitchFamily="34" charset="0"/>
-                <a:ea typeface="Arial" pitchFamily="34" charset="-122"/>
-                <a:cs typeface="Arial" pitchFamily="34" charset="-120"/>
-              </a:rPr>
-              <a:t>Then sketch what a deliberate 3–5 year American talent pipeline would need to include:</a:t>
+        </p:txBody>
+      </p:sp>
+      <p:sp>
+        <p:nvSpPr>
+          <p:cNvPr id="7" name="Text 5"/>
+          <p:cNvSpPr/>
+          <p:nvPr/>
+        </p:nvSpPr>
+        <p:spPr>
+          <a:xfrm>
+            <a:off x="640080" y="2743200"/>
+            <a:ext cx="7772400" cy="365760"/>
+          </a:xfrm>
+          <a:prstGeom prst="rect">
+            <a:avLst/>
+          </a:prstGeom>
+          <a:noFill/>
+          <a:ln/>
+        </p:spPr>
+        <p:txBody>
+          <a:bodyPr wrap="square" lIns="0" tIns="0" rIns="0" bIns="0" rtlCol="0" anchor="ctr"/>
+          <a:lstStyle/>
+          <a:p>
+            <a:pPr indent="0" marL="0">
+              <a:buNone/>
+            </a:pPr>
+            <a:r>
+              <a:rPr lang="en-US" sz="1500" b="1" dirty="0">
+                <a:solidFill>
+                  <a:srgbClr val="1B2A4A"/>
+                </a:solidFill>
+                <a:latin typeface="Arial" pitchFamily="34" charset="0"/>
+                <a:ea typeface="Arial" pitchFamily="34" charset="-122"/>
+                <a:cs typeface="Arial" pitchFamily="34" charset="-120"/>
+              </a:rPr>
+              <a:t>•  Development steps</a:t>
             </a:r>
             <a:endParaRPr lang="en-US" sz="1500" dirty="0"/>
           </a:p>
-          <a:p>
-            <a:pPr indent="0" marL="0">
-              <a:buNone/>
-            </a:pPr>
-            <a:r>
-              <a:rPr lang="en-US" sz="1500" dirty="0">
-                <a:solidFill>
-                  <a:srgbClr val="1A1A1A"/>
-                </a:solidFill>
-                <a:latin typeface="Arial" pitchFamily="34" charset="0"/>
-                <a:ea typeface="Arial" pitchFamily="34" charset="-122"/>
-                <a:cs typeface="Arial" pitchFamily="34" charset="-120"/>
-              </a:rPr>
-              <a:t>• Sources</a:t>
+        </p:txBody>
+      </p:sp>
+      <p:sp>
+        <p:nvSpPr>
+          <p:cNvPr id="8" name="Text 6"/>
+          <p:cNvSpPr/>
+          <p:nvPr/>
+        </p:nvSpPr>
+        <p:spPr>
+          <a:xfrm>
+            <a:off x="640080" y="3154680"/>
+            <a:ext cx="7772400" cy="365760"/>
+          </a:xfrm>
+          <a:prstGeom prst="rect">
+            <a:avLst/>
+          </a:prstGeom>
+          <a:noFill/>
+          <a:ln/>
+        </p:spPr>
+        <p:txBody>
+          <a:bodyPr wrap="square" lIns="0" tIns="0" rIns="0" bIns="0" rtlCol="0" anchor="ctr"/>
+          <a:lstStyle/>
+          <a:p>
+            <a:pPr indent="0" marL="0">
+              <a:buNone/>
+            </a:pPr>
+            <a:r>
+              <a:rPr lang="en-US" sz="1500" b="1" dirty="0">
+                <a:solidFill>
+                  <a:srgbClr val="1B2A4A"/>
+                </a:solidFill>
+                <a:latin typeface="Arial" pitchFamily="34" charset="0"/>
+                <a:ea typeface="Arial" pitchFamily="34" charset="-122"/>
+                <a:cs typeface="Arial" pitchFamily="34" charset="-120"/>
+              </a:rPr>
+              <a:t>•  Retention logic</a:t>
             </a:r>
             <a:endParaRPr lang="en-US" sz="1500" dirty="0"/>
           </a:p>
-          <a:p>
-            <a:pPr indent="0" marL="0">
-              <a:buNone/>
-            </a:pPr>
-            <a:r>
-              <a:rPr lang="en-US" sz="1500" dirty="0">
-                <a:solidFill>
-                  <a:srgbClr val="1A1A1A"/>
-                </a:solidFill>
-                <a:latin typeface="Arial" pitchFamily="34" charset="0"/>
-                <a:ea typeface="Arial" pitchFamily="34" charset="-122"/>
-                <a:cs typeface="Arial" pitchFamily="34" charset="-120"/>
-              </a:rPr>
-              <a:t>• Development steps</a:t>
+        </p:txBody>
+      </p:sp>
+      <p:sp>
+        <p:nvSpPr>
+          <p:cNvPr id="9" name="Text 7"/>
+          <p:cNvSpPr/>
+          <p:nvPr/>
+        </p:nvSpPr>
+        <p:spPr>
+          <a:xfrm>
+            <a:off x="640080" y="3566160"/>
+            <a:ext cx="7772400" cy="365760"/>
+          </a:xfrm>
+          <a:prstGeom prst="rect">
+            <a:avLst/>
+          </a:prstGeom>
+          <a:noFill/>
+          <a:ln/>
+        </p:spPr>
+        <p:txBody>
+          <a:bodyPr wrap="square" lIns="0" tIns="0" rIns="0" bIns="0" rtlCol="0" anchor="ctr"/>
+          <a:lstStyle/>
+          <a:p>
+            <a:pPr indent="0" marL="0">
+              <a:buNone/>
+            </a:pPr>
+            <a:r>
+              <a:rPr lang="en-US" sz="1500" b="1" dirty="0">
+                <a:solidFill>
+                  <a:srgbClr val="1B2A4A"/>
+                </a:solidFill>
+                <a:latin typeface="Arial" pitchFamily="34" charset="0"/>
+                <a:ea typeface="Arial" pitchFamily="34" charset="-122"/>
+                <a:cs typeface="Arial" pitchFamily="34" charset="-120"/>
+              </a:rPr>
+              <a:t>•  Success metrics</a:t>
             </a:r>
             <a:endParaRPr lang="en-US" sz="1500" dirty="0"/>
           </a:p>
-          <a:p>
-            <a:pPr indent="0" marL="0">
-              <a:buNone/>
-            </a:pPr>
-            <a:r>
-              <a:rPr lang="en-US" sz="1500" dirty="0">
-                <a:solidFill>
-                  <a:srgbClr val="1A1A1A"/>
-                </a:solidFill>
-                <a:latin typeface="Arial" pitchFamily="34" charset="0"/>
-                <a:ea typeface="Arial" pitchFamily="34" charset="-122"/>
-                <a:cs typeface="Arial" pitchFamily="34" charset="-120"/>
-              </a:rPr>
-              <a:t>• Retention logic</a:t>
-            </a:r>
-            <a:endParaRPr lang="en-US" sz="1500" dirty="0"/>
-          </a:p>
-          <a:p>
-            <a:pPr indent="0" marL="0">
-              <a:buNone/>
-            </a:pPr>
-            <a:r>
-              <a:rPr lang="en-US" sz="1500" dirty="0">
-                <a:solidFill>
-                  <a:srgbClr val="1A1A1A"/>
-                </a:solidFill>
-                <a:latin typeface="Arial" pitchFamily="34" charset="0"/>
-                <a:ea typeface="Arial" pitchFamily="34" charset="-122"/>
-                <a:cs typeface="Arial" pitchFamily="34" charset="-120"/>
-              </a:rPr>
-              <a:t>• Success metrics</a:t>
-            </a:r>
-            <a:endParaRPr lang="en-US" sz="1500" dirty="0"/>
-          </a:p>
-        </p:txBody>
-      </p:sp>
-      <p:sp>
-        <p:nvSpPr>
-          <p:cNvPr id="6" name="Text 4"/>
+        </p:txBody>
+      </p:sp>
+      <p:sp>
+        <p:nvSpPr>
+          <p:cNvPr id="10" name="Text 8"/>
           <p:cNvSpPr/>
           <p:nvPr/>
         </p:nvSpPr>
         <p:spPr>
           <a:xfrm>
             <a:off x="457200" y="4800600"/>
-            <a:ext cx="5943600" cy="228600"/>
-          </a:xfrm>
-          <a:prstGeom prst="rect">
-            <a:avLst/>
-          </a:prstGeom>
-          <a:noFill/>
-          <a:ln/>
-        </p:spPr>
-        <p:txBody>
-          <a:bodyPr wrap="square" lIns="0" tIns="0" rIns="0" bIns="0" rtlCol="0" anchor="ctr"/>
-          <a:lstStyle/>
-          <a:p>
-            <a:pPr indent="0" marL="0">
-              <a:buNone/>
-            </a:pPr>
-            <a:r>
-              <a:rPr lang="en-US" sz="1000" dirty="0">
-                <a:solidFill>
-                  <a:srgbClr val="555555"/>
+            <a:ext cx="5943600" cy="256032"/>
+          </a:xfrm>
+          <a:prstGeom prst="rect">
+            <a:avLst/>
+          </a:prstGeom>
+          <a:noFill/>
+          <a:ln/>
+        </p:spPr>
+        <p:txBody>
+          <a:bodyPr wrap="square" lIns="0" tIns="0" rIns="0" bIns="0" rtlCol="0" anchor="ctr"/>
+          <a:lstStyle/>
+          <a:p>
+            <a:pPr indent="0" marL="0">
+              <a:buNone/>
+            </a:pPr>
+            <a:r>
+              <a:rPr lang="en-US" sz="1100" dirty="0">
+                <a:solidFill>
+                  <a:srgbClr val="6A6A6A"/>
                 </a:solidFill>
                 <a:latin typeface="Arial" pitchFamily="34" charset="0"/>
                 <a:ea typeface="Arial" pitchFamily="34" charset="-122"/>
@@ -2322,20 +2445,20 @@
               </a:rPr>
               <a:t>Joshua Konkle  |  Chief of Staff Strategist</a:t>
             </a:r>
-            <a:endParaRPr lang="en-US" sz="1000" dirty="0"/>
-          </a:p>
-        </p:txBody>
-      </p:sp>
-      <p:sp>
-        <p:nvSpPr>
-          <p:cNvPr id="7" name="Text 5"/>
-          <p:cNvSpPr/>
-          <p:nvPr/>
-        </p:nvSpPr>
-        <p:spPr>
-          <a:xfrm>
-            <a:off x="7772400" y="4800600"/>
-            <a:ext cx="914400" cy="228600"/>
+            <a:endParaRPr lang="en-US" sz="1100" dirty="0"/>
+          </a:p>
+        </p:txBody>
+      </p:sp>
+      <p:sp>
+        <p:nvSpPr>
+          <p:cNvPr id="11" name="Text 9"/>
+          <p:cNvSpPr/>
+          <p:nvPr/>
+        </p:nvSpPr>
+        <p:spPr>
+          <a:xfrm>
+            <a:off x="7498080" y="4800600"/>
+            <a:ext cx="1188720" cy="256032"/>
           </a:xfrm>
           <a:prstGeom prst="rect">
             <a:avLst/>
@@ -2351,9 +2474,9 @@
               <a:buNone/>
             </a:pPr>
             <a:r>
-              <a:rPr lang="en-US" sz="1000" dirty="0">
-                <a:solidFill>
-                  <a:srgbClr val="555555"/>
+              <a:rPr lang="en-US" sz="1100" dirty="0">
+                <a:solidFill>
+                  <a:srgbClr val="6A6A6A"/>
                 </a:solidFill>
                 <a:latin typeface="Arial" pitchFamily="34" charset="0"/>
                 <a:ea typeface="Arial" pitchFamily="34" charset="-122"/>
@@ -2361,7 +2484,7 @@
               </a:rPr>
               <a:t>10 / 12</a:t>
             </a:r>
-            <a:endParaRPr lang="en-US" sz="1000" dirty="0"/>
+            <a:endParaRPr lang="en-US" sz="1100" dirty="0"/>
           </a:p>
         </p:txBody>
       </p:sp>
@@ -2376,13 +2499,6 @@
 <file path=ppt/slides/slide11.xml><?xml version="1.0" encoding="utf-8"?>
 <p:sld xmlns:a="http://schemas.openxmlformats.org/drawingml/2006/main" xmlns:r="http://schemas.openxmlformats.org/officeDocument/2006/relationships" xmlns:p="http://schemas.openxmlformats.org/presentationml/2006/main">
   <p:cSld name="Slide 11">
-    <p:bg>
-      <p:bgPr>
-        <a:solidFill>
-          <a:srgbClr val="FFFFFF"/>
-        </a:solidFill>
-      </p:bgPr>
-    </p:bg>
     <p:spTree>
       <p:nvGrpSpPr>
         <p:cNvPr id="1" name=""/>
@@ -2399,32 +2515,57 @@
       </p:grpSpPr>
       <p:sp>
         <p:nvSpPr>
-          <p:cNvPr id="2" name="Text 0"/>
-          <p:cNvSpPr/>
-          <p:nvPr/>
-        </p:nvSpPr>
-        <p:spPr>
-          <a:xfrm>
-            <a:off x="457200" y="320040"/>
-            <a:ext cx="8229600" cy="457200"/>
-          </a:xfrm>
-          <a:prstGeom prst="rect">
-            <a:avLst/>
-          </a:prstGeom>
-          <a:noFill/>
-          <a:ln/>
-        </p:spPr>
-        <p:txBody>
-          <a:bodyPr wrap="square" lIns="0" tIns="0" rIns="0" bIns="0" rtlCol="0" anchor="ctr"/>
-          <a:lstStyle/>
-          <a:p>
-            <a:pPr indent="0" marL="0">
-              <a:buNone/>
-            </a:pPr>
-            <a:r>
-              <a:rPr lang="en-US" sz="2600" b="1" dirty="0">
-                <a:solidFill>
-                  <a:srgbClr val="1A1A1A"/>
+          <p:cNvPr id="2" name="Shape 0"/>
+          <p:cNvSpPr/>
+          <p:nvPr/>
+        </p:nvSpPr>
+        <p:spPr>
+          <a:xfrm>
+            <a:off x="0" y="0"/>
+            <a:ext cx="9144000" cy="5143500"/>
+          </a:xfrm>
+          <a:prstGeom prst="rect">
+            <a:avLst/>
+          </a:prstGeom>
+          <a:solidFill>
+            <a:srgbClr val="FFFFFF"/>
+          </a:solidFill>
+          <a:ln w="12700">
+            <a:solidFill>
+              <a:srgbClr val="FFFFFF"/>
+            </a:solidFill>
+            <a:prstDash val="solid"/>
+          </a:ln>
+        </p:spPr>
+      </p:sp>
+      <p:sp>
+        <p:nvSpPr>
+          <p:cNvPr id="3" name="Text 1"/>
+          <p:cNvSpPr/>
+          <p:nvPr/>
+        </p:nvSpPr>
+        <p:spPr>
+          <a:xfrm>
+            <a:off x="457200" y="256032"/>
+            <a:ext cx="8229600" cy="365760"/>
+          </a:xfrm>
+          <a:prstGeom prst="rect">
+            <a:avLst/>
+          </a:prstGeom>
+          <a:noFill/>
+          <a:ln/>
+        </p:spPr>
+        <p:txBody>
+          <a:bodyPr wrap="square" lIns="0" tIns="0" rIns="0" bIns="0" rtlCol="0" anchor="ctr"/>
+          <a:lstStyle/>
+          <a:p>
+            <a:pPr indent="0" marL="0">
+              <a:buNone/>
+            </a:pPr>
+            <a:r>
+              <a:rPr lang="en-US" sz="2400" b="1" dirty="0">
+                <a:solidFill>
+                  <a:srgbClr val="1B2A4A"/>
                 </a:solidFill>
                 <a:latin typeface="Arial" pitchFamily="34" charset="0"/>
                 <a:ea typeface="Arial" pitchFamily="34" charset="-122"/>
@@ -2432,58 +2573,65 @@
               </a:rPr>
               <a:t>Three Highest-Leverage Moves</a:t>
             </a:r>
-            <a:endParaRPr lang="en-US" sz="2600" dirty="0"/>
-          </a:p>
-        </p:txBody>
-      </p:sp>
-      <p:sp>
-        <p:nvSpPr>
-          <p:cNvPr id="3" name="Shape 1"/>
-          <p:cNvSpPr/>
-          <p:nvPr/>
-        </p:nvSpPr>
-        <p:spPr>
-          <a:xfrm>
-            <a:off x="457200" y="1005840"/>
-            <a:ext cx="640080" cy="640080"/>
-          </a:xfrm>
-          <a:prstGeom prst="ellipse">
-            <a:avLst/>
+            <a:endParaRPr lang="en-US" sz="2400" dirty="0"/>
+          </a:p>
+        </p:txBody>
+      </p:sp>
+      <p:sp>
+        <p:nvSpPr>
+          <p:cNvPr id="4" name="Shape 2"/>
+          <p:cNvSpPr/>
+          <p:nvPr/>
+        </p:nvSpPr>
+        <p:spPr>
+          <a:xfrm>
+            <a:off x="457200" y="868680"/>
+            <a:ext cx="8229600" cy="960120"/>
+          </a:xfrm>
+          <a:prstGeom prst="roundRect">
+            <a:avLst>
+              <a:gd name="adj" fmla="val 7619"/>
+            </a:avLst>
           </a:prstGeom>
           <a:solidFill>
-            <a:srgbClr val="1A1A1A"/>
+            <a:srgbClr val="1B2A4A"/>
           </a:solidFill>
-          <a:ln/>
-        </p:spPr>
-      </p:sp>
-      <p:sp>
-        <p:nvSpPr>
-          <p:cNvPr id="4" name="Text 2"/>
-          <p:cNvSpPr/>
-          <p:nvPr/>
-        </p:nvSpPr>
-        <p:spPr>
-          <a:xfrm>
-            <a:off x="457200" y="1005840"/>
-            <a:ext cx="640080" cy="640080"/>
-          </a:xfrm>
-          <a:prstGeom prst="rect">
-            <a:avLst/>
-          </a:prstGeom>
-          <a:noFill/>
-          <a:ln/>
-        </p:spPr>
-        <p:txBody>
-          <a:bodyPr wrap="square" lIns="0" tIns="0" rIns="0" bIns="0" rtlCol="0" anchor="ctr"/>
-          <a:lstStyle/>
-          <a:p>
-            <a:pPr algn="ctr" indent="0" marL="0">
+          <a:ln w="12700">
+            <a:solidFill>
+              <a:srgbClr val="1B2A4A"/>
+            </a:solidFill>
+            <a:prstDash val="solid"/>
+          </a:ln>
+        </p:spPr>
+      </p:sp>
+      <p:sp>
+        <p:nvSpPr>
+          <p:cNvPr id="5" name="Text 3"/>
+          <p:cNvSpPr/>
+          <p:nvPr/>
+        </p:nvSpPr>
+        <p:spPr>
+          <a:xfrm>
+            <a:off x="640080" y="1124712"/>
+            <a:ext cx="457200" cy="411480"/>
+          </a:xfrm>
+          <a:prstGeom prst="rect">
+            <a:avLst/>
+          </a:prstGeom>
+          <a:noFill/>
+          <a:ln/>
+        </p:spPr>
+        <p:txBody>
+          <a:bodyPr wrap="square" lIns="0" tIns="0" rIns="0" bIns="0" rtlCol="0" anchor="ctr"/>
+          <a:lstStyle/>
+          <a:p>
+            <a:pPr indent="0" marL="0">
               <a:buNone/>
             </a:pPr>
             <a:r>
               <a:rPr lang="en-US" sz="2200" b="1" dirty="0">
                 <a:solidFill>
-                  <a:srgbClr val="F5F5F5"/>
+                  <a:srgbClr val="C9A227"/>
                 </a:solidFill>
                 <a:latin typeface="Arial" pitchFamily="34" charset="0"/>
                 <a:ea typeface="Arial" pitchFamily="34" charset="-122"/>
@@ -2497,14 +2645,14 @@
       </p:sp>
       <p:sp>
         <p:nvSpPr>
-          <p:cNvPr id="5" name="Text 3"/>
-          <p:cNvSpPr/>
-          <p:nvPr/>
-        </p:nvSpPr>
-        <p:spPr>
-          <a:xfrm>
-            <a:off x="1371600" y="1005840"/>
-            <a:ext cx="7132320" cy="914400"/>
+          <p:cNvPr id="6" name="Text 4"/>
+          <p:cNvSpPr/>
+          <p:nvPr/>
+        </p:nvSpPr>
+        <p:spPr>
+          <a:xfrm>
+            <a:off x="1280160" y="1051560"/>
+            <a:ext cx="7132320" cy="640080"/>
           </a:xfrm>
           <a:prstGeom prst="rect">
             <a:avLst/>
@@ -2522,7 +2670,7 @@
             <a:r>
               <a:rPr lang="en-US" sz="1400" dirty="0">
                 <a:solidFill>
-                  <a:srgbClr val="1A1A1A"/>
+                  <a:srgbClr val="FFFFFF"/>
                 </a:solidFill>
                 <a:latin typeface="Arial" pitchFamily="34" charset="0"/>
                 <a:ea typeface="Arial" pitchFamily="34" charset="-122"/>
@@ -2536,52 +2684,59 @@
       </p:sp>
       <p:sp>
         <p:nvSpPr>
-          <p:cNvPr id="6" name="Shape 4"/>
-          <p:cNvSpPr/>
-          <p:nvPr/>
-        </p:nvSpPr>
-        <p:spPr>
-          <a:xfrm>
-            <a:off x="457200" y="2103120"/>
-            <a:ext cx="640080" cy="640080"/>
-          </a:xfrm>
-          <a:prstGeom prst="ellipse">
-            <a:avLst/>
+          <p:cNvPr id="7" name="Shape 5"/>
+          <p:cNvSpPr/>
+          <p:nvPr/>
+        </p:nvSpPr>
+        <p:spPr>
+          <a:xfrm>
+            <a:off x="457200" y="1965960"/>
+            <a:ext cx="8229600" cy="960120"/>
+          </a:xfrm>
+          <a:prstGeom prst="roundRect">
+            <a:avLst>
+              <a:gd name="adj" fmla="val 7619"/>
+            </a:avLst>
           </a:prstGeom>
           <a:solidFill>
-            <a:srgbClr val="1A1A1A"/>
+            <a:srgbClr val="1B2A4A"/>
           </a:solidFill>
-          <a:ln/>
-        </p:spPr>
-      </p:sp>
-      <p:sp>
-        <p:nvSpPr>
-          <p:cNvPr id="7" name="Text 5"/>
-          <p:cNvSpPr/>
-          <p:nvPr/>
-        </p:nvSpPr>
-        <p:spPr>
-          <a:xfrm>
-            <a:off x="457200" y="2103120"/>
-            <a:ext cx="640080" cy="640080"/>
-          </a:xfrm>
-          <a:prstGeom prst="rect">
-            <a:avLst/>
-          </a:prstGeom>
-          <a:noFill/>
-          <a:ln/>
-        </p:spPr>
-        <p:txBody>
-          <a:bodyPr wrap="square" lIns="0" tIns="0" rIns="0" bIns="0" rtlCol="0" anchor="ctr"/>
-          <a:lstStyle/>
-          <a:p>
-            <a:pPr algn="ctr" indent="0" marL="0">
+          <a:ln w="12700">
+            <a:solidFill>
+              <a:srgbClr val="1B2A4A"/>
+            </a:solidFill>
+            <a:prstDash val="solid"/>
+          </a:ln>
+        </p:spPr>
+      </p:sp>
+      <p:sp>
+        <p:nvSpPr>
+          <p:cNvPr id="8" name="Text 6"/>
+          <p:cNvSpPr/>
+          <p:nvPr/>
+        </p:nvSpPr>
+        <p:spPr>
+          <a:xfrm>
+            <a:off x="640080" y="2221992"/>
+            <a:ext cx="457200" cy="411480"/>
+          </a:xfrm>
+          <a:prstGeom prst="rect">
+            <a:avLst/>
+          </a:prstGeom>
+          <a:noFill/>
+          <a:ln/>
+        </p:spPr>
+        <p:txBody>
+          <a:bodyPr wrap="square" lIns="0" tIns="0" rIns="0" bIns="0" rtlCol="0" anchor="ctr"/>
+          <a:lstStyle/>
+          <a:p>
+            <a:pPr indent="0" marL="0">
               <a:buNone/>
             </a:pPr>
             <a:r>
               <a:rPr lang="en-US" sz="2200" b="1" dirty="0">
                 <a:solidFill>
-                  <a:srgbClr val="F5F5F5"/>
+                  <a:srgbClr val="C9A227"/>
                 </a:solidFill>
                 <a:latin typeface="Arial" pitchFamily="34" charset="0"/>
                 <a:ea typeface="Arial" pitchFamily="34" charset="-122"/>
@@ -2595,14 +2750,14 @@
       </p:sp>
       <p:sp>
         <p:nvSpPr>
-          <p:cNvPr id="8" name="Text 6"/>
-          <p:cNvSpPr/>
-          <p:nvPr/>
-        </p:nvSpPr>
-        <p:spPr>
-          <a:xfrm>
-            <a:off x="1371600" y="2103120"/>
-            <a:ext cx="7132320" cy="914400"/>
+          <p:cNvPr id="9" name="Text 7"/>
+          <p:cNvSpPr/>
+          <p:nvPr/>
+        </p:nvSpPr>
+        <p:spPr>
+          <a:xfrm>
+            <a:off x="1280160" y="2148840"/>
+            <a:ext cx="7132320" cy="640080"/>
           </a:xfrm>
           <a:prstGeom prst="rect">
             <a:avLst/>
@@ -2620,7 +2775,7 @@
             <a:r>
               <a:rPr lang="en-US" sz="1400" dirty="0">
                 <a:solidFill>
-                  <a:srgbClr val="1A1A1A"/>
+                  <a:srgbClr val="FFFFFF"/>
                 </a:solidFill>
                 <a:latin typeface="Arial" pitchFamily="34" charset="0"/>
                 <a:ea typeface="Arial" pitchFamily="34" charset="-122"/>
@@ -2634,52 +2789,59 @@
       </p:sp>
       <p:sp>
         <p:nvSpPr>
-          <p:cNvPr id="9" name="Shape 7"/>
-          <p:cNvSpPr/>
-          <p:nvPr/>
-        </p:nvSpPr>
-        <p:spPr>
-          <a:xfrm>
-            <a:off x="457200" y="3200400"/>
-            <a:ext cx="640080" cy="640080"/>
-          </a:xfrm>
-          <a:prstGeom prst="ellipse">
-            <a:avLst/>
+          <p:cNvPr id="10" name="Shape 8"/>
+          <p:cNvSpPr/>
+          <p:nvPr/>
+        </p:nvSpPr>
+        <p:spPr>
+          <a:xfrm>
+            <a:off x="457200" y="3063240"/>
+            <a:ext cx="8229600" cy="960120"/>
+          </a:xfrm>
+          <a:prstGeom prst="roundRect">
+            <a:avLst>
+              <a:gd name="adj" fmla="val 7619"/>
+            </a:avLst>
           </a:prstGeom>
           <a:solidFill>
-            <a:srgbClr val="1A1A1A"/>
+            <a:srgbClr val="1B2A4A"/>
           </a:solidFill>
-          <a:ln/>
-        </p:spPr>
-      </p:sp>
-      <p:sp>
-        <p:nvSpPr>
-          <p:cNvPr id="10" name="Text 8"/>
-          <p:cNvSpPr/>
-          <p:nvPr/>
-        </p:nvSpPr>
-        <p:spPr>
-          <a:xfrm>
-            <a:off x="457200" y="3200400"/>
-            <a:ext cx="640080" cy="640080"/>
-          </a:xfrm>
-          <a:prstGeom prst="rect">
-            <a:avLst/>
-          </a:prstGeom>
-          <a:noFill/>
-          <a:ln/>
-        </p:spPr>
-        <p:txBody>
-          <a:bodyPr wrap="square" lIns="0" tIns="0" rIns="0" bIns="0" rtlCol="0" anchor="ctr"/>
-          <a:lstStyle/>
-          <a:p>
-            <a:pPr algn="ctr" indent="0" marL="0">
+          <a:ln w="12700">
+            <a:solidFill>
+              <a:srgbClr val="1B2A4A"/>
+            </a:solidFill>
+            <a:prstDash val="solid"/>
+          </a:ln>
+        </p:spPr>
+      </p:sp>
+      <p:sp>
+        <p:nvSpPr>
+          <p:cNvPr id="11" name="Text 9"/>
+          <p:cNvSpPr/>
+          <p:nvPr/>
+        </p:nvSpPr>
+        <p:spPr>
+          <a:xfrm>
+            <a:off x="640080" y="3319272"/>
+            <a:ext cx="457200" cy="411480"/>
+          </a:xfrm>
+          <a:prstGeom prst="rect">
+            <a:avLst/>
+          </a:prstGeom>
+          <a:noFill/>
+          <a:ln/>
+        </p:spPr>
+        <p:txBody>
+          <a:bodyPr wrap="square" lIns="0" tIns="0" rIns="0" bIns="0" rtlCol="0" anchor="ctr"/>
+          <a:lstStyle/>
+          <a:p>
+            <a:pPr indent="0" marL="0">
               <a:buNone/>
             </a:pPr>
             <a:r>
               <a:rPr lang="en-US" sz="2200" b="1" dirty="0">
                 <a:solidFill>
-                  <a:srgbClr val="F5F5F5"/>
+                  <a:srgbClr val="C9A227"/>
                 </a:solidFill>
                 <a:latin typeface="Arial" pitchFamily="34" charset="0"/>
                 <a:ea typeface="Arial" pitchFamily="34" charset="-122"/>
@@ -2693,14 +2855,14 @@
       </p:sp>
       <p:sp>
         <p:nvSpPr>
-          <p:cNvPr id="11" name="Text 9"/>
-          <p:cNvSpPr/>
-          <p:nvPr/>
-        </p:nvSpPr>
-        <p:spPr>
-          <a:xfrm>
-            <a:off x="1371600" y="3200400"/>
-            <a:ext cx="7132320" cy="914400"/>
+          <p:cNvPr id="12" name="Text 10"/>
+          <p:cNvSpPr/>
+          <p:nvPr/>
+        </p:nvSpPr>
+        <p:spPr>
+          <a:xfrm>
+            <a:off x="1280160" y="3246120"/>
+            <a:ext cx="7132320" cy="640080"/>
           </a:xfrm>
           <a:prstGeom prst="rect">
             <a:avLst/>
@@ -2718,7 +2880,7 @@
             <a:r>
               <a:rPr lang="en-US" sz="1400" dirty="0">
                 <a:solidFill>
-                  <a:srgbClr val="1A1A1A"/>
+                  <a:srgbClr val="FFFFFF"/>
                 </a:solidFill>
                 <a:latin typeface="Arial" pitchFamily="34" charset="0"/>
                 <a:ea typeface="Arial" pitchFamily="34" charset="-122"/>
@@ -2732,32 +2894,32 @@
       </p:sp>
       <p:sp>
         <p:nvSpPr>
-          <p:cNvPr id="12" name="Text 10"/>
+          <p:cNvPr id="13" name="Text 11"/>
           <p:cNvSpPr/>
           <p:nvPr/>
         </p:nvSpPr>
         <p:spPr>
           <a:xfrm>
             <a:off x="457200" y="4800600"/>
-            <a:ext cx="5943600" cy="228600"/>
-          </a:xfrm>
-          <a:prstGeom prst="rect">
-            <a:avLst/>
-          </a:prstGeom>
-          <a:noFill/>
-          <a:ln/>
-        </p:spPr>
-        <p:txBody>
-          <a:bodyPr wrap="square" lIns="0" tIns="0" rIns="0" bIns="0" rtlCol="0" anchor="ctr"/>
-          <a:lstStyle/>
-          <a:p>
-            <a:pPr indent="0" marL="0">
-              <a:buNone/>
-            </a:pPr>
-            <a:r>
-              <a:rPr lang="en-US" sz="1000" dirty="0">
-                <a:solidFill>
-                  <a:srgbClr val="555555"/>
+            <a:ext cx="5943600" cy="256032"/>
+          </a:xfrm>
+          <a:prstGeom prst="rect">
+            <a:avLst/>
+          </a:prstGeom>
+          <a:noFill/>
+          <a:ln/>
+        </p:spPr>
+        <p:txBody>
+          <a:bodyPr wrap="square" lIns="0" tIns="0" rIns="0" bIns="0" rtlCol="0" anchor="ctr"/>
+          <a:lstStyle/>
+          <a:p>
+            <a:pPr indent="0" marL="0">
+              <a:buNone/>
+            </a:pPr>
+            <a:r>
+              <a:rPr lang="en-US" sz="1100" dirty="0">
+                <a:solidFill>
+                  <a:srgbClr val="6A6A6A"/>
                 </a:solidFill>
                 <a:latin typeface="Arial" pitchFamily="34" charset="0"/>
                 <a:ea typeface="Arial" pitchFamily="34" charset="-122"/>
@@ -2765,20 +2927,20 @@
               </a:rPr>
               <a:t>Joshua Konkle  |  Chief of Staff Strategist</a:t>
             </a:r>
-            <a:endParaRPr lang="en-US" sz="1000" dirty="0"/>
-          </a:p>
-        </p:txBody>
-      </p:sp>
-      <p:sp>
-        <p:nvSpPr>
-          <p:cNvPr id="13" name="Text 11"/>
-          <p:cNvSpPr/>
-          <p:nvPr/>
-        </p:nvSpPr>
-        <p:spPr>
-          <a:xfrm>
-            <a:off x="7772400" y="4800600"/>
-            <a:ext cx="914400" cy="228600"/>
+            <a:endParaRPr lang="en-US" sz="1100" dirty="0"/>
+          </a:p>
+        </p:txBody>
+      </p:sp>
+      <p:sp>
+        <p:nvSpPr>
+          <p:cNvPr id="14" name="Text 12"/>
+          <p:cNvSpPr/>
+          <p:nvPr/>
+        </p:nvSpPr>
+        <p:spPr>
+          <a:xfrm>
+            <a:off x="7498080" y="4800600"/>
+            <a:ext cx="1188720" cy="256032"/>
           </a:xfrm>
           <a:prstGeom prst="rect">
             <a:avLst/>
@@ -2794,9 +2956,9 @@
               <a:buNone/>
             </a:pPr>
             <a:r>
-              <a:rPr lang="en-US" sz="1000" dirty="0">
-                <a:solidFill>
-                  <a:srgbClr val="555555"/>
+              <a:rPr lang="en-US" sz="1100" dirty="0">
+                <a:solidFill>
+                  <a:srgbClr val="6A6A6A"/>
                 </a:solidFill>
                 <a:latin typeface="Arial" pitchFamily="34" charset="0"/>
                 <a:ea typeface="Arial" pitchFamily="34" charset="-122"/>
@@ -2804,7 +2966,7 @@
               </a:rPr>
               <a:t>11 / 12</a:t>
             </a:r>
-            <a:endParaRPr lang="en-US" sz="1000" dirty="0"/>
+            <a:endParaRPr lang="en-US" sz="1100" dirty="0"/>
           </a:p>
         </p:txBody>
       </p:sp>
@@ -2819,13 +2981,6 @@
 <file path=ppt/slides/slide12.xml><?xml version="1.0" encoding="utf-8"?>
 <p:sld xmlns:a="http://schemas.openxmlformats.org/drawingml/2006/main" xmlns:r="http://schemas.openxmlformats.org/officeDocument/2006/relationships" xmlns:p="http://schemas.openxmlformats.org/presentationml/2006/main">
   <p:cSld name="Slide 12">
-    <p:bg>
-      <p:bgPr>
-        <a:solidFill>
-          <a:srgbClr val="111111"/>
-        </a:solidFill>
-      </p:bgPr>
-    </p:bg>
     <p:spTree>
       <p:nvGrpSpPr>
         <p:cNvPr id="1" name=""/>
@@ -2842,13 +2997,38 @@
       </p:grpSpPr>
       <p:sp>
         <p:nvSpPr>
-          <p:cNvPr id="2" name="Text 0"/>
-          <p:cNvSpPr/>
-          <p:nvPr/>
-        </p:nvSpPr>
-        <p:spPr>
-          <a:xfrm>
-            <a:off x="548640" y="640080"/>
+          <p:cNvPr id="2" name="Shape 0"/>
+          <p:cNvSpPr/>
+          <p:nvPr/>
+        </p:nvSpPr>
+        <p:spPr>
+          <a:xfrm>
+            <a:off x="0" y="0"/>
+            <a:ext cx="9144000" cy="5143500"/>
+          </a:xfrm>
+          <a:prstGeom prst="rect">
+            <a:avLst/>
+          </a:prstGeom>
+          <a:solidFill>
+            <a:srgbClr val="111111"/>
+          </a:solidFill>
+          <a:ln w="12700">
+            <a:solidFill>
+              <a:srgbClr val="111111"/>
+            </a:solidFill>
+            <a:prstDash val="solid"/>
+          </a:ln>
+        </p:spPr>
+      </p:sp>
+      <p:sp>
+        <p:nvSpPr>
+          <p:cNvPr id="3" name="Text 1"/>
+          <p:cNvSpPr/>
+          <p:nvPr/>
+        </p:nvSpPr>
+        <p:spPr>
+          <a:xfrm>
+            <a:off x="548640" y="777240"/>
             <a:ext cx="8046720" cy="365760"/>
           </a:xfrm>
           <a:prstGeom prst="rect">
@@ -2865,9 +3045,9 @@
               <a:buNone/>
             </a:pPr>
             <a:r>
-              <a:rPr lang="en-US" sz="1600" dirty="0">
-                <a:solidFill>
-                  <a:srgbClr val="AAAAAA"/>
+              <a:rPr lang="en-US" sz="2400" b="1" dirty="0">
+                <a:solidFill>
+                  <a:srgbClr val="FFFFFF"/>
                 </a:solidFill>
                 <a:latin typeface="Arial" pitchFamily="34" charset="0"/>
                 <a:ea typeface="Arial" pitchFamily="34" charset="-122"/>
@@ -2875,20 +3055,179 @@
               </a:rPr>
               <a:t>Series Complete</a:t>
             </a:r>
-            <a:endParaRPr lang="en-US" sz="1600" dirty="0"/>
-          </a:p>
-        </p:txBody>
-      </p:sp>
-      <p:sp>
-        <p:nvSpPr>
-          <p:cNvPr id="3" name="Text 1"/>
-          <p:cNvSpPr/>
-          <p:nvPr/>
-        </p:nvSpPr>
-        <p:spPr>
-          <a:xfrm>
-            <a:off x="548640" y="1097280"/>
-            <a:ext cx="8046720" cy="457200"/>
+            <a:endParaRPr lang="en-US" sz="2400" dirty="0"/>
+          </a:p>
+        </p:txBody>
+      </p:sp>
+      <p:sp>
+        <p:nvSpPr>
+          <p:cNvPr id="4" name="Shape 2"/>
+          <p:cNvSpPr/>
+          <p:nvPr/>
+        </p:nvSpPr>
+        <p:spPr>
+          <a:xfrm>
+            <a:off x="548640" y="1234440"/>
+            <a:ext cx="1371600" cy="54864"/>
+          </a:xfrm>
+          <a:prstGeom prst="rect">
+            <a:avLst/>
+          </a:prstGeom>
+          <a:solidFill>
+            <a:srgbClr val="C9A227"/>
+          </a:solidFill>
+          <a:ln w="12700">
+            <a:solidFill>
+              <a:srgbClr val="C9A227"/>
+            </a:solidFill>
+            <a:prstDash val="solid"/>
+          </a:ln>
+        </p:spPr>
+      </p:sp>
+      <p:sp>
+        <p:nvSpPr>
+          <p:cNvPr id="5" name="Text 3"/>
+          <p:cNvSpPr/>
+          <p:nvPr/>
+        </p:nvSpPr>
+        <p:spPr>
+          <a:xfrm>
+            <a:off x="548640" y="1463040"/>
+            <a:ext cx="8046720" cy="320040"/>
+          </a:xfrm>
+          <a:prstGeom prst="rect">
+            <a:avLst/>
+          </a:prstGeom>
+          <a:noFill/>
+          <a:ln/>
+        </p:spPr>
+        <p:txBody>
+          <a:bodyPr wrap="square" lIns="0" tIns="0" rIns="0" bIns="0" rtlCol="0" anchor="ctr"/>
+          <a:lstStyle/>
+          <a:p>
+            <a:pPr indent="0" marL="0">
+              <a:buNone/>
+            </a:pPr>
+            <a:r>
+              <a:rPr lang="en-US" sz="1300" dirty="0">
+                <a:solidFill>
+                  <a:srgbClr val="C9A227"/>
+                </a:solidFill>
+                <a:latin typeface="Arial" pitchFamily="34" charset="0"/>
+                <a:ea typeface="Arial" pitchFamily="34" charset="-122"/>
+                <a:cs typeface="Arial" pitchFamily="34" charset="-120"/>
+              </a:rPr>
+              <a:t>Canvas  →  OKRs  →  Operating Model  →  Value Streams  →  Workforce Strategy</a:t>
+            </a:r>
+            <a:endParaRPr lang="en-US" sz="1300" dirty="0"/>
+          </a:p>
+        </p:txBody>
+      </p:sp>
+      <p:sp>
+        <p:nvSpPr>
+          <p:cNvPr id="6" name="Text 4"/>
+          <p:cNvSpPr/>
+          <p:nvPr/>
+        </p:nvSpPr>
+        <p:spPr>
+          <a:xfrm>
+            <a:off x="548640" y="1965960"/>
+            <a:ext cx="8046720" cy="640080"/>
+          </a:xfrm>
+          <a:prstGeom prst="rect">
+            <a:avLst/>
+          </a:prstGeom>
+          <a:noFill/>
+          <a:ln/>
+        </p:spPr>
+        <p:txBody>
+          <a:bodyPr wrap="square" lIns="0" tIns="0" rIns="0" bIns="0" rtlCol="0" anchor="ctr"/>
+          <a:lstStyle/>
+          <a:p>
+            <a:pPr indent="0" marL="0">
+              <a:buNone/>
+            </a:pPr>
+            <a:r>
+              <a:rPr lang="en-US" sz="1500" dirty="0">
+                <a:solidFill>
+                  <a:srgbClr val="C8C8C8"/>
+                </a:solidFill>
+                <a:latin typeface="Arial" pitchFamily="34" charset="0"/>
+                <a:ea typeface="Arial" pitchFamily="34" charset="-122"/>
+                <a:cs typeface="Arial" pitchFamily="34" charset="-120"/>
+              </a:rPr>
+              <a:t>Each tool now points in the same direction —</a:t>
+            </a:r>
+            <a:endParaRPr lang="en-US" sz="1500" dirty="0"/>
+          </a:p>
+          <a:p>
+            <a:pPr indent="0" marL="0">
+              <a:buNone/>
+            </a:pPr>
+            <a:r>
+              <a:rPr lang="en-US" sz="1500" dirty="0">
+                <a:solidFill>
+                  <a:srgbClr val="C8C8C8"/>
+                </a:solidFill>
+                <a:latin typeface="Arial" pitchFamily="34" charset="0"/>
+                <a:ea typeface="Arial" pitchFamily="34" charset="-122"/>
+                <a:cs typeface="Arial" pitchFamily="34" charset="-120"/>
+              </a:rPr>
+              <a:t>building sovereign American productive capability.</a:t>
+            </a:r>
+            <a:endParaRPr lang="en-US" sz="1500" dirty="0"/>
+          </a:p>
+        </p:txBody>
+      </p:sp>
+      <p:sp>
+        <p:nvSpPr>
+          <p:cNvPr id="7" name="Text 5"/>
+          <p:cNvSpPr/>
+          <p:nvPr/>
+        </p:nvSpPr>
+        <p:spPr>
+          <a:xfrm>
+            <a:off x="548640" y="2834640"/>
+            <a:ext cx="8046720" cy="502920"/>
+          </a:xfrm>
+          <a:prstGeom prst="rect">
+            <a:avLst/>
+          </a:prstGeom>
+          <a:noFill/>
+          <a:ln/>
+        </p:spPr>
+        <p:txBody>
+          <a:bodyPr wrap="square" lIns="0" tIns="0" rIns="0" bIns="0" rtlCol="0" anchor="ctr"/>
+          <a:lstStyle/>
+          <a:p>
+            <a:pPr indent="0" marL="0">
+              <a:buNone/>
+            </a:pPr>
+            <a:r>
+              <a:rPr lang="en-US" sz="1400" dirty="0">
+                <a:solidFill>
+                  <a:srgbClr val="A0A0A0"/>
+                </a:solidFill>
+                <a:latin typeface="Arial" pitchFamily="34" charset="0"/>
+                <a:ea typeface="Arial" pitchFamily="34" charset="-122"/>
+                <a:cs typeface="Arial" pitchFamily="34" charset="-120"/>
+              </a:rPr>
+              <a:t>For a concrete 90-day execution plan or ongoing Chief of Staff-style implementation support, reach out directly.</a:t>
+            </a:r>
+            <a:endParaRPr lang="en-US" sz="1400" dirty="0"/>
+          </a:p>
+        </p:txBody>
+      </p:sp>
+      <p:sp>
+        <p:nvSpPr>
+          <p:cNvPr id="8" name="Text 6"/>
+          <p:cNvSpPr/>
+          <p:nvPr/>
+        </p:nvSpPr>
+        <p:spPr>
+          <a:xfrm>
+            <a:off x="548640" y="3520440"/>
+            <a:ext cx="8046720" cy="274320"/>
           </a:xfrm>
           <a:prstGeom prst="rect">
             <a:avLst/>
@@ -2906,13 +3245,13 @@
             <a:r>
               <a:rPr lang="en-US" sz="1500" b="1" dirty="0">
                 <a:solidFill>
-                  <a:srgbClr val="F5F5F5"/>
-                </a:solidFill>
-                <a:latin typeface="Arial" pitchFamily="34" charset="0"/>
-                <a:ea typeface="Arial" pitchFamily="34" charset="-122"/>
-                <a:cs typeface="Arial" pitchFamily="34" charset="-120"/>
-              </a:rPr>
-              <a:t>Canvas  →  OKRs  →  Operating Model  →  Value Streams  →  Workforce Strategy</a:t>
+                  <a:srgbClr val="FFFFFF"/>
+                </a:solidFill>
+                <a:latin typeface="Arial" pitchFamily="34" charset="0"/>
+                <a:ea typeface="Arial" pitchFamily="34" charset="-122"/>
+                <a:cs typeface="Arial" pitchFamily="34" charset="-120"/>
+              </a:rPr>
+              <a:t>Joshua Konkle</a:t>
             </a:r>
             <a:endParaRPr lang="en-US" sz="1500" dirty="0"/>
           </a:p>
@@ -2920,174 +3259,79 @@
       </p:sp>
       <p:sp>
         <p:nvSpPr>
-          <p:cNvPr id="4" name="Text 2"/>
-          <p:cNvSpPr/>
-          <p:nvPr/>
-        </p:nvSpPr>
-        <p:spPr>
-          <a:xfrm>
-            <a:off x="548640" y="1737360"/>
-            <a:ext cx="8046720" cy="640080"/>
-          </a:xfrm>
-          <a:prstGeom prst="rect">
-            <a:avLst/>
-          </a:prstGeom>
-          <a:noFill/>
-          <a:ln/>
-        </p:spPr>
-        <p:txBody>
-          <a:bodyPr wrap="square" lIns="0" tIns="0" rIns="0" bIns="0" rtlCol="0" anchor="ctr"/>
-          <a:lstStyle/>
-          <a:p>
-            <a:pPr indent="0" marL="0">
-              <a:buNone/>
-            </a:pPr>
-            <a:r>
-              <a:rPr lang="en-US" sz="1600" dirty="0">
-                <a:solidFill>
-                  <a:srgbClr val="CCCCCC"/>
-                </a:solidFill>
-                <a:latin typeface="Arial" pitchFamily="34" charset="0"/>
-                <a:ea typeface="Arial" pitchFamily="34" charset="-122"/>
-                <a:cs typeface="Arial" pitchFamily="34" charset="-120"/>
-              </a:rPr>
-              <a:t>Each tool now points in the same direction —</a:t>
-            </a:r>
-            <a:endParaRPr lang="en-US" sz="1600" dirty="0"/>
-          </a:p>
-          <a:p>
-            <a:pPr indent="0" marL="0">
-              <a:buNone/>
-            </a:pPr>
-            <a:r>
-              <a:rPr lang="en-US" sz="1600" dirty="0">
-                <a:solidFill>
-                  <a:srgbClr val="CCCCCC"/>
-                </a:solidFill>
-                <a:latin typeface="Arial" pitchFamily="34" charset="0"/>
-                <a:ea typeface="Arial" pitchFamily="34" charset="-122"/>
-                <a:cs typeface="Arial" pitchFamily="34" charset="-120"/>
-              </a:rPr>
-              <a:t>building sovereign American productive capability.</a:t>
-            </a:r>
-            <a:endParaRPr lang="en-US" sz="1600" dirty="0"/>
-          </a:p>
-        </p:txBody>
-      </p:sp>
-      <p:sp>
-        <p:nvSpPr>
-          <p:cNvPr id="5" name="Text 3"/>
-          <p:cNvSpPr/>
-          <p:nvPr/>
-        </p:nvSpPr>
-        <p:spPr>
-          <a:xfrm>
-            <a:off x="548640" y="2560320"/>
-            <a:ext cx="8046720" cy="320040"/>
-          </a:xfrm>
-          <a:prstGeom prst="rect">
-            <a:avLst/>
-          </a:prstGeom>
-          <a:noFill/>
-          <a:ln/>
-        </p:spPr>
-        <p:txBody>
-          <a:bodyPr wrap="square" lIns="0" tIns="0" rIns="0" bIns="0" rtlCol="0" anchor="ctr"/>
-          <a:lstStyle/>
-          <a:p>
-            <a:pPr indent="0" marL="0">
-              <a:buNone/>
-            </a:pPr>
-            <a:r>
-              <a:rPr lang="en-US" sz="1800" b="1" dirty="0">
-                <a:solidFill>
-                  <a:srgbClr val="F5F5F5"/>
-                </a:solidFill>
-                <a:latin typeface="Arial" pitchFamily="34" charset="0"/>
-                <a:ea typeface="Arial" pitchFamily="34" charset="-122"/>
-                <a:cs typeface="Arial" pitchFamily="34" charset="-120"/>
-              </a:rPr>
-              <a:t>Next Steps</a:t>
-            </a:r>
-            <a:endParaRPr lang="en-US" sz="1800" dirty="0"/>
-          </a:p>
-        </p:txBody>
-      </p:sp>
-      <p:sp>
-        <p:nvSpPr>
-          <p:cNvPr id="6" name="Text 4"/>
-          <p:cNvSpPr/>
-          <p:nvPr/>
-        </p:nvSpPr>
-        <p:spPr>
-          <a:xfrm>
-            <a:off x="548640" y="2971800"/>
-            <a:ext cx="8046720" cy="457200"/>
-          </a:xfrm>
-          <a:prstGeom prst="rect">
-            <a:avLst/>
-          </a:prstGeom>
-          <a:noFill/>
-          <a:ln/>
-        </p:spPr>
-        <p:txBody>
-          <a:bodyPr wrap="square" lIns="0" tIns="0" rIns="0" bIns="0" rtlCol="0" anchor="ctr"/>
-          <a:lstStyle/>
-          <a:p>
-            <a:pPr indent="0" marL="0">
-              <a:buNone/>
-            </a:pPr>
-            <a:r>
-              <a:rPr lang="en-US" sz="1400" dirty="0">
-                <a:solidFill>
-                  <a:srgbClr val="CCCCCC"/>
-                </a:solidFill>
-                <a:latin typeface="Arial" pitchFamily="34" charset="0"/>
-                <a:ea typeface="Arial" pitchFamily="34" charset="-122"/>
-                <a:cs typeface="Arial" pitchFamily="34" charset="-120"/>
-              </a:rPr>
-              <a:t>For a concrete 90-day execution plan or ongoing Chief of Staff-style implementation support, reach out directly.</a:t>
-            </a:r>
-            <a:endParaRPr lang="en-US" sz="1400" dirty="0"/>
-          </a:p>
-        </p:txBody>
-      </p:sp>
-      <p:sp>
-        <p:nvSpPr>
-          <p:cNvPr id="7" name="Text 5"/>
-          <p:cNvSpPr/>
-          <p:nvPr/>
-        </p:nvSpPr>
-        <p:spPr>
-          <a:xfrm>
-            <a:off x="548640" y="3749040"/>
-            <a:ext cx="8046720" cy="365760"/>
-          </a:xfrm>
-          <a:prstGeom prst="rect">
-            <a:avLst/>
-          </a:prstGeom>
-          <a:noFill/>
-          <a:ln/>
-        </p:spPr>
-        <p:txBody>
-          <a:bodyPr wrap="square" lIns="0" tIns="0" rIns="0" bIns="0" rtlCol="0" anchor="ctr"/>
-          <a:lstStyle/>
-          <a:p>
-            <a:pPr indent="0" marL="0">
-              <a:buNone/>
-            </a:pPr>
-            <a:r>
-              <a:rPr lang="en-US" sz="1400" dirty="0">
-                <a:solidFill>
-                  <a:srgbClr val="F5F5F5"/>
-                </a:solidFill>
-                <a:latin typeface="Arial" pitchFamily="34" charset="0"/>
-                <a:ea typeface="Arial" pitchFamily="34" charset="-122"/>
-                <a:cs typeface="Arial" pitchFamily="34" charset="-120"/>
-              </a:rPr>
-              <a:t>Joshua Konkle  ·  @7SwanSwimming  ·  512-423-5448  ·  joshua@digitalknowledge.net</a:t>
-            </a:r>
-            <a:endParaRPr lang="en-US" sz="1400" dirty="0"/>
+          <p:cNvPr id="9" name="Text 7"/>
+          <p:cNvSpPr/>
+          <p:nvPr/>
+        </p:nvSpPr>
+        <p:spPr>
+          <a:xfrm>
+            <a:off x="548640" y="3840480"/>
+            <a:ext cx="8046720" cy="274320"/>
+          </a:xfrm>
+          <a:prstGeom prst="rect">
+            <a:avLst/>
+          </a:prstGeom>
+          <a:noFill/>
+          <a:ln/>
+        </p:spPr>
+        <p:txBody>
+          <a:bodyPr wrap="square" lIns="0" tIns="0" rIns="0" bIns="0" rtlCol="0" anchor="ctr"/>
+          <a:lstStyle/>
+          <a:p>
+            <a:pPr indent="0" marL="0">
+              <a:buNone/>
+            </a:pPr>
+            <a:r>
+              <a:rPr lang="en-US" sz="1300" dirty="0">
+                <a:solidFill>
+                  <a:srgbClr val="C9A227"/>
+                </a:solidFill>
+                <a:latin typeface="Arial" pitchFamily="34" charset="0"/>
+                <a:ea typeface="Arial" pitchFamily="34" charset="-122"/>
+                <a:cs typeface="Arial" pitchFamily="34" charset="-120"/>
+              </a:rPr>
+              <a:t>@7SwanSwimming  ·  512-423-5448  ·  joshua@digitalknowledge.net</a:t>
+            </a:r>
+            <a:endParaRPr lang="en-US" sz="1300" dirty="0"/>
+          </a:p>
+        </p:txBody>
+      </p:sp>
+      <p:sp>
+        <p:nvSpPr>
+          <p:cNvPr id="10" name="Text 8"/>
+          <p:cNvSpPr/>
+          <p:nvPr/>
+        </p:nvSpPr>
+        <p:spPr>
+          <a:xfrm>
+            <a:off x="548640" y="4663440"/>
+            <a:ext cx="8046720" cy="228600"/>
+          </a:xfrm>
+          <a:prstGeom prst="rect">
+            <a:avLst/>
+          </a:prstGeom>
+          <a:noFill/>
+          <a:ln/>
+        </p:spPr>
+        <p:txBody>
+          <a:bodyPr wrap="square" lIns="0" tIns="0" rIns="0" bIns="0" rtlCol="0" anchor="ctr"/>
+          <a:lstStyle/>
+          <a:p>
+            <a:pPr indent="0" marL="0">
+              <a:buNone/>
+            </a:pPr>
+            <a:r>
+              <a:rPr lang="en-US" sz="1100" dirty="0">
+                <a:solidFill>
+                  <a:srgbClr val="707070"/>
+                </a:solidFill>
+                <a:latin typeface="Arial" pitchFamily="34" charset="0"/>
+                <a:ea typeface="Arial" pitchFamily="34" charset="-122"/>
+                <a:cs typeface="Arial" pitchFamily="34" charset="-120"/>
+              </a:rPr>
+              <a:t>Copyright © 2026 Digital Knowledge / Patriots Locked In and In Control.</a:t>
+            </a:r>
+            <a:endParaRPr lang="en-US" sz="1100" dirty="0"/>
           </a:p>
         </p:txBody>
       </p:sp>
@@ -3102,13 +3346,6 @@
 <file path=ppt/slides/slide2.xml><?xml version="1.0" encoding="utf-8"?>
 <p:sld xmlns:a="http://schemas.openxmlformats.org/drawingml/2006/main" xmlns:r="http://schemas.openxmlformats.org/officeDocument/2006/relationships" xmlns:p="http://schemas.openxmlformats.org/presentationml/2006/main">
   <p:cSld name="Slide 2">
-    <p:bg>
-      <p:bgPr>
-        <a:solidFill>
-          <a:srgbClr val="FFFFFF"/>
-        </a:solidFill>
-      </p:bgPr>
-    </p:bg>
     <p:spTree>
       <p:nvGrpSpPr>
         <p:cNvPr id="1" name=""/>
@@ -3125,32 +3362,57 @@
       </p:grpSpPr>
       <p:sp>
         <p:nvSpPr>
-          <p:cNvPr id="2" name="Text 0"/>
-          <p:cNvSpPr/>
-          <p:nvPr/>
-        </p:nvSpPr>
-        <p:spPr>
-          <a:xfrm>
-            <a:off x="457200" y="320040"/>
-            <a:ext cx="8229600" cy="457200"/>
-          </a:xfrm>
-          <a:prstGeom prst="rect">
-            <a:avLst/>
-          </a:prstGeom>
-          <a:noFill/>
-          <a:ln/>
-        </p:spPr>
-        <p:txBody>
-          <a:bodyPr wrap="square" lIns="0" tIns="0" rIns="0" bIns="0" rtlCol="0" anchor="ctr"/>
-          <a:lstStyle/>
-          <a:p>
-            <a:pPr indent="0" marL="0">
-              <a:buNone/>
-            </a:pPr>
-            <a:r>
-              <a:rPr lang="en-US" sz="2800" b="1" dirty="0">
-                <a:solidFill>
-                  <a:srgbClr val="1A1A1A"/>
+          <p:cNvPr id="2" name="Shape 0"/>
+          <p:cNvSpPr/>
+          <p:nvPr/>
+        </p:nvSpPr>
+        <p:spPr>
+          <a:xfrm>
+            <a:off x="0" y="0"/>
+            <a:ext cx="9144000" cy="5143500"/>
+          </a:xfrm>
+          <a:prstGeom prst="rect">
+            <a:avLst/>
+          </a:prstGeom>
+          <a:solidFill>
+            <a:srgbClr val="FFFFFF"/>
+          </a:solidFill>
+          <a:ln w="12700">
+            <a:solidFill>
+              <a:srgbClr val="FFFFFF"/>
+            </a:solidFill>
+            <a:prstDash val="solid"/>
+          </a:ln>
+        </p:spPr>
+      </p:sp>
+      <p:sp>
+        <p:nvSpPr>
+          <p:cNvPr id="3" name="Text 1"/>
+          <p:cNvSpPr/>
+          <p:nvPr/>
+        </p:nvSpPr>
+        <p:spPr>
+          <a:xfrm>
+            <a:off x="457200" y="274320"/>
+            <a:ext cx="8229600" cy="365760"/>
+          </a:xfrm>
+          <a:prstGeom prst="rect">
+            <a:avLst/>
+          </a:prstGeom>
+          <a:noFill/>
+          <a:ln/>
+        </p:spPr>
+        <p:txBody>
+          <a:bodyPr wrap="square" lIns="0" tIns="0" rIns="0" bIns="0" rtlCol="0" anchor="ctr"/>
+          <a:lstStyle/>
+          <a:p>
+            <a:pPr indent="0" marL="0">
+              <a:buNone/>
+            </a:pPr>
+            <a:r>
+              <a:rPr lang="en-US" sz="2400" b="1" dirty="0">
+                <a:solidFill>
+                  <a:srgbClr val="1B2A4A"/>
                 </a:solidFill>
                 <a:latin typeface="Arial" pitchFamily="34" charset="0"/>
                 <a:ea typeface="Arial" pitchFamily="34" charset="-122"/>
@@ -3158,58 +3420,90 @@
               </a:rPr>
               <a:t>What You Will Leave With</a:t>
             </a:r>
-            <a:endParaRPr lang="en-US" sz="2800" dirty="0"/>
-          </a:p>
-        </p:txBody>
-      </p:sp>
-      <p:sp>
-        <p:nvSpPr>
-          <p:cNvPr id="3" name="Shape 1"/>
-          <p:cNvSpPr/>
-          <p:nvPr/>
-        </p:nvSpPr>
-        <p:spPr>
-          <a:xfrm>
-            <a:off x="457200" y="1051560"/>
-            <a:ext cx="73152" cy="548640"/>
-          </a:xfrm>
-          <a:prstGeom prst="rect">
-            <a:avLst/>
+            <a:endParaRPr lang="en-US" sz="2400" dirty="0"/>
+          </a:p>
+        </p:txBody>
+      </p:sp>
+      <p:sp>
+        <p:nvSpPr>
+          <p:cNvPr id="4" name="Shape 2"/>
+          <p:cNvSpPr/>
+          <p:nvPr/>
+        </p:nvSpPr>
+        <p:spPr>
+          <a:xfrm>
+            <a:off x="457200" y="868680"/>
+            <a:ext cx="8229600" cy="685800"/>
+          </a:xfrm>
+          <a:prstGeom prst="roundRect">
+            <a:avLst>
+              <a:gd name="adj" fmla="val 8000"/>
+            </a:avLst>
           </a:prstGeom>
           <a:solidFill>
-            <a:srgbClr val="1A1A1A"/>
+            <a:srgbClr val="F7F5F0"/>
           </a:solidFill>
-          <a:ln/>
-        </p:spPr>
-      </p:sp>
-      <p:sp>
-        <p:nvSpPr>
-          <p:cNvPr id="4" name="Text 2"/>
-          <p:cNvSpPr/>
-          <p:nvPr/>
-        </p:nvSpPr>
-        <p:spPr>
-          <a:xfrm>
-            <a:off x="777240" y="1051560"/>
-            <a:ext cx="7772400" cy="548640"/>
-          </a:xfrm>
-          <a:prstGeom prst="rect">
-            <a:avLst/>
-          </a:prstGeom>
-          <a:noFill/>
-          <a:ln/>
-        </p:spPr>
-        <p:txBody>
-          <a:bodyPr wrap="square" lIns="0" tIns="0" rIns="0" bIns="0" rtlCol="0" anchor="ctr"/>
-          <a:lstStyle/>
-          <a:p>
-            <a:pPr indent="0" marL="0">
-              <a:buNone/>
-            </a:pPr>
-            <a:r>
-              <a:rPr lang="en-US" sz="1500" dirty="0">
-                <a:solidFill>
-                  <a:srgbClr val="1A1A1A"/>
+          <a:ln w="12700">
+            <a:solidFill>
+              <a:srgbClr val="F7F5F0"/>
+            </a:solidFill>
+            <a:prstDash val="solid"/>
+          </a:ln>
+        </p:spPr>
+      </p:sp>
+      <p:sp>
+        <p:nvSpPr>
+          <p:cNvPr id="5" name="Shape 3"/>
+          <p:cNvSpPr/>
+          <p:nvPr/>
+        </p:nvSpPr>
+        <p:spPr>
+          <a:xfrm>
+            <a:off x="457200" y="868680"/>
+            <a:ext cx="73152" cy="685800"/>
+          </a:xfrm>
+          <a:prstGeom prst="rect">
+            <a:avLst/>
+          </a:prstGeom>
+          <a:solidFill>
+            <a:srgbClr val="C9A227"/>
+          </a:solidFill>
+          <a:ln w="12700">
+            <a:solidFill>
+              <a:srgbClr val="C9A227"/>
+            </a:solidFill>
+            <a:prstDash val="solid"/>
+          </a:ln>
+        </p:spPr>
+      </p:sp>
+      <p:sp>
+        <p:nvSpPr>
+          <p:cNvPr id="6" name="Text 4"/>
+          <p:cNvSpPr/>
+          <p:nvPr/>
+        </p:nvSpPr>
+        <p:spPr>
+          <a:xfrm>
+            <a:off x="731520" y="1033272"/>
+            <a:ext cx="7772400" cy="411480"/>
+          </a:xfrm>
+          <a:prstGeom prst="rect">
+            <a:avLst/>
+          </a:prstGeom>
+          <a:noFill/>
+          <a:ln/>
+        </p:spPr>
+        <p:txBody>
+          <a:bodyPr wrap="square" lIns="0" tIns="0" rIns="0" bIns="0" rtlCol="0" anchor="ctr"/>
+          <a:lstStyle/>
+          <a:p>
+            <a:pPr indent="0" marL="0">
+              <a:buNone/>
+            </a:pPr>
+            <a:r>
+              <a:rPr lang="en-US" sz="1400" dirty="0">
+                <a:solidFill>
+                  <a:srgbClr val="2A2A2A"/>
                 </a:solidFill>
                 <a:latin typeface="Arial" pitchFamily="34" charset="0"/>
                 <a:ea typeface="Arial" pitchFamily="34" charset="-122"/>
@@ -3217,58 +3511,90 @@
               </a:rPr>
               <a:t>Clarity on the difference between managing headcount and building sovereign capability</a:t>
             </a:r>
-            <a:endParaRPr lang="en-US" sz="1500" dirty="0"/>
-          </a:p>
-        </p:txBody>
-      </p:sp>
-      <p:sp>
-        <p:nvSpPr>
-          <p:cNvPr id="5" name="Shape 3"/>
-          <p:cNvSpPr/>
-          <p:nvPr/>
-        </p:nvSpPr>
-        <p:spPr>
-          <a:xfrm>
-            <a:off x="457200" y="1828800"/>
-            <a:ext cx="73152" cy="548640"/>
-          </a:xfrm>
-          <a:prstGeom prst="rect">
-            <a:avLst/>
+            <a:endParaRPr lang="en-US" sz="1400" dirty="0"/>
+          </a:p>
+        </p:txBody>
+      </p:sp>
+      <p:sp>
+        <p:nvSpPr>
+          <p:cNvPr id="7" name="Shape 5"/>
+          <p:cNvSpPr/>
+          <p:nvPr/>
+        </p:nvSpPr>
+        <p:spPr>
+          <a:xfrm>
+            <a:off x="457200" y="1691640"/>
+            <a:ext cx="8229600" cy="685800"/>
+          </a:xfrm>
+          <a:prstGeom prst="roundRect">
+            <a:avLst>
+              <a:gd name="adj" fmla="val 8000"/>
+            </a:avLst>
           </a:prstGeom>
           <a:solidFill>
-            <a:srgbClr val="1A1A1A"/>
+            <a:srgbClr val="F7F5F0"/>
           </a:solidFill>
-          <a:ln/>
-        </p:spPr>
-      </p:sp>
-      <p:sp>
-        <p:nvSpPr>
-          <p:cNvPr id="6" name="Text 4"/>
-          <p:cNvSpPr/>
-          <p:nvPr/>
-        </p:nvSpPr>
-        <p:spPr>
-          <a:xfrm>
-            <a:off x="777240" y="1828800"/>
-            <a:ext cx="7772400" cy="548640"/>
-          </a:xfrm>
-          <a:prstGeom prst="rect">
-            <a:avLst/>
-          </a:prstGeom>
-          <a:noFill/>
-          <a:ln/>
-        </p:spPr>
-        <p:txBody>
-          <a:bodyPr wrap="square" lIns="0" tIns="0" rIns="0" bIns="0" rtlCol="0" anchor="ctr"/>
-          <a:lstStyle/>
-          <a:p>
-            <a:pPr indent="0" marL="0">
-              <a:buNone/>
-            </a:pPr>
-            <a:r>
-              <a:rPr lang="en-US" sz="1500" dirty="0">
-                <a:solidFill>
-                  <a:srgbClr val="1A1A1A"/>
+          <a:ln w="12700">
+            <a:solidFill>
+              <a:srgbClr val="F7F5F0"/>
+            </a:solidFill>
+            <a:prstDash val="solid"/>
+          </a:ln>
+        </p:spPr>
+      </p:sp>
+      <p:sp>
+        <p:nvSpPr>
+          <p:cNvPr id="8" name="Shape 6"/>
+          <p:cNvSpPr/>
+          <p:nvPr/>
+        </p:nvSpPr>
+        <p:spPr>
+          <a:xfrm>
+            <a:off x="457200" y="1691640"/>
+            <a:ext cx="73152" cy="685800"/>
+          </a:xfrm>
+          <a:prstGeom prst="rect">
+            <a:avLst/>
+          </a:prstGeom>
+          <a:solidFill>
+            <a:srgbClr val="C9A227"/>
+          </a:solidFill>
+          <a:ln w="12700">
+            <a:solidFill>
+              <a:srgbClr val="C9A227"/>
+            </a:solidFill>
+            <a:prstDash val="solid"/>
+          </a:ln>
+        </p:spPr>
+      </p:sp>
+      <p:sp>
+        <p:nvSpPr>
+          <p:cNvPr id="9" name="Text 7"/>
+          <p:cNvSpPr/>
+          <p:nvPr/>
+        </p:nvSpPr>
+        <p:spPr>
+          <a:xfrm>
+            <a:off x="731520" y="1856232"/>
+            <a:ext cx="7772400" cy="411480"/>
+          </a:xfrm>
+          <a:prstGeom prst="rect">
+            <a:avLst/>
+          </a:prstGeom>
+          <a:noFill/>
+          <a:ln/>
+        </p:spPr>
+        <p:txBody>
+          <a:bodyPr wrap="square" lIns="0" tIns="0" rIns="0" bIns="0" rtlCol="0" anchor="ctr"/>
+          <a:lstStyle/>
+          <a:p>
+            <a:pPr indent="0" marL="0">
+              <a:buNone/>
+            </a:pPr>
+            <a:r>
+              <a:rPr lang="en-US" sz="1400" dirty="0">
+                <a:solidFill>
+                  <a:srgbClr val="2A2A2A"/>
                 </a:solidFill>
                 <a:latin typeface="Arial" pitchFamily="34" charset="0"/>
                 <a:ea typeface="Arial" pitchFamily="34" charset="-122"/>
@@ -3276,58 +3602,90 @@
               </a:rPr>
               <a:t>A practical frame for redesigning workforce strategy around American talent pipelines</a:t>
             </a:r>
-            <a:endParaRPr lang="en-US" sz="1500" dirty="0"/>
-          </a:p>
-        </p:txBody>
-      </p:sp>
-      <p:sp>
-        <p:nvSpPr>
-          <p:cNvPr id="7" name="Shape 5"/>
-          <p:cNvSpPr/>
-          <p:nvPr/>
-        </p:nvSpPr>
-        <p:spPr>
-          <a:xfrm>
-            <a:off x="457200" y="2606040"/>
-            <a:ext cx="73152" cy="548640"/>
-          </a:xfrm>
-          <a:prstGeom prst="rect">
-            <a:avLst/>
+            <a:endParaRPr lang="en-US" sz="1400" dirty="0"/>
+          </a:p>
+        </p:txBody>
+      </p:sp>
+      <p:sp>
+        <p:nvSpPr>
+          <p:cNvPr id="10" name="Shape 8"/>
+          <p:cNvSpPr/>
+          <p:nvPr/>
+        </p:nvSpPr>
+        <p:spPr>
+          <a:xfrm>
+            <a:off x="457200" y="2514600"/>
+            <a:ext cx="8229600" cy="685800"/>
+          </a:xfrm>
+          <a:prstGeom prst="roundRect">
+            <a:avLst>
+              <a:gd name="adj" fmla="val 8000"/>
+            </a:avLst>
           </a:prstGeom>
           <a:solidFill>
-            <a:srgbClr val="1A1A1A"/>
+            <a:srgbClr val="F7F5F0"/>
           </a:solidFill>
-          <a:ln/>
-        </p:spPr>
-      </p:sp>
-      <p:sp>
-        <p:nvSpPr>
-          <p:cNvPr id="8" name="Text 6"/>
-          <p:cNvSpPr/>
-          <p:nvPr/>
-        </p:nvSpPr>
-        <p:spPr>
-          <a:xfrm>
-            <a:off x="777240" y="2606040"/>
-            <a:ext cx="7772400" cy="548640"/>
-          </a:xfrm>
-          <a:prstGeom prst="rect">
-            <a:avLst/>
-          </a:prstGeom>
-          <a:noFill/>
-          <a:ln/>
-        </p:spPr>
-        <p:txBody>
-          <a:bodyPr wrap="square" lIns="0" tIns="0" rIns="0" bIns="0" rtlCol="0" anchor="ctr"/>
-          <a:lstStyle/>
-          <a:p>
-            <a:pPr indent="0" marL="0">
-              <a:buNone/>
-            </a:pPr>
-            <a:r>
-              <a:rPr lang="en-US" sz="1500" dirty="0">
-                <a:solidFill>
-                  <a:srgbClr val="1A1A1A"/>
+          <a:ln w="12700">
+            <a:solidFill>
+              <a:srgbClr val="F7F5F0"/>
+            </a:solidFill>
+            <a:prstDash val="solid"/>
+          </a:ln>
+        </p:spPr>
+      </p:sp>
+      <p:sp>
+        <p:nvSpPr>
+          <p:cNvPr id="11" name="Shape 9"/>
+          <p:cNvSpPr/>
+          <p:nvPr/>
+        </p:nvSpPr>
+        <p:spPr>
+          <a:xfrm>
+            <a:off x="457200" y="2514600"/>
+            <a:ext cx="73152" cy="685800"/>
+          </a:xfrm>
+          <a:prstGeom prst="rect">
+            <a:avLst/>
+          </a:prstGeom>
+          <a:solidFill>
+            <a:srgbClr val="C9A227"/>
+          </a:solidFill>
+          <a:ln w="12700">
+            <a:solidFill>
+              <a:srgbClr val="C9A227"/>
+            </a:solidFill>
+            <a:prstDash val="solid"/>
+          </a:ln>
+        </p:spPr>
+      </p:sp>
+      <p:sp>
+        <p:nvSpPr>
+          <p:cNvPr id="12" name="Text 10"/>
+          <p:cNvSpPr/>
+          <p:nvPr/>
+        </p:nvSpPr>
+        <p:spPr>
+          <a:xfrm>
+            <a:off x="731520" y="2679192"/>
+            <a:ext cx="7772400" cy="411480"/>
+          </a:xfrm>
+          <a:prstGeom prst="rect">
+            <a:avLst/>
+          </a:prstGeom>
+          <a:noFill/>
+          <a:ln/>
+        </p:spPr>
+        <p:txBody>
+          <a:bodyPr wrap="square" lIns="0" tIns="0" rIns="0" bIns="0" rtlCol="0" anchor="ctr"/>
+          <a:lstStyle/>
+          <a:p>
+            <a:pPr indent="0" marL="0">
+              <a:buNone/>
+            </a:pPr>
+            <a:r>
+              <a:rPr lang="en-US" sz="1400" dirty="0">
+                <a:solidFill>
+                  <a:srgbClr val="2A2A2A"/>
                 </a:solidFill>
                 <a:latin typeface="Arial" pitchFamily="34" charset="0"/>
                 <a:ea typeface="Arial" pitchFamily="34" charset="-122"/>
@@ -3335,58 +3693,90 @@
               </a:rPr>
               <a:t>A live policy example of sovereign workforce action in progress</a:t>
             </a:r>
-            <a:endParaRPr lang="en-US" sz="1500" dirty="0"/>
-          </a:p>
-        </p:txBody>
-      </p:sp>
-      <p:sp>
-        <p:nvSpPr>
-          <p:cNvPr id="9" name="Shape 7"/>
-          <p:cNvSpPr/>
-          <p:nvPr/>
-        </p:nvSpPr>
-        <p:spPr>
-          <a:xfrm>
-            <a:off x="457200" y="3383280"/>
-            <a:ext cx="73152" cy="548640"/>
-          </a:xfrm>
-          <a:prstGeom prst="rect">
-            <a:avLst/>
+            <a:endParaRPr lang="en-US" sz="1400" dirty="0"/>
+          </a:p>
+        </p:txBody>
+      </p:sp>
+      <p:sp>
+        <p:nvSpPr>
+          <p:cNvPr id="13" name="Shape 11"/>
+          <p:cNvSpPr/>
+          <p:nvPr/>
+        </p:nvSpPr>
+        <p:spPr>
+          <a:xfrm>
+            <a:off x="457200" y="3337560"/>
+            <a:ext cx="8229600" cy="685800"/>
+          </a:xfrm>
+          <a:prstGeom prst="roundRect">
+            <a:avLst>
+              <a:gd name="adj" fmla="val 8000"/>
+            </a:avLst>
           </a:prstGeom>
           <a:solidFill>
-            <a:srgbClr val="1A1A1A"/>
+            <a:srgbClr val="F7F5F0"/>
           </a:solidFill>
-          <a:ln/>
-        </p:spPr>
-      </p:sp>
-      <p:sp>
-        <p:nvSpPr>
-          <p:cNvPr id="10" name="Text 8"/>
-          <p:cNvSpPr/>
-          <p:nvPr/>
-        </p:nvSpPr>
-        <p:spPr>
-          <a:xfrm>
-            <a:off x="777240" y="3383280"/>
-            <a:ext cx="7772400" cy="548640"/>
-          </a:xfrm>
-          <a:prstGeom prst="rect">
-            <a:avLst/>
-          </a:prstGeom>
-          <a:noFill/>
-          <a:ln/>
-        </p:spPr>
-        <p:txBody>
-          <a:bodyPr wrap="square" lIns="0" tIns="0" rIns="0" bIns="0" rtlCol="0" anchor="ctr"/>
-          <a:lstStyle/>
-          <a:p>
-            <a:pPr indent="0" marL="0">
-              <a:buNone/>
-            </a:pPr>
-            <a:r>
-              <a:rPr lang="en-US" sz="1500" dirty="0">
-                <a:solidFill>
-                  <a:srgbClr val="1A1A1A"/>
+          <a:ln w="12700">
+            <a:solidFill>
+              <a:srgbClr val="F7F5F0"/>
+            </a:solidFill>
+            <a:prstDash val="solid"/>
+          </a:ln>
+        </p:spPr>
+      </p:sp>
+      <p:sp>
+        <p:nvSpPr>
+          <p:cNvPr id="14" name="Shape 12"/>
+          <p:cNvSpPr/>
+          <p:nvPr/>
+        </p:nvSpPr>
+        <p:spPr>
+          <a:xfrm>
+            <a:off x="457200" y="3337560"/>
+            <a:ext cx="73152" cy="685800"/>
+          </a:xfrm>
+          <a:prstGeom prst="rect">
+            <a:avLst/>
+          </a:prstGeom>
+          <a:solidFill>
+            <a:srgbClr val="C9A227"/>
+          </a:solidFill>
+          <a:ln w="12700">
+            <a:solidFill>
+              <a:srgbClr val="C9A227"/>
+            </a:solidFill>
+            <a:prstDash val="solid"/>
+          </a:ln>
+        </p:spPr>
+      </p:sp>
+      <p:sp>
+        <p:nvSpPr>
+          <p:cNvPr id="15" name="Text 13"/>
+          <p:cNvSpPr/>
+          <p:nvPr/>
+        </p:nvSpPr>
+        <p:spPr>
+          <a:xfrm>
+            <a:off x="731520" y="3502152"/>
+            <a:ext cx="7772400" cy="411480"/>
+          </a:xfrm>
+          <a:prstGeom prst="rect">
+            <a:avLst/>
+          </a:prstGeom>
+          <a:noFill/>
+          <a:ln/>
+        </p:spPr>
+        <p:txBody>
+          <a:bodyPr wrap="square" lIns="0" tIns="0" rIns="0" bIns="0" rtlCol="0" anchor="ctr"/>
+          <a:lstStyle/>
+          <a:p>
+            <a:pPr indent="0" marL="0">
+              <a:buNone/>
+            </a:pPr>
+            <a:r>
+              <a:rPr lang="en-US" sz="1400" dirty="0">
+                <a:solidFill>
+                  <a:srgbClr val="2A2A2A"/>
                 </a:solidFill>
                 <a:latin typeface="Arial" pitchFamily="34" charset="0"/>
                 <a:ea typeface="Arial" pitchFamily="34" charset="-122"/>
@@ -3394,38 +3784,38 @@
               </a:rPr>
               <a:t>An exercise to map one critical role family and begin building a real pipeline</a:t>
             </a:r>
-            <a:endParaRPr lang="en-US" sz="1500" dirty="0"/>
-          </a:p>
-        </p:txBody>
-      </p:sp>
-      <p:sp>
-        <p:nvSpPr>
-          <p:cNvPr id="11" name="Text 9"/>
+            <a:endParaRPr lang="en-US" sz="1400" dirty="0"/>
+          </a:p>
+        </p:txBody>
+      </p:sp>
+      <p:sp>
+        <p:nvSpPr>
+          <p:cNvPr id="16" name="Text 14"/>
           <p:cNvSpPr/>
           <p:nvPr/>
         </p:nvSpPr>
         <p:spPr>
           <a:xfrm>
             <a:off x="457200" y="4800600"/>
-            <a:ext cx="5943600" cy="228600"/>
-          </a:xfrm>
-          <a:prstGeom prst="rect">
-            <a:avLst/>
-          </a:prstGeom>
-          <a:noFill/>
-          <a:ln/>
-        </p:spPr>
-        <p:txBody>
-          <a:bodyPr wrap="square" lIns="0" tIns="0" rIns="0" bIns="0" rtlCol="0" anchor="ctr"/>
-          <a:lstStyle/>
-          <a:p>
-            <a:pPr indent="0" marL="0">
-              <a:buNone/>
-            </a:pPr>
-            <a:r>
-              <a:rPr lang="en-US" sz="1000" dirty="0">
-                <a:solidFill>
-                  <a:srgbClr val="555555"/>
+            <a:ext cx="5943600" cy="256032"/>
+          </a:xfrm>
+          <a:prstGeom prst="rect">
+            <a:avLst/>
+          </a:prstGeom>
+          <a:noFill/>
+          <a:ln/>
+        </p:spPr>
+        <p:txBody>
+          <a:bodyPr wrap="square" lIns="0" tIns="0" rIns="0" bIns="0" rtlCol="0" anchor="ctr"/>
+          <a:lstStyle/>
+          <a:p>
+            <a:pPr indent="0" marL="0">
+              <a:buNone/>
+            </a:pPr>
+            <a:r>
+              <a:rPr lang="en-US" sz="1100" dirty="0">
+                <a:solidFill>
+                  <a:srgbClr val="6A6A6A"/>
                 </a:solidFill>
                 <a:latin typeface="Arial" pitchFamily="34" charset="0"/>
                 <a:ea typeface="Arial" pitchFamily="34" charset="-122"/>
@@ -3433,20 +3823,20 @@
               </a:rPr>
               <a:t>Joshua Konkle  |  Chief of Staff Strategist</a:t>
             </a:r>
-            <a:endParaRPr lang="en-US" sz="1000" dirty="0"/>
-          </a:p>
-        </p:txBody>
-      </p:sp>
-      <p:sp>
-        <p:nvSpPr>
-          <p:cNvPr id="12" name="Text 10"/>
-          <p:cNvSpPr/>
-          <p:nvPr/>
-        </p:nvSpPr>
-        <p:spPr>
-          <a:xfrm>
-            <a:off x="7772400" y="4800600"/>
-            <a:ext cx="914400" cy="228600"/>
+            <a:endParaRPr lang="en-US" sz="1100" dirty="0"/>
+          </a:p>
+        </p:txBody>
+      </p:sp>
+      <p:sp>
+        <p:nvSpPr>
+          <p:cNvPr id="17" name="Text 15"/>
+          <p:cNvSpPr/>
+          <p:nvPr/>
+        </p:nvSpPr>
+        <p:spPr>
+          <a:xfrm>
+            <a:off x="7498080" y="4800600"/>
+            <a:ext cx="1188720" cy="256032"/>
           </a:xfrm>
           <a:prstGeom prst="rect">
             <a:avLst/>
@@ -3462,9 +3852,9 @@
               <a:buNone/>
             </a:pPr>
             <a:r>
-              <a:rPr lang="en-US" sz="1000" dirty="0">
-                <a:solidFill>
-                  <a:srgbClr val="555555"/>
+              <a:rPr lang="en-US" sz="1100" dirty="0">
+                <a:solidFill>
+                  <a:srgbClr val="6A6A6A"/>
                 </a:solidFill>
                 <a:latin typeface="Arial" pitchFamily="34" charset="0"/>
                 <a:ea typeface="Arial" pitchFamily="34" charset="-122"/>
@@ -3472,7 +3862,7 @@
               </a:rPr>
               <a:t>2 / 12</a:t>
             </a:r>
-            <a:endParaRPr lang="en-US" sz="1000" dirty="0"/>
+            <a:endParaRPr lang="en-US" sz="1100" dirty="0"/>
           </a:p>
         </p:txBody>
       </p:sp>
@@ -3487,13 +3877,6 @@
 <file path=ppt/slides/slide3.xml><?xml version="1.0" encoding="utf-8"?>
 <p:sld xmlns:a="http://schemas.openxmlformats.org/drawingml/2006/main" xmlns:r="http://schemas.openxmlformats.org/officeDocument/2006/relationships" xmlns:p="http://schemas.openxmlformats.org/presentationml/2006/main">
   <p:cSld name="Slide 3">
-    <p:bg>
-      <p:bgPr>
-        <a:solidFill>
-          <a:srgbClr val="FFFFFF"/>
-        </a:solidFill>
-      </p:bgPr>
-    </p:bg>
     <p:spTree>
       <p:nvGrpSpPr>
         <p:cNvPr id="1" name=""/>
@@ -3510,102 +3893,24 @@
       </p:grpSpPr>
       <p:sp>
         <p:nvSpPr>
-          <p:cNvPr id="2" name="Text 0"/>
-          <p:cNvSpPr/>
-          <p:nvPr/>
-        </p:nvSpPr>
-        <p:spPr>
-          <a:xfrm>
-            <a:off x="457200" y="320040"/>
-            <a:ext cx="8229600" cy="457200"/>
-          </a:xfrm>
-          <a:prstGeom prst="rect">
-            <a:avLst/>
-          </a:prstGeom>
-          <a:noFill/>
-          <a:ln/>
-        </p:spPr>
-        <p:txBody>
-          <a:bodyPr wrap="square" lIns="0" tIns="0" rIns="0" bIns="0" rtlCol="0" anchor="ctr"/>
-          <a:lstStyle/>
-          <a:p>
-            <a:pPr indent="0" marL="0">
-              <a:buNone/>
-            </a:pPr>
-            <a:r>
-              <a:rPr lang="en-US" sz="2600" b="1" dirty="0">
-                <a:solidFill>
-                  <a:srgbClr val="1A1A1A"/>
-                </a:solidFill>
-                <a:latin typeface="Arial" pitchFamily="34" charset="0"/>
-                <a:ea typeface="Arial" pitchFamily="34" charset="-122"/>
-                <a:cs typeface="Arial" pitchFamily="34" charset="-120"/>
-              </a:rPr>
-              <a:t>Completing the Series Arc</a:t>
-            </a:r>
-            <a:endParaRPr lang="en-US" sz="2600" dirty="0"/>
-          </a:p>
-        </p:txBody>
-      </p:sp>
-      <p:sp>
-        <p:nvSpPr>
-          <p:cNvPr id="3" name="Text 1"/>
-          <p:cNvSpPr/>
-          <p:nvPr/>
-        </p:nvSpPr>
-        <p:spPr>
-          <a:xfrm>
-            <a:off x="457200" y="914400"/>
-            <a:ext cx="8229600" cy="365760"/>
-          </a:xfrm>
-          <a:prstGeom prst="rect">
-            <a:avLst/>
-          </a:prstGeom>
-          <a:noFill/>
-          <a:ln/>
-        </p:spPr>
-        <p:txBody>
-          <a:bodyPr wrap="square" lIns="0" tIns="0" rIns="0" bIns="0" rtlCol="0" anchor="ctr"/>
-          <a:lstStyle/>
-          <a:p>
-            <a:pPr indent="0" marL="0">
-              <a:buNone/>
-            </a:pPr>
-            <a:r>
-              <a:rPr lang="en-US" sz="1600" dirty="0">
-                <a:solidFill>
-                  <a:srgbClr val="555555"/>
-                </a:solidFill>
-                <a:latin typeface="Arial" pitchFamily="34" charset="0"/>
-                <a:ea typeface="Arial" pitchFamily="34" charset="-122"/>
-                <a:cs typeface="Arial" pitchFamily="34" charset="-120"/>
-              </a:rPr>
-              <a:t>By this point the full arc is clear:</a:t>
-            </a:r>
-            <a:endParaRPr lang="en-US" sz="1600" dirty="0"/>
-          </a:p>
-        </p:txBody>
-      </p:sp>
-      <p:sp>
-        <p:nvSpPr>
-          <p:cNvPr id="4" name="Shape 2"/>
-          <p:cNvSpPr/>
-          <p:nvPr/>
-        </p:nvSpPr>
-        <p:spPr>
-          <a:xfrm>
-            <a:off x="365760" y="1554480"/>
-            <a:ext cx="1600200" cy="2103120"/>
+          <p:cNvPr id="2" name="Shape 0"/>
+          <p:cNvSpPr/>
+          <p:nvPr/>
+        </p:nvSpPr>
+        <p:spPr>
+          <a:xfrm>
+            <a:off x="0" y="0"/>
+            <a:ext cx="9144000" cy="5143500"/>
           </a:xfrm>
           <a:prstGeom prst="rect">
             <a:avLst/>
           </a:prstGeom>
           <a:solidFill>
-            <a:srgbClr val="F7F7F7"/>
+            <a:srgbClr val="FFFFFF"/>
           </a:solidFill>
           <a:ln w="12700">
             <a:solidFill>
-              <a:srgbClr val="CCCCCC"/>
+              <a:srgbClr val="FFFFFF"/>
             </a:solidFill>
             <a:prstDash val="solid"/>
           </a:ln>
@@ -3613,102 +3918,104 @@
       </p:sp>
       <p:sp>
         <p:nvSpPr>
-          <p:cNvPr id="5" name="Text 3"/>
-          <p:cNvSpPr/>
-          <p:nvPr/>
-        </p:nvSpPr>
-        <p:spPr>
-          <a:xfrm>
-            <a:off x="365760" y="1737360"/>
-            <a:ext cx="1600200" cy="457200"/>
-          </a:xfrm>
-          <a:prstGeom prst="rect">
-            <a:avLst/>
-          </a:prstGeom>
-          <a:noFill/>
-          <a:ln/>
-        </p:spPr>
-        <p:txBody>
-          <a:bodyPr wrap="square" lIns="0" tIns="0" rIns="0" bIns="0" rtlCol="0" anchor="ctr"/>
-          <a:lstStyle/>
-          <a:p>
-            <a:pPr algn="ctr" indent="0" marL="0">
-              <a:buNone/>
-            </a:pPr>
-            <a:r>
-              <a:rPr lang="en-US" sz="2400" b="1" dirty="0">
-                <a:solidFill>
-                  <a:srgbClr val="555555"/>
-                </a:solidFill>
-                <a:latin typeface="Arial" pitchFamily="34" charset="0"/>
-                <a:ea typeface="Arial" pitchFamily="34" charset="-122"/>
-                <a:cs typeface="Arial" pitchFamily="34" charset="-120"/>
-              </a:rPr>
-              <a:t>1</a:t>
-            </a:r>
-            <a:endParaRPr lang="en-US" sz="2400" dirty="0"/>
-          </a:p>
-        </p:txBody>
-      </p:sp>
-      <p:sp>
-        <p:nvSpPr>
-          <p:cNvPr id="6" name="Text 4"/>
-          <p:cNvSpPr/>
-          <p:nvPr/>
-        </p:nvSpPr>
-        <p:spPr>
-          <a:xfrm>
-            <a:off x="457200" y="2377440"/>
-            <a:ext cx="1417320" cy="914400"/>
-          </a:xfrm>
-          <a:prstGeom prst="rect">
-            <a:avLst/>
-          </a:prstGeom>
-          <a:noFill/>
-          <a:ln/>
-        </p:spPr>
-        <p:txBody>
-          <a:bodyPr wrap="square" lIns="0" tIns="0" rIns="0" bIns="0" rtlCol="0" anchor="ctr"/>
-          <a:lstStyle/>
-          <a:p>
-            <a:pPr algn="ctr" indent="0" marL="0">
-              <a:buNone/>
-            </a:pPr>
-            <a:r>
-              <a:rPr lang="en-US" sz="1200" b="1" dirty="0">
-                <a:solidFill>
-                  <a:srgbClr val="1A1A1A"/>
-                </a:solidFill>
-                <a:latin typeface="Arial" pitchFamily="34" charset="0"/>
-                <a:ea typeface="Arial" pitchFamily="34" charset="-122"/>
-                <a:cs typeface="Arial" pitchFamily="34" charset="-120"/>
-              </a:rPr>
-              <a:t>Business Model Canvas</a:t>
-            </a:r>
-            <a:endParaRPr lang="en-US" sz="1200" dirty="0"/>
-          </a:p>
-        </p:txBody>
-      </p:sp>
-      <p:sp>
-        <p:nvSpPr>
-          <p:cNvPr id="7" name="Shape 5"/>
-          <p:cNvSpPr/>
-          <p:nvPr/>
-        </p:nvSpPr>
-        <p:spPr>
-          <a:xfrm>
-            <a:off x="2103120" y="1554480"/>
-            <a:ext cx="1600200" cy="2103120"/>
-          </a:xfrm>
-          <a:prstGeom prst="rect">
-            <a:avLst/>
+          <p:cNvPr id="3" name="Text 1"/>
+          <p:cNvSpPr/>
+          <p:nvPr/>
+        </p:nvSpPr>
+        <p:spPr>
+          <a:xfrm>
+            <a:off x="457200" y="274320"/>
+            <a:ext cx="8229600" cy="365760"/>
+          </a:xfrm>
+          <a:prstGeom prst="rect">
+            <a:avLst/>
+          </a:prstGeom>
+          <a:noFill/>
+          <a:ln/>
+        </p:spPr>
+        <p:txBody>
+          <a:bodyPr wrap="square" lIns="0" tIns="0" rIns="0" bIns="0" rtlCol="0" anchor="ctr"/>
+          <a:lstStyle/>
+          <a:p>
+            <a:pPr indent="0" marL="0">
+              <a:buNone/>
+            </a:pPr>
+            <a:r>
+              <a:rPr lang="en-US" sz="2200" b="1" dirty="0">
+                <a:solidFill>
+                  <a:srgbClr val="1B2A4A"/>
+                </a:solidFill>
+                <a:latin typeface="Arial" pitchFamily="34" charset="0"/>
+                <a:ea typeface="Arial" pitchFamily="34" charset="-122"/>
+                <a:cs typeface="Arial" pitchFamily="34" charset="-120"/>
+              </a:rPr>
+              <a:t>Completing the Series Arc</a:t>
+            </a:r>
+            <a:endParaRPr lang="en-US" sz="2200" dirty="0"/>
+          </a:p>
+        </p:txBody>
+      </p:sp>
+      <p:sp>
+        <p:nvSpPr>
+          <p:cNvPr id="4" name="Text 2"/>
+          <p:cNvSpPr/>
+          <p:nvPr/>
+        </p:nvSpPr>
+        <p:spPr>
+          <a:xfrm>
+            <a:off x="457200" y="777240"/>
+            <a:ext cx="8229600" cy="320040"/>
+          </a:xfrm>
+          <a:prstGeom prst="rect">
+            <a:avLst/>
+          </a:prstGeom>
+          <a:noFill/>
+          <a:ln/>
+        </p:spPr>
+        <p:txBody>
+          <a:bodyPr wrap="square" lIns="0" tIns="0" rIns="0" bIns="0" rtlCol="0" anchor="ctr"/>
+          <a:lstStyle/>
+          <a:p>
+            <a:pPr indent="0" marL="0">
+              <a:buNone/>
+            </a:pPr>
+            <a:r>
+              <a:rPr lang="en-US" sz="1400" dirty="0">
+                <a:solidFill>
+                  <a:srgbClr val="5A5A5A"/>
+                </a:solidFill>
+                <a:latin typeface="Arial" pitchFamily="34" charset="0"/>
+                <a:ea typeface="Arial" pitchFamily="34" charset="-122"/>
+                <a:cs typeface="Arial" pitchFamily="34" charset="-120"/>
+              </a:rPr>
+              <a:t>By this point the full arc is clear:</a:t>
+            </a:r>
+            <a:endParaRPr lang="en-US" sz="1400" dirty="0"/>
+          </a:p>
+        </p:txBody>
+      </p:sp>
+      <p:sp>
+        <p:nvSpPr>
+          <p:cNvPr id="5" name="Shape 3"/>
+          <p:cNvSpPr/>
+          <p:nvPr/>
+        </p:nvSpPr>
+        <p:spPr>
+          <a:xfrm>
+            <a:off x="365760" y="1371600"/>
+            <a:ext cx="1600200" cy="2286000"/>
+          </a:xfrm>
+          <a:prstGeom prst="roundRect">
+            <a:avLst>
+              <a:gd name="adj" fmla="val 4571"/>
+            </a:avLst>
           </a:prstGeom>
           <a:solidFill>
-            <a:srgbClr val="F7F7F7"/>
+            <a:srgbClr val="F7F5F0"/>
           </a:solidFill>
           <a:ln w="12700">
             <a:solidFill>
-              <a:srgbClr val="CCCCCC"/>
+              <a:srgbClr val="F7F5F0"/>
             </a:solidFill>
             <a:prstDash val="solid"/>
           </a:ln>
@@ -3716,14 +4023,14 @@
       </p:sp>
       <p:sp>
         <p:nvSpPr>
-          <p:cNvPr id="8" name="Text 6"/>
-          <p:cNvSpPr/>
-          <p:nvPr/>
-        </p:nvSpPr>
-        <p:spPr>
-          <a:xfrm>
-            <a:off x="2103120" y="1737360"/>
-            <a:ext cx="1600200" cy="457200"/>
+          <p:cNvPr id="6" name="Text 4"/>
+          <p:cNvSpPr/>
+          <p:nvPr/>
+        </p:nvSpPr>
+        <p:spPr>
+          <a:xfrm>
+            <a:off x="365760" y="1645920"/>
+            <a:ext cx="1600200" cy="411480"/>
           </a:xfrm>
           <a:prstGeom prst="rect">
             <a:avLst/>
@@ -3739,30 +4046,30 @@
               <a:buNone/>
             </a:pPr>
             <a:r>
-              <a:rPr lang="en-US" sz="2400" b="1" dirty="0">
-                <a:solidFill>
-                  <a:srgbClr val="555555"/>
-                </a:solidFill>
-                <a:latin typeface="Arial" pitchFamily="34" charset="0"/>
-                <a:ea typeface="Arial" pitchFamily="34" charset="-122"/>
-                <a:cs typeface="Arial" pitchFamily="34" charset="-120"/>
-              </a:rPr>
-              <a:t>2</a:t>
-            </a:r>
-            <a:endParaRPr lang="en-US" sz="2400" dirty="0"/>
-          </a:p>
-        </p:txBody>
-      </p:sp>
-      <p:sp>
-        <p:nvSpPr>
-          <p:cNvPr id="9" name="Text 7"/>
-          <p:cNvSpPr/>
-          <p:nvPr/>
-        </p:nvSpPr>
-        <p:spPr>
-          <a:xfrm>
-            <a:off x="2194560" y="2377440"/>
-            <a:ext cx="1417320" cy="914400"/>
+              <a:rPr lang="en-US" sz="2200" b="1" dirty="0">
+                <a:solidFill>
+                  <a:srgbClr val="1B2A4A"/>
+                </a:solidFill>
+                <a:latin typeface="Arial" pitchFamily="34" charset="0"/>
+                <a:ea typeface="Arial" pitchFamily="34" charset="-122"/>
+                <a:cs typeface="Arial" pitchFamily="34" charset="-120"/>
+              </a:rPr>
+              <a:t>1</a:t>
+            </a:r>
+            <a:endParaRPr lang="en-US" sz="2200" dirty="0"/>
+          </a:p>
+        </p:txBody>
+      </p:sp>
+      <p:sp>
+        <p:nvSpPr>
+          <p:cNvPr id="7" name="Text 5"/>
+          <p:cNvSpPr/>
+          <p:nvPr/>
+        </p:nvSpPr>
+        <p:spPr>
+          <a:xfrm>
+            <a:off x="438912" y="2286000"/>
+            <a:ext cx="1463040" cy="914400"/>
           </a:xfrm>
           <a:prstGeom prst="rect">
             <a:avLst/>
@@ -3778,15 +4085,15 @@
               <a:buNone/>
             </a:pPr>
             <a:r>
-              <a:rPr lang="en-US" sz="1200" b="1" dirty="0">
-                <a:solidFill>
-                  <a:srgbClr val="1A1A1A"/>
-                </a:solidFill>
-                <a:latin typeface="Arial" pitchFamily="34" charset="0"/>
-                <a:ea typeface="Arial" pitchFamily="34" charset="-122"/>
-                <a:cs typeface="Arial" pitchFamily="34" charset="-120"/>
-              </a:rPr>
-              <a:t>OKRs as a System</a:t>
+              <a:rPr lang="en-US" sz="1200" dirty="0">
+                <a:solidFill>
+                  <a:srgbClr val="2A2A2A"/>
+                </a:solidFill>
+                <a:latin typeface="Arial" pitchFamily="34" charset="0"/>
+                <a:ea typeface="Arial" pitchFamily="34" charset="-122"/>
+                <a:cs typeface="Arial" pitchFamily="34" charset="-120"/>
+              </a:rPr>
+              <a:t>Business Model Canvas</a:t>
             </a:r>
             <a:endParaRPr lang="en-US" sz="1200" dirty="0"/>
           </a:p>
@@ -3794,24 +4101,26 @@
       </p:sp>
       <p:sp>
         <p:nvSpPr>
-          <p:cNvPr id="10" name="Shape 8"/>
-          <p:cNvSpPr/>
-          <p:nvPr/>
-        </p:nvSpPr>
-        <p:spPr>
-          <a:xfrm>
-            <a:off x="3840480" y="1554480"/>
-            <a:ext cx="1600200" cy="2103120"/>
-          </a:xfrm>
-          <a:prstGeom prst="rect">
-            <a:avLst/>
+          <p:cNvPr id="8" name="Shape 6"/>
+          <p:cNvSpPr/>
+          <p:nvPr/>
+        </p:nvSpPr>
+        <p:spPr>
+          <a:xfrm>
+            <a:off x="2103120" y="1371600"/>
+            <a:ext cx="1600200" cy="2286000"/>
+          </a:xfrm>
+          <a:prstGeom prst="roundRect">
+            <a:avLst>
+              <a:gd name="adj" fmla="val 4571"/>
+            </a:avLst>
           </a:prstGeom>
           <a:solidFill>
-            <a:srgbClr val="F7F7F7"/>
+            <a:srgbClr val="F7F5F0"/>
           </a:solidFill>
           <a:ln w="12700">
             <a:solidFill>
-              <a:srgbClr val="CCCCCC"/>
+              <a:srgbClr val="F7F5F0"/>
             </a:solidFill>
             <a:prstDash val="solid"/>
           </a:ln>
@@ -3819,14 +4128,14 @@
       </p:sp>
       <p:sp>
         <p:nvSpPr>
-          <p:cNvPr id="11" name="Text 9"/>
-          <p:cNvSpPr/>
-          <p:nvPr/>
-        </p:nvSpPr>
-        <p:spPr>
-          <a:xfrm>
-            <a:off x="3840480" y="1737360"/>
-            <a:ext cx="1600200" cy="457200"/>
+          <p:cNvPr id="9" name="Text 7"/>
+          <p:cNvSpPr/>
+          <p:nvPr/>
+        </p:nvSpPr>
+        <p:spPr>
+          <a:xfrm>
+            <a:off x="2103120" y="1645920"/>
+            <a:ext cx="1600200" cy="411480"/>
           </a:xfrm>
           <a:prstGeom prst="rect">
             <a:avLst/>
@@ -3842,30 +4151,30 @@
               <a:buNone/>
             </a:pPr>
             <a:r>
-              <a:rPr lang="en-US" sz="2400" b="1" dirty="0">
-                <a:solidFill>
-                  <a:srgbClr val="555555"/>
-                </a:solidFill>
-                <a:latin typeface="Arial" pitchFamily="34" charset="0"/>
-                <a:ea typeface="Arial" pitchFamily="34" charset="-122"/>
-                <a:cs typeface="Arial" pitchFamily="34" charset="-120"/>
-              </a:rPr>
-              <a:t>3</a:t>
-            </a:r>
-            <a:endParaRPr lang="en-US" sz="2400" dirty="0"/>
-          </a:p>
-        </p:txBody>
-      </p:sp>
-      <p:sp>
-        <p:nvSpPr>
-          <p:cNvPr id="12" name="Text 10"/>
-          <p:cNvSpPr/>
-          <p:nvPr/>
-        </p:nvSpPr>
-        <p:spPr>
-          <a:xfrm>
-            <a:off x="3931920" y="2377440"/>
-            <a:ext cx="1417320" cy="914400"/>
+              <a:rPr lang="en-US" sz="2200" b="1" dirty="0">
+                <a:solidFill>
+                  <a:srgbClr val="1B2A4A"/>
+                </a:solidFill>
+                <a:latin typeface="Arial" pitchFamily="34" charset="0"/>
+                <a:ea typeface="Arial" pitchFamily="34" charset="-122"/>
+                <a:cs typeface="Arial" pitchFamily="34" charset="-120"/>
+              </a:rPr>
+              <a:t>2</a:t>
+            </a:r>
+            <a:endParaRPr lang="en-US" sz="2200" dirty="0"/>
+          </a:p>
+        </p:txBody>
+      </p:sp>
+      <p:sp>
+        <p:nvSpPr>
+          <p:cNvPr id="10" name="Text 8"/>
+          <p:cNvSpPr/>
+          <p:nvPr/>
+        </p:nvSpPr>
+        <p:spPr>
+          <a:xfrm>
+            <a:off x="2176272" y="2286000"/>
+            <a:ext cx="1463040" cy="914400"/>
           </a:xfrm>
           <a:prstGeom prst="rect">
             <a:avLst/>
@@ -3881,15 +4190,15 @@
               <a:buNone/>
             </a:pPr>
             <a:r>
-              <a:rPr lang="en-US" sz="1200" b="1" dirty="0">
-                <a:solidFill>
-                  <a:srgbClr val="1A1A1A"/>
-                </a:solidFill>
-                <a:latin typeface="Arial" pitchFamily="34" charset="0"/>
-                <a:ea typeface="Arial" pitchFamily="34" charset="-122"/>
-                <a:cs typeface="Arial" pitchFamily="34" charset="-120"/>
-              </a:rPr>
-              <a:t>Operating Model + AI</a:t>
+              <a:rPr lang="en-US" sz="1200" dirty="0">
+                <a:solidFill>
+                  <a:srgbClr val="2A2A2A"/>
+                </a:solidFill>
+                <a:latin typeface="Arial" pitchFamily="34" charset="0"/>
+                <a:ea typeface="Arial" pitchFamily="34" charset="-122"/>
+                <a:cs typeface="Arial" pitchFamily="34" charset="-120"/>
+              </a:rPr>
+              <a:t>OKRs as a System</a:t>
             </a:r>
             <a:endParaRPr lang="en-US" sz="1200" dirty="0"/>
           </a:p>
@@ -3897,24 +4206,26 @@
       </p:sp>
       <p:sp>
         <p:nvSpPr>
-          <p:cNvPr id="13" name="Shape 11"/>
-          <p:cNvSpPr/>
-          <p:nvPr/>
-        </p:nvSpPr>
-        <p:spPr>
-          <a:xfrm>
-            <a:off x="5577840" y="1554480"/>
-            <a:ext cx="1600200" cy="2103120"/>
-          </a:xfrm>
-          <a:prstGeom prst="rect">
-            <a:avLst/>
+          <p:cNvPr id="11" name="Shape 9"/>
+          <p:cNvSpPr/>
+          <p:nvPr/>
+        </p:nvSpPr>
+        <p:spPr>
+          <a:xfrm>
+            <a:off x="3840480" y="1371600"/>
+            <a:ext cx="1600200" cy="2286000"/>
+          </a:xfrm>
+          <a:prstGeom prst="roundRect">
+            <a:avLst>
+              <a:gd name="adj" fmla="val 4571"/>
+            </a:avLst>
           </a:prstGeom>
           <a:solidFill>
-            <a:srgbClr val="F7F7F7"/>
+            <a:srgbClr val="F7F5F0"/>
           </a:solidFill>
           <a:ln w="12700">
             <a:solidFill>
-              <a:srgbClr val="CCCCCC"/>
+              <a:srgbClr val="F7F5F0"/>
             </a:solidFill>
             <a:prstDash val="solid"/>
           </a:ln>
@@ -3922,14 +4233,14 @@
       </p:sp>
       <p:sp>
         <p:nvSpPr>
-          <p:cNvPr id="14" name="Text 12"/>
-          <p:cNvSpPr/>
-          <p:nvPr/>
-        </p:nvSpPr>
-        <p:spPr>
-          <a:xfrm>
-            <a:off x="5577840" y="1737360"/>
-            <a:ext cx="1600200" cy="457200"/>
+          <p:cNvPr id="12" name="Text 10"/>
+          <p:cNvSpPr/>
+          <p:nvPr/>
+        </p:nvSpPr>
+        <p:spPr>
+          <a:xfrm>
+            <a:off x="3840480" y="1645920"/>
+            <a:ext cx="1600200" cy="411480"/>
           </a:xfrm>
           <a:prstGeom prst="rect">
             <a:avLst/>
@@ -3945,30 +4256,30 @@
               <a:buNone/>
             </a:pPr>
             <a:r>
-              <a:rPr lang="en-US" sz="2400" b="1" dirty="0">
-                <a:solidFill>
-                  <a:srgbClr val="555555"/>
-                </a:solidFill>
-                <a:latin typeface="Arial" pitchFamily="34" charset="0"/>
-                <a:ea typeface="Arial" pitchFamily="34" charset="-122"/>
-                <a:cs typeface="Arial" pitchFamily="34" charset="-120"/>
-              </a:rPr>
-              <a:t>4</a:t>
-            </a:r>
-            <a:endParaRPr lang="en-US" sz="2400" dirty="0"/>
-          </a:p>
-        </p:txBody>
-      </p:sp>
-      <p:sp>
-        <p:nvSpPr>
-          <p:cNvPr id="15" name="Text 13"/>
-          <p:cNvSpPr/>
-          <p:nvPr/>
-        </p:nvSpPr>
-        <p:spPr>
-          <a:xfrm>
-            <a:off x="5669280" y="2377440"/>
-            <a:ext cx="1417320" cy="914400"/>
+              <a:rPr lang="en-US" sz="2200" b="1" dirty="0">
+                <a:solidFill>
+                  <a:srgbClr val="1B2A4A"/>
+                </a:solidFill>
+                <a:latin typeface="Arial" pitchFamily="34" charset="0"/>
+                <a:ea typeface="Arial" pitchFamily="34" charset="-122"/>
+                <a:cs typeface="Arial" pitchFamily="34" charset="-120"/>
+              </a:rPr>
+              <a:t>3</a:t>
+            </a:r>
+            <a:endParaRPr lang="en-US" sz="2200" dirty="0"/>
+          </a:p>
+        </p:txBody>
+      </p:sp>
+      <p:sp>
+        <p:nvSpPr>
+          <p:cNvPr id="13" name="Text 11"/>
+          <p:cNvSpPr/>
+          <p:nvPr/>
+        </p:nvSpPr>
+        <p:spPr>
+          <a:xfrm>
+            <a:off x="3913632" y="2286000"/>
+            <a:ext cx="1463040" cy="914400"/>
           </a:xfrm>
           <a:prstGeom prst="rect">
             <a:avLst/>
@@ -3984,15 +4295,15 @@
               <a:buNone/>
             </a:pPr>
             <a:r>
-              <a:rPr lang="en-US" sz="1200" b="1" dirty="0">
-                <a:solidFill>
-                  <a:srgbClr val="1A1A1A"/>
-                </a:solidFill>
-                <a:latin typeface="Arial" pitchFamily="34" charset="0"/>
-                <a:ea typeface="Arial" pitchFamily="34" charset="-122"/>
-                <a:cs typeface="Arial" pitchFamily="34" charset="-120"/>
-              </a:rPr>
-              <a:t>Value Streams / Lean</a:t>
+              <a:rPr lang="en-US" sz="1200" dirty="0">
+                <a:solidFill>
+                  <a:srgbClr val="2A2A2A"/>
+                </a:solidFill>
+                <a:latin typeface="Arial" pitchFamily="34" charset="0"/>
+                <a:ea typeface="Arial" pitchFamily="34" charset="-122"/>
+                <a:cs typeface="Arial" pitchFamily="34" charset="-120"/>
+              </a:rPr>
+              <a:t>Operating Model + AI</a:t>
             </a:r>
             <a:endParaRPr lang="en-US" sz="1200" dirty="0"/>
           </a:p>
@@ -4000,24 +4311,26 @@
       </p:sp>
       <p:sp>
         <p:nvSpPr>
-          <p:cNvPr id="16" name="Shape 14"/>
-          <p:cNvSpPr/>
-          <p:nvPr/>
-        </p:nvSpPr>
-        <p:spPr>
-          <a:xfrm>
-            <a:off x="7315200" y="1554480"/>
-            <a:ext cx="1600200" cy="2103120"/>
-          </a:xfrm>
-          <a:prstGeom prst="rect">
-            <a:avLst/>
+          <p:cNvPr id="14" name="Shape 12"/>
+          <p:cNvSpPr/>
+          <p:nvPr/>
+        </p:nvSpPr>
+        <p:spPr>
+          <a:xfrm>
+            <a:off x="5577840" y="1371600"/>
+            <a:ext cx="1600200" cy="2286000"/>
+          </a:xfrm>
+          <a:prstGeom prst="roundRect">
+            <a:avLst>
+              <a:gd name="adj" fmla="val 4571"/>
+            </a:avLst>
           </a:prstGeom>
           <a:solidFill>
-            <a:srgbClr val="111111"/>
+            <a:srgbClr val="F7F5F0"/>
           </a:solidFill>
           <a:ln w="12700">
             <a:solidFill>
-              <a:srgbClr val="CCCCCC"/>
+              <a:srgbClr val="F7F5F0"/>
             </a:solidFill>
             <a:prstDash val="solid"/>
           </a:ln>
@@ -4025,14 +4338,14 @@
       </p:sp>
       <p:sp>
         <p:nvSpPr>
-          <p:cNvPr id="17" name="Text 15"/>
-          <p:cNvSpPr/>
-          <p:nvPr/>
-        </p:nvSpPr>
-        <p:spPr>
-          <a:xfrm>
-            <a:off x="7315200" y="1737360"/>
-            <a:ext cx="1600200" cy="457200"/>
+          <p:cNvPr id="15" name="Text 13"/>
+          <p:cNvSpPr/>
+          <p:nvPr/>
+        </p:nvSpPr>
+        <p:spPr>
+          <a:xfrm>
+            <a:off x="5577840" y="1645920"/>
+            <a:ext cx="1600200" cy="411480"/>
           </a:xfrm>
           <a:prstGeom prst="rect">
             <a:avLst/>
@@ -4048,9 +4361,139 @@
               <a:buNone/>
             </a:pPr>
             <a:r>
-              <a:rPr lang="en-US" sz="2400" b="1" dirty="0">
-                <a:solidFill>
-                  <a:srgbClr val="F5F5F5"/>
+              <a:rPr lang="en-US" sz="2200" b="1" dirty="0">
+                <a:solidFill>
+                  <a:srgbClr val="1B2A4A"/>
+                </a:solidFill>
+                <a:latin typeface="Arial" pitchFamily="34" charset="0"/>
+                <a:ea typeface="Arial" pitchFamily="34" charset="-122"/>
+                <a:cs typeface="Arial" pitchFamily="34" charset="-120"/>
+              </a:rPr>
+              <a:t>4</a:t>
+            </a:r>
+            <a:endParaRPr lang="en-US" sz="2200" dirty="0"/>
+          </a:p>
+        </p:txBody>
+      </p:sp>
+      <p:sp>
+        <p:nvSpPr>
+          <p:cNvPr id="16" name="Text 14"/>
+          <p:cNvSpPr/>
+          <p:nvPr/>
+        </p:nvSpPr>
+        <p:spPr>
+          <a:xfrm>
+            <a:off x="5650992" y="2286000"/>
+            <a:ext cx="1463040" cy="914400"/>
+          </a:xfrm>
+          <a:prstGeom prst="rect">
+            <a:avLst/>
+          </a:prstGeom>
+          <a:noFill/>
+          <a:ln/>
+        </p:spPr>
+        <p:txBody>
+          <a:bodyPr wrap="square" lIns="0" tIns="0" rIns="0" bIns="0" rtlCol="0" anchor="ctr"/>
+          <a:lstStyle/>
+          <a:p>
+            <a:pPr algn="ctr" indent="0" marL="0">
+              <a:buNone/>
+            </a:pPr>
+            <a:r>
+              <a:rPr lang="en-US" sz="1200" dirty="0">
+                <a:solidFill>
+                  <a:srgbClr val="2A2A2A"/>
+                </a:solidFill>
+                <a:latin typeface="Arial" pitchFamily="34" charset="0"/>
+                <a:ea typeface="Arial" pitchFamily="34" charset="-122"/>
+                <a:cs typeface="Arial" pitchFamily="34" charset="-120"/>
+              </a:rPr>
+              <a:t>Value Streams / Lean</a:t>
+            </a:r>
+            <a:endParaRPr lang="en-US" sz="1200" dirty="0"/>
+          </a:p>
+        </p:txBody>
+      </p:sp>
+      <p:sp>
+        <p:nvSpPr>
+          <p:cNvPr id="17" name="Shape 15"/>
+          <p:cNvSpPr/>
+          <p:nvPr/>
+        </p:nvSpPr>
+        <p:spPr>
+          <a:xfrm>
+            <a:off x="7315200" y="1371600"/>
+            <a:ext cx="1600200" cy="2286000"/>
+          </a:xfrm>
+          <a:prstGeom prst="roundRect">
+            <a:avLst>
+              <a:gd name="adj" fmla="val 4571"/>
+            </a:avLst>
+          </a:prstGeom>
+          <a:solidFill>
+            <a:srgbClr val="1B2A4A"/>
+          </a:solidFill>
+          <a:ln w="12700">
+            <a:solidFill>
+              <a:srgbClr val="1B2A4A"/>
+            </a:solidFill>
+            <a:prstDash val="solid"/>
+          </a:ln>
+        </p:spPr>
+      </p:sp>
+      <p:sp>
+        <p:nvSpPr>
+          <p:cNvPr id="18" name="Shape 16"/>
+          <p:cNvSpPr/>
+          <p:nvPr/>
+        </p:nvSpPr>
+        <p:spPr>
+          <a:xfrm>
+            <a:off x="7315200" y="1371600"/>
+            <a:ext cx="1600200" cy="73152"/>
+          </a:xfrm>
+          <a:prstGeom prst="rect">
+            <a:avLst/>
+          </a:prstGeom>
+          <a:solidFill>
+            <a:srgbClr val="C9A227"/>
+          </a:solidFill>
+          <a:ln w="12700">
+            <a:solidFill>
+              <a:srgbClr val="C9A227"/>
+            </a:solidFill>
+            <a:prstDash val="solid"/>
+          </a:ln>
+        </p:spPr>
+      </p:sp>
+      <p:sp>
+        <p:nvSpPr>
+          <p:cNvPr id="19" name="Text 17"/>
+          <p:cNvSpPr/>
+          <p:nvPr/>
+        </p:nvSpPr>
+        <p:spPr>
+          <a:xfrm>
+            <a:off x="7315200" y="1645920"/>
+            <a:ext cx="1600200" cy="411480"/>
+          </a:xfrm>
+          <a:prstGeom prst="rect">
+            <a:avLst/>
+          </a:prstGeom>
+          <a:noFill/>
+          <a:ln/>
+        </p:spPr>
+        <p:txBody>
+          <a:bodyPr wrap="square" lIns="0" tIns="0" rIns="0" bIns="0" rtlCol="0" anchor="ctr"/>
+          <a:lstStyle/>
+          <a:p>
+            <a:pPr algn="ctr" indent="0" marL="0">
+              <a:buNone/>
+            </a:pPr>
+            <a:r>
+              <a:rPr lang="en-US" sz="2200" b="1" dirty="0">
+                <a:solidFill>
+                  <a:srgbClr val="C9A227"/>
                 </a:solidFill>
                 <a:latin typeface="Arial" pitchFamily="34" charset="0"/>
                 <a:ea typeface="Arial" pitchFamily="34" charset="-122"/>
@@ -4058,20 +4501,20 @@
               </a:rPr>
               <a:t>5</a:t>
             </a:r>
-            <a:endParaRPr lang="en-US" sz="2400" dirty="0"/>
-          </a:p>
-        </p:txBody>
-      </p:sp>
-      <p:sp>
-        <p:nvSpPr>
-          <p:cNvPr id="18" name="Text 16"/>
-          <p:cNvSpPr/>
-          <p:nvPr/>
-        </p:nvSpPr>
-        <p:spPr>
-          <a:xfrm>
-            <a:off x="7406640" y="2377440"/>
-            <a:ext cx="1417320" cy="914400"/>
+            <a:endParaRPr lang="en-US" sz="2200" dirty="0"/>
+          </a:p>
+        </p:txBody>
+      </p:sp>
+      <p:sp>
+        <p:nvSpPr>
+          <p:cNvPr id="20" name="Text 18"/>
+          <p:cNvSpPr/>
+          <p:nvPr/>
+        </p:nvSpPr>
+        <p:spPr>
+          <a:xfrm>
+            <a:off x="7388352" y="2286000"/>
+            <a:ext cx="1463040" cy="914400"/>
           </a:xfrm>
           <a:prstGeom prst="rect">
             <a:avLst/>
@@ -4087,9 +4530,9 @@
               <a:buNone/>
             </a:pPr>
             <a:r>
-              <a:rPr lang="en-US" sz="1200" b="1" dirty="0">
-                <a:solidFill>
-                  <a:srgbClr val="F5F5F5"/>
+              <a:rPr lang="en-US" sz="1200" dirty="0">
+                <a:solidFill>
+                  <a:srgbClr val="FFFFFF"/>
                 </a:solidFill>
                 <a:latin typeface="Arial" pitchFamily="34" charset="0"/>
                 <a:ea typeface="Arial" pitchFamily="34" charset="-122"/>
@@ -4103,32 +4546,32 @@
       </p:sp>
       <p:sp>
         <p:nvSpPr>
-          <p:cNvPr id="19" name="Text 17"/>
+          <p:cNvPr id="21" name="Text 19"/>
           <p:cNvSpPr/>
           <p:nvPr/>
         </p:nvSpPr>
         <p:spPr>
           <a:xfrm>
             <a:off x="457200" y="4800600"/>
-            <a:ext cx="5943600" cy="228600"/>
-          </a:xfrm>
-          <a:prstGeom prst="rect">
-            <a:avLst/>
-          </a:prstGeom>
-          <a:noFill/>
-          <a:ln/>
-        </p:spPr>
-        <p:txBody>
-          <a:bodyPr wrap="square" lIns="0" tIns="0" rIns="0" bIns="0" rtlCol="0" anchor="ctr"/>
-          <a:lstStyle/>
-          <a:p>
-            <a:pPr indent="0" marL="0">
-              <a:buNone/>
-            </a:pPr>
-            <a:r>
-              <a:rPr lang="en-US" sz="1000" dirty="0">
-                <a:solidFill>
-                  <a:srgbClr val="555555"/>
+            <a:ext cx="5943600" cy="256032"/>
+          </a:xfrm>
+          <a:prstGeom prst="rect">
+            <a:avLst/>
+          </a:prstGeom>
+          <a:noFill/>
+          <a:ln/>
+        </p:spPr>
+        <p:txBody>
+          <a:bodyPr wrap="square" lIns="0" tIns="0" rIns="0" bIns="0" rtlCol="0" anchor="ctr"/>
+          <a:lstStyle/>
+          <a:p>
+            <a:pPr indent="0" marL="0">
+              <a:buNone/>
+            </a:pPr>
+            <a:r>
+              <a:rPr lang="en-US" sz="1100" dirty="0">
+                <a:solidFill>
+                  <a:srgbClr val="6A6A6A"/>
                 </a:solidFill>
                 <a:latin typeface="Arial" pitchFamily="34" charset="0"/>
                 <a:ea typeface="Arial" pitchFamily="34" charset="-122"/>
@@ -4136,20 +4579,20 @@
               </a:rPr>
               <a:t>Joshua Konkle  |  Chief of Staff Strategist</a:t>
             </a:r>
-            <a:endParaRPr lang="en-US" sz="1000" dirty="0"/>
-          </a:p>
-        </p:txBody>
-      </p:sp>
-      <p:sp>
-        <p:nvSpPr>
-          <p:cNvPr id="20" name="Text 18"/>
-          <p:cNvSpPr/>
-          <p:nvPr/>
-        </p:nvSpPr>
-        <p:spPr>
-          <a:xfrm>
-            <a:off x="7772400" y="4800600"/>
-            <a:ext cx="914400" cy="228600"/>
+            <a:endParaRPr lang="en-US" sz="1100" dirty="0"/>
+          </a:p>
+        </p:txBody>
+      </p:sp>
+      <p:sp>
+        <p:nvSpPr>
+          <p:cNvPr id="22" name="Text 20"/>
+          <p:cNvSpPr/>
+          <p:nvPr/>
+        </p:nvSpPr>
+        <p:spPr>
+          <a:xfrm>
+            <a:off x="7498080" y="4800600"/>
+            <a:ext cx="1188720" cy="256032"/>
           </a:xfrm>
           <a:prstGeom prst="rect">
             <a:avLst/>
@@ -4165,9 +4608,9 @@
               <a:buNone/>
             </a:pPr>
             <a:r>
-              <a:rPr lang="en-US" sz="1000" dirty="0">
-                <a:solidFill>
-                  <a:srgbClr val="555555"/>
+              <a:rPr lang="en-US" sz="1100" dirty="0">
+                <a:solidFill>
+                  <a:srgbClr val="6A6A6A"/>
                 </a:solidFill>
                 <a:latin typeface="Arial" pitchFamily="34" charset="0"/>
                 <a:ea typeface="Arial" pitchFamily="34" charset="-122"/>
@@ -4175,7 +4618,7 @@
               </a:rPr>
               <a:t>3 / 12</a:t>
             </a:r>
-            <a:endParaRPr lang="en-US" sz="1000" dirty="0"/>
+            <a:endParaRPr lang="en-US" sz="1100" dirty="0"/>
           </a:p>
         </p:txBody>
       </p:sp>
@@ -4190,13 +4633,6 @@
 <file path=ppt/slides/slide4.xml><?xml version="1.0" encoding="utf-8"?>
 <p:sld xmlns:a="http://schemas.openxmlformats.org/drawingml/2006/main" xmlns:r="http://schemas.openxmlformats.org/officeDocument/2006/relationships" xmlns:p="http://schemas.openxmlformats.org/presentationml/2006/main">
   <p:cSld name="Slide 4">
-    <p:bg>
-      <p:bgPr>
-        <a:solidFill>
-          <a:srgbClr val="FFFFFF"/>
-        </a:solidFill>
-      </p:bgPr>
-    </p:bg>
     <p:spTree>
       <p:nvGrpSpPr>
         <p:cNvPr id="1" name=""/>
@@ -4213,32 +4649,57 @@
       </p:grpSpPr>
       <p:sp>
         <p:nvSpPr>
-          <p:cNvPr id="2" name="Text 0"/>
-          <p:cNvSpPr/>
-          <p:nvPr/>
-        </p:nvSpPr>
-        <p:spPr>
-          <a:xfrm>
-            <a:off x="457200" y="274320"/>
-            <a:ext cx="8229600" cy="411480"/>
-          </a:xfrm>
-          <a:prstGeom prst="rect">
-            <a:avLst/>
-          </a:prstGeom>
-          <a:noFill/>
-          <a:ln/>
-        </p:spPr>
-        <p:txBody>
-          <a:bodyPr wrap="square" lIns="0" tIns="0" rIns="0" bIns="0" rtlCol="0" anchor="ctr"/>
-          <a:lstStyle/>
-          <a:p>
-            <a:pPr indent="0" marL="0">
-              <a:buNone/>
-            </a:pPr>
-            <a:r>
-              <a:rPr lang="en-US" sz="2400" b="1" dirty="0">
-                <a:solidFill>
-                  <a:srgbClr val="1A1A1A"/>
+          <p:cNvPr id="2" name="Shape 0"/>
+          <p:cNvSpPr/>
+          <p:nvPr/>
+        </p:nvSpPr>
+        <p:spPr>
+          <a:xfrm>
+            <a:off x="0" y="0"/>
+            <a:ext cx="9144000" cy="5143500"/>
+          </a:xfrm>
+          <a:prstGeom prst="rect">
+            <a:avLst/>
+          </a:prstGeom>
+          <a:solidFill>
+            <a:srgbClr val="FFFFFF"/>
+          </a:solidFill>
+          <a:ln w="12700">
+            <a:solidFill>
+              <a:srgbClr val="FFFFFF"/>
+            </a:solidFill>
+            <a:prstDash val="solid"/>
+          </a:ln>
+        </p:spPr>
+      </p:sp>
+      <p:sp>
+        <p:nvSpPr>
+          <p:cNvPr id="3" name="Text 1"/>
+          <p:cNvSpPr/>
+          <p:nvPr/>
+        </p:nvSpPr>
+        <p:spPr>
+          <a:xfrm>
+            <a:off x="457200" y="201168"/>
+            <a:ext cx="8229600" cy="320040"/>
+          </a:xfrm>
+          <a:prstGeom prst="rect">
+            <a:avLst/>
+          </a:prstGeom>
+          <a:noFill/>
+          <a:ln/>
+        </p:spPr>
+        <p:txBody>
+          <a:bodyPr wrap="square" lIns="0" tIns="0" rIns="0" bIns="0" rtlCol="0" anchor="ctr"/>
+          <a:lstStyle/>
+          <a:p>
+            <a:pPr indent="0" marL="0">
+              <a:buNone/>
+            </a:pPr>
+            <a:r>
+              <a:rPr lang="en-US" sz="2200" b="1" dirty="0">
+                <a:solidFill>
+                  <a:srgbClr val="1B2A4A"/>
                 </a:solidFill>
                 <a:latin typeface="Arial" pitchFamily="34" charset="0"/>
                 <a:ea typeface="Arial" pitchFamily="34" charset="-122"/>
@@ -4246,38 +4707,38 @@
               </a:rPr>
               <a:t>The Productive Pragmatism Frame</a:t>
             </a:r>
-            <a:endParaRPr lang="en-US" sz="2400" dirty="0"/>
-          </a:p>
-        </p:txBody>
-      </p:sp>
-      <p:sp>
-        <p:nvSpPr>
-          <p:cNvPr id="3" name="Text 1"/>
-          <p:cNvSpPr/>
-          <p:nvPr/>
-        </p:nvSpPr>
-        <p:spPr>
-          <a:xfrm>
-            <a:off x="457200" y="777240"/>
-            <a:ext cx="8229600" cy="457200"/>
-          </a:xfrm>
-          <a:prstGeom prst="rect">
-            <a:avLst/>
-          </a:prstGeom>
-          <a:noFill/>
-          <a:ln/>
-        </p:spPr>
-        <p:txBody>
-          <a:bodyPr wrap="square" lIns="0" tIns="0" rIns="0" bIns="0" rtlCol="0" anchor="ctr"/>
-          <a:lstStyle/>
-          <a:p>
-            <a:pPr indent="0" marL="0">
-              <a:buNone/>
-            </a:pPr>
-            <a:r>
-              <a:rPr lang="en-US" sz="1400" dirty="0">
-                <a:solidFill>
-                  <a:srgbClr val="555555"/>
+            <a:endParaRPr lang="en-US" sz="2200" dirty="0"/>
+          </a:p>
+        </p:txBody>
+      </p:sp>
+      <p:sp>
+        <p:nvSpPr>
+          <p:cNvPr id="4" name="Text 2"/>
+          <p:cNvSpPr/>
+          <p:nvPr/>
+        </p:nvSpPr>
+        <p:spPr>
+          <a:xfrm>
+            <a:off x="457200" y="530352"/>
+            <a:ext cx="8229600" cy="320040"/>
+          </a:xfrm>
+          <a:prstGeom prst="rect">
+            <a:avLst/>
+          </a:prstGeom>
+          <a:noFill/>
+          <a:ln/>
+        </p:spPr>
+        <p:txBody>
+          <a:bodyPr wrap="square" lIns="0" tIns="0" rIns="0" bIns="0" rtlCol="0" anchor="ctr"/>
+          <a:lstStyle/>
+          <a:p>
+            <a:pPr indent="0" marL="0">
+              <a:buNone/>
+            </a:pPr>
+            <a:r>
+              <a:rPr lang="en-US" sz="1300" dirty="0">
+                <a:solidFill>
+                  <a:srgbClr val="5A5A5A"/>
                 </a:solidFill>
                 <a:latin typeface="Arial" pitchFamily="34" charset="0"/>
                 <a:ea typeface="Arial" pitchFamily="34" charset="-122"/>
@@ -4285,20 +4746,20 @@
               </a:rPr>
               <a:t>Workforce strategy is no longer a support function — it is one of the primary ways an organization builds or erodes long-term competitive position</a:t>
             </a:r>
-            <a:endParaRPr lang="en-US" sz="1400" dirty="0"/>
-          </a:p>
-        </p:txBody>
-      </p:sp>
-      <p:sp>
-        <p:nvSpPr>
-          <p:cNvPr id="4" name="Text 2"/>
-          <p:cNvSpPr/>
-          <p:nvPr/>
-        </p:nvSpPr>
-        <p:spPr>
-          <a:xfrm>
-            <a:off x="457200" y="1371600"/>
-            <a:ext cx="640080" cy="548640"/>
+            <a:endParaRPr lang="en-US" sz="1300" dirty="0"/>
+          </a:p>
+        </p:txBody>
+      </p:sp>
+      <p:sp>
+        <p:nvSpPr>
+          <p:cNvPr id="5" name="Text 3"/>
+          <p:cNvSpPr/>
+          <p:nvPr/>
+        </p:nvSpPr>
+        <p:spPr>
+          <a:xfrm>
+            <a:off x="457200" y="1078992"/>
+            <a:ext cx="640080" cy="365760"/>
           </a:xfrm>
           <a:prstGeom prst="rect">
             <a:avLst/>
@@ -4316,7 +4777,7 @@
             <a:r>
               <a:rPr lang="en-US" sz="1800" b="1" dirty="0">
                 <a:solidFill>
-                  <a:srgbClr val="555555"/>
+                  <a:srgbClr val="C9A227"/>
                 </a:solidFill>
                 <a:latin typeface="Arial" pitchFamily="34" charset="0"/>
                 <a:ea typeface="Arial" pitchFamily="34" charset="-122"/>
@@ -4330,13 +4791,13 @@
       </p:sp>
       <p:sp>
         <p:nvSpPr>
-          <p:cNvPr id="5" name="Text 3"/>
-          <p:cNvSpPr/>
-          <p:nvPr/>
-        </p:nvSpPr>
-        <p:spPr>
-          <a:xfrm>
-            <a:off x="1280160" y="1371600"/>
+          <p:cNvPr id="6" name="Text 4"/>
+          <p:cNvSpPr/>
+          <p:nvPr/>
+        </p:nvSpPr>
+        <p:spPr>
+          <a:xfrm>
+            <a:off x="1234440" y="1005840"/>
             <a:ext cx="7132320" cy="256032"/>
           </a:xfrm>
           <a:prstGeom prst="rect">
@@ -4355,7 +4816,7 @@
             <a:r>
               <a:rPr lang="en-US" sz="1500" b="1" dirty="0">
                 <a:solidFill>
-                  <a:srgbClr val="1A1A1A"/>
+                  <a:srgbClr val="1B2A4A"/>
                 </a:solidFill>
                 <a:latin typeface="Arial" pitchFamily="34" charset="0"/>
                 <a:ea typeface="Arial" pitchFamily="34" charset="-122"/>
@@ -4369,13 +4830,91 @@
       </p:sp>
       <p:sp>
         <p:nvSpPr>
-          <p:cNvPr id="6" name="Text 4"/>
-          <p:cNvSpPr/>
-          <p:nvPr/>
-        </p:nvSpPr>
-        <p:spPr>
-          <a:xfrm>
-            <a:off x="1280160" y="1627632"/>
+          <p:cNvPr id="7" name="Text 5"/>
+          <p:cNvSpPr/>
+          <p:nvPr/>
+        </p:nvSpPr>
+        <p:spPr>
+          <a:xfrm>
+            <a:off x="1234440" y="1280160"/>
+            <a:ext cx="7132320" cy="320040"/>
+          </a:xfrm>
+          <a:prstGeom prst="rect">
+            <a:avLst/>
+          </a:prstGeom>
+          <a:noFill/>
+          <a:ln/>
+        </p:spPr>
+        <p:txBody>
+          <a:bodyPr wrap="square" lIns="0" tIns="0" rIns="0" bIns="0" rtlCol="0" anchor="ctr"/>
+          <a:lstStyle/>
+          <a:p>
+            <a:pPr indent="0" marL="0">
+              <a:buNone/>
+            </a:pPr>
+            <a:r>
+              <a:rPr lang="en-US" sz="1300" dirty="0">
+                <a:solidFill>
+                  <a:srgbClr val="2A2A2A"/>
+                </a:solidFill>
+                <a:latin typeface="Arial" pitchFamily="34" charset="0"/>
+                <a:ea typeface="Arial" pitchFamily="34" charset="-122"/>
+                <a:cs typeface="Arial" pitchFamily="34" charset="-120"/>
+              </a:rPr>
+              <a:t>Build and control critical capabilities inside the United States</a:t>
+            </a:r>
+            <a:endParaRPr lang="en-US" sz="1300" dirty="0"/>
+          </a:p>
+        </p:txBody>
+      </p:sp>
+      <p:sp>
+        <p:nvSpPr>
+          <p:cNvPr id="8" name="Text 6"/>
+          <p:cNvSpPr/>
+          <p:nvPr/>
+        </p:nvSpPr>
+        <p:spPr>
+          <a:xfrm>
+            <a:off x="457200" y="1901952"/>
+            <a:ext cx="640080" cy="365760"/>
+          </a:xfrm>
+          <a:prstGeom prst="rect">
+            <a:avLst/>
+          </a:prstGeom>
+          <a:noFill/>
+          <a:ln/>
+        </p:spPr>
+        <p:txBody>
+          <a:bodyPr wrap="square" lIns="0" tIns="0" rIns="0" bIns="0" rtlCol="0" anchor="ctr"/>
+          <a:lstStyle/>
+          <a:p>
+            <a:pPr indent="0" marL="0">
+              <a:buNone/>
+            </a:pPr>
+            <a:r>
+              <a:rPr lang="en-US" sz="1800" b="1" dirty="0">
+                <a:solidFill>
+                  <a:srgbClr val="C9A227"/>
+                </a:solidFill>
+                <a:latin typeface="Arial" pitchFamily="34" charset="0"/>
+                <a:ea typeface="Arial" pitchFamily="34" charset="-122"/>
+                <a:cs typeface="Arial" pitchFamily="34" charset="-120"/>
+              </a:rPr>
+              <a:t>02</a:t>
+            </a:r>
+            <a:endParaRPr lang="en-US" sz="1800" dirty="0"/>
+          </a:p>
+        </p:txBody>
+      </p:sp>
+      <p:sp>
+        <p:nvSpPr>
+          <p:cNvPr id="9" name="Text 7"/>
+          <p:cNvSpPr/>
+          <p:nvPr/>
+        </p:nvSpPr>
+        <p:spPr>
+          <a:xfrm>
+            <a:off x="1234440" y="1828800"/>
             <a:ext cx="7132320" cy="256032"/>
           </a:xfrm>
           <a:prstGeom prst="rect">
@@ -4392,15 +4931,54 @@
               <a:buNone/>
             </a:pPr>
             <a:r>
+              <a:rPr lang="en-US" sz="1500" b="1" dirty="0">
+                <a:solidFill>
+                  <a:srgbClr val="1B2A4A"/>
+                </a:solidFill>
+                <a:latin typeface="Arial" pitchFamily="34" charset="0"/>
+                <a:ea typeface="Arial" pitchFamily="34" charset="-122"/>
+                <a:cs typeface="Arial" pitchFamily="34" charset="-120"/>
+              </a:rPr>
+              <a:t>Merit &amp; Capability</a:t>
+            </a:r>
+            <a:endParaRPr lang="en-US" sz="1500" dirty="0"/>
+          </a:p>
+        </p:txBody>
+      </p:sp>
+      <p:sp>
+        <p:nvSpPr>
+          <p:cNvPr id="10" name="Text 8"/>
+          <p:cNvSpPr/>
+          <p:nvPr/>
+        </p:nvSpPr>
+        <p:spPr>
+          <a:xfrm>
+            <a:off x="1234440" y="2103120"/>
+            <a:ext cx="7132320" cy="320040"/>
+          </a:xfrm>
+          <a:prstGeom prst="rect">
+            <a:avLst/>
+          </a:prstGeom>
+          <a:noFill/>
+          <a:ln/>
+        </p:spPr>
+        <p:txBody>
+          <a:bodyPr wrap="square" lIns="0" tIns="0" rIns="0" bIns="0" rtlCol="0" anchor="ctr"/>
+          <a:lstStyle/>
+          <a:p>
+            <a:pPr indent="0" marL="0">
+              <a:buNone/>
+            </a:pPr>
+            <a:r>
               <a:rPr lang="en-US" sz="1300" dirty="0">
                 <a:solidFill>
-                  <a:srgbClr val="555555"/>
-                </a:solidFill>
-                <a:latin typeface="Arial" pitchFamily="34" charset="0"/>
-                <a:ea typeface="Arial" pitchFamily="34" charset="-122"/>
-                <a:cs typeface="Arial" pitchFamily="34" charset="-120"/>
-              </a:rPr>
-              <a:t>Critical capabilities controlled and staffed inside the United States</a:t>
+                  <a:srgbClr val="2A2A2A"/>
+                </a:solidFill>
+                <a:latin typeface="Arial" pitchFamily="34" charset="0"/>
+                <a:ea typeface="Arial" pitchFamily="34" charset="-122"/>
+                <a:cs typeface="Arial" pitchFamily="34" charset="-120"/>
+              </a:rPr>
+              <a:t>Develop real skill among American citizens with long-term stake</a:t>
             </a:r>
             <a:endParaRPr lang="en-US" sz="1300" dirty="0"/>
           </a:p>
@@ -4408,14 +4986,14 @@
       </p:sp>
       <p:sp>
         <p:nvSpPr>
-          <p:cNvPr id="7" name="Text 5"/>
-          <p:cNvSpPr/>
-          <p:nvPr/>
-        </p:nvSpPr>
-        <p:spPr>
-          <a:xfrm>
-            <a:off x="457200" y="2103120"/>
-            <a:ext cx="640080" cy="548640"/>
+          <p:cNvPr id="11" name="Text 9"/>
+          <p:cNvSpPr/>
+          <p:nvPr/>
+        </p:nvSpPr>
+        <p:spPr>
+          <a:xfrm>
+            <a:off x="457200" y="2724912"/>
+            <a:ext cx="640080" cy="365760"/>
           </a:xfrm>
           <a:prstGeom prst="rect">
             <a:avLst/>
@@ -4433,13 +5011,13 @@
             <a:r>
               <a:rPr lang="en-US" sz="1800" b="1" dirty="0">
                 <a:solidFill>
-                  <a:srgbClr val="555555"/>
-                </a:solidFill>
-                <a:latin typeface="Arial" pitchFamily="34" charset="0"/>
-                <a:ea typeface="Arial" pitchFamily="34" charset="-122"/>
-                <a:cs typeface="Arial" pitchFamily="34" charset="-120"/>
-              </a:rPr>
-              <a:t>02</a:t>
+                  <a:srgbClr val="C9A227"/>
+                </a:solidFill>
+                <a:latin typeface="Arial" pitchFamily="34" charset="0"/>
+                <a:ea typeface="Arial" pitchFamily="34" charset="-122"/>
+                <a:cs typeface="Arial" pitchFamily="34" charset="-120"/>
+              </a:rPr>
+              <a:t>03</a:t>
             </a:r>
             <a:endParaRPr lang="en-US" sz="1800" dirty="0"/>
           </a:p>
@@ -4447,13 +5025,13 @@
       </p:sp>
       <p:sp>
         <p:nvSpPr>
-          <p:cNvPr id="8" name="Text 6"/>
-          <p:cNvSpPr/>
-          <p:nvPr/>
-        </p:nvSpPr>
-        <p:spPr>
-          <a:xfrm>
-            <a:off x="1280160" y="2103120"/>
+          <p:cNvPr id="12" name="Text 10"/>
+          <p:cNvSpPr/>
+          <p:nvPr/>
+        </p:nvSpPr>
+        <p:spPr>
+          <a:xfrm>
+            <a:off x="1234440" y="2651760"/>
             <a:ext cx="7132320" cy="256032"/>
           </a:xfrm>
           <a:prstGeom prst="rect">
@@ -4472,13 +5050,13 @@
             <a:r>
               <a:rPr lang="en-US" sz="1500" b="1" dirty="0">
                 <a:solidFill>
-                  <a:srgbClr val="1A1A1A"/>
-                </a:solidFill>
-                <a:latin typeface="Arial" pitchFamily="34" charset="0"/>
-                <a:ea typeface="Arial" pitchFamily="34" charset="-122"/>
-                <a:cs typeface="Arial" pitchFamily="34" charset="-120"/>
-              </a:rPr>
-              <a:t>Merit &amp; Capability</a:t>
+                  <a:srgbClr val="1B2A4A"/>
+                </a:solidFill>
+                <a:latin typeface="Arial" pitchFamily="34" charset="0"/>
+                <a:ea typeface="Arial" pitchFamily="34" charset="-122"/>
+                <a:cs typeface="Arial" pitchFamily="34" charset="-120"/>
+              </a:rPr>
+              <a:t>Directed Improvement</a:t>
             </a:r>
             <a:endParaRPr lang="en-US" sz="1500" dirty="0"/>
           </a:p>
@@ -4486,13 +5064,91 @@
       </p:sp>
       <p:sp>
         <p:nvSpPr>
-          <p:cNvPr id="9" name="Text 7"/>
-          <p:cNvSpPr/>
-          <p:nvPr/>
-        </p:nvSpPr>
-        <p:spPr>
-          <a:xfrm>
-            <a:off x="1280160" y="2359152"/>
+          <p:cNvPr id="13" name="Text 11"/>
+          <p:cNvSpPr/>
+          <p:nvPr/>
+        </p:nvSpPr>
+        <p:spPr>
+          <a:xfrm>
+            <a:off x="1234440" y="2926080"/>
+            <a:ext cx="7132320" cy="320040"/>
+          </a:xfrm>
+          <a:prstGeom prst="rect">
+            <a:avLst/>
+          </a:prstGeom>
+          <a:noFill/>
+          <a:ln/>
+        </p:spPr>
+        <p:txBody>
+          <a:bodyPr wrap="square" lIns="0" tIns="0" rIns="0" bIns="0" rtlCol="0" anchor="ctr"/>
+          <a:lstStyle/>
+          <a:p>
+            <a:pPr indent="0" marL="0">
+              <a:buNone/>
+            </a:pPr>
+            <a:r>
+              <a:rPr lang="en-US" sz="1300" dirty="0">
+                <a:solidFill>
+                  <a:srgbClr val="2A2A2A"/>
+                </a:solidFill>
+                <a:latin typeface="Arial" pitchFamily="34" charset="0"/>
+                <a:ea typeface="Arial" pitchFamily="34" charset="-122"/>
+                <a:cs typeface="Arial" pitchFamily="34" charset="-120"/>
+              </a:rPr>
+              <a:t>Capital and effort flow toward domestic capacity, not temporary labor extraction</a:t>
+            </a:r>
+            <a:endParaRPr lang="en-US" sz="1300" dirty="0"/>
+          </a:p>
+        </p:txBody>
+      </p:sp>
+      <p:sp>
+        <p:nvSpPr>
+          <p:cNvPr id="14" name="Text 12"/>
+          <p:cNvSpPr/>
+          <p:nvPr/>
+        </p:nvSpPr>
+        <p:spPr>
+          <a:xfrm>
+            <a:off x="457200" y="3547872"/>
+            <a:ext cx="640080" cy="365760"/>
+          </a:xfrm>
+          <a:prstGeom prst="rect">
+            <a:avLst/>
+          </a:prstGeom>
+          <a:noFill/>
+          <a:ln/>
+        </p:spPr>
+        <p:txBody>
+          <a:bodyPr wrap="square" lIns="0" tIns="0" rIns="0" bIns="0" rtlCol="0" anchor="ctr"/>
+          <a:lstStyle/>
+          <a:p>
+            <a:pPr indent="0" marL="0">
+              <a:buNone/>
+            </a:pPr>
+            <a:r>
+              <a:rPr lang="en-US" sz="1800" b="1" dirty="0">
+                <a:solidFill>
+                  <a:srgbClr val="C9A227"/>
+                </a:solidFill>
+                <a:latin typeface="Arial" pitchFamily="34" charset="0"/>
+                <a:ea typeface="Arial" pitchFamily="34" charset="-122"/>
+                <a:cs typeface="Arial" pitchFamily="34" charset="-120"/>
+              </a:rPr>
+              <a:t>04</a:t>
+            </a:r>
+            <a:endParaRPr lang="en-US" sz="1800" dirty="0"/>
+          </a:p>
+        </p:txBody>
+      </p:sp>
+      <p:sp>
+        <p:nvSpPr>
+          <p:cNvPr id="15" name="Text 13"/>
+          <p:cNvSpPr/>
+          <p:nvPr/>
+        </p:nvSpPr>
+        <p:spPr>
+          <a:xfrm>
+            <a:off x="1234440" y="3474720"/>
             <a:ext cx="7132320" cy="256032"/>
           </a:xfrm>
           <a:prstGeom prst="rect">
@@ -4509,15 +5165,54 @@
               <a:buNone/>
             </a:pPr>
             <a:r>
+              <a:rPr lang="en-US" sz="1500" b="1" dirty="0">
+                <a:solidFill>
+                  <a:srgbClr val="1B2A4A"/>
+                </a:solidFill>
+                <a:latin typeface="Arial" pitchFamily="34" charset="0"/>
+                <a:ea typeface="Arial" pitchFamily="34" charset="-122"/>
+                <a:cs typeface="Arial" pitchFamily="34" charset="-120"/>
+              </a:rPr>
+              <a:t>People, Process, Place</a:t>
+            </a:r>
+            <a:endParaRPr lang="en-US" sz="1500" dirty="0"/>
+          </a:p>
+        </p:txBody>
+      </p:sp>
+      <p:sp>
+        <p:nvSpPr>
+          <p:cNvPr id="16" name="Text 14"/>
+          <p:cNvSpPr/>
+          <p:nvPr/>
+        </p:nvSpPr>
+        <p:spPr>
+          <a:xfrm>
+            <a:off x="1234440" y="3749040"/>
+            <a:ext cx="7132320" cy="320040"/>
+          </a:xfrm>
+          <a:prstGeom prst="rect">
+            <a:avLst/>
+          </a:prstGeom>
+          <a:noFill/>
+          <a:ln/>
+        </p:spPr>
+        <p:txBody>
+          <a:bodyPr wrap="square" lIns="0" tIns="0" rIns="0" bIns="0" rtlCol="0" anchor="ctr"/>
+          <a:lstStyle/>
+          <a:p>
+            <a:pPr indent="0" marL="0">
+              <a:buNone/>
+            </a:pPr>
+            <a:r>
               <a:rPr lang="en-US" sz="1300" dirty="0">
                 <a:solidFill>
-                  <a:srgbClr val="555555"/>
-                </a:solidFill>
-                <a:latin typeface="Arial" pitchFamily="34" charset="0"/>
-                <a:ea typeface="Arial" pitchFamily="34" charset="-122"/>
-                <a:cs typeface="Arial" pitchFamily="34" charset="-120"/>
-              </a:rPr>
-              <a:t>Develop real skill among American citizens with long-term stake</a:t>
+                  <a:srgbClr val="2A2A2A"/>
+                </a:solidFill>
+                <a:latin typeface="Arial" pitchFamily="34" charset="0"/>
+                <a:ea typeface="Arial" pitchFamily="34" charset="-122"/>
+                <a:cs typeface="Arial" pitchFamily="34" charset="-120"/>
+              </a:rPr>
+              <a:t>High-capability American workers + advanced processes + domestic locations</a:t>
             </a:r>
             <a:endParaRPr lang="en-US" sz="1300" dirty="0"/>
           </a:p>
@@ -4525,266 +5220,32 @@
       </p:sp>
       <p:sp>
         <p:nvSpPr>
-          <p:cNvPr id="10" name="Text 8"/>
-          <p:cNvSpPr/>
-          <p:nvPr/>
-        </p:nvSpPr>
-        <p:spPr>
-          <a:xfrm>
-            <a:off x="457200" y="2834640"/>
-            <a:ext cx="640080" cy="548640"/>
-          </a:xfrm>
-          <a:prstGeom prst="rect">
-            <a:avLst/>
-          </a:prstGeom>
-          <a:noFill/>
-          <a:ln/>
-        </p:spPr>
-        <p:txBody>
-          <a:bodyPr wrap="square" lIns="0" tIns="0" rIns="0" bIns="0" rtlCol="0" anchor="ctr"/>
-          <a:lstStyle/>
-          <a:p>
-            <a:pPr indent="0" marL="0">
-              <a:buNone/>
-            </a:pPr>
-            <a:r>
-              <a:rPr lang="en-US" sz="1800" b="1" dirty="0">
-                <a:solidFill>
-                  <a:srgbClr val="555555"/>
-                </a:solidFill>
-                <a:latin typeface="Arial" pitchFamily="34" charset="0"/>
-                <a:ea typeface="Arial" pitchFamily="34" charset="-122"/>
-                <a:cs typeface="Arial" pitchFamily="34" charset="-120"/>
-              </a:rPr>
-              <a:t>03</a:t>
-            </a:r>
-            <a:endParaRPr lang="en-US" sz="1800" dirty="0"/>
-          </a:p>
-        </p:txBody>
-      </p:sp>
-      <p:sp>
-        <p:nvSpPr>
-          <p:cNvPr id="11" name="Text 9"/>
-          <p:cNvSpPr/>
-          <p:nvPr/>
-        </p:nvSpPr>
-        <p:spPr>
-          <a:xfrm>
-            <a:off x="1280160" y="2834640"/>
-            <a:ext cx="7132320" cy="256032"/>
-          </a:xfrm>
-          <a:prstGeom prst="rect">
-            <a:avLst/>
-          </a:prstGeom>
-          <a:noFill/>
-          <a:ln/>
-        </p:spPr>
-        <p:txBody>
-          <a:bodyPr wrap="square" lIns="0" tIns="0" rIns="0" bIns="0" rtlCol="0" anchor="ctr"/>
-          <a:lstStyle/>
-          <a:p>
-            <a:pPr indent="0" marL="0">
-              <a:buNone/>
-            </a:pPr>
-            <a:r>
-              <a:rPr lang="en-US" sz="1500" b="1" dirty="0">
-                <a:solidFill>
-                  <a:srgbClr val="1A1A1A"/>
-                </a:solidFill>
-                <a:latin typeface="Arial" pitchFamily="34" charset="0"/>
-                <a:ea typeface="Arial" pitchFamily="34" charset="-122"/>
-                <a:cs typeface="Arial" pitchFamily="34" charset="-120"/>
-              </a:rPr>
-              <a:t>Directed Improvement</a:t>
-            </a:r>
-            <a:endParaRPr lang="en-US" sz="1500" dirty="0"/>
-          </a:p>
-        </p:txBody>
-      </p:sp>
-      <p:sp>
-        <p:nvSpPr>
-          <p:cNvPr id="12" name="Text 10"/>
-          <p:cNvSpPr/>
-          <p:nvPr/>
-        </p:nvSpPr>
-        <p:spPr>
-          <a:xfrm>
-            <a:off x="1280160" y="3090672"/>
-            <a:ext cx="7132320" cy="256032"/>
-          </a:xfrm>
-          <a:prstGeom prst="rect">
-            <a:avLst/>
-          </a:prstGeom>
-          <a:noFill/>
-          <a:ln/>
-        </p:spPr>
-        <p:txBody>
-          <a:bodyPr wrap="square" lIns="0" tIns="0" rIns="0" bIns="0" rtlCol="0" anchor="ctr"/>
-          <a:lstStyle/>
-          <a:p>
-            <a:pPr indent="0" marL="0">
-              <a:buNone/>
-            </a:pPr>
-            <a:r>
-              <a:rPr lang="en-US" sz="1300" dirty="0">
-                <a:solidFill>
-                  <a:srgbClr val="555555"/>
-                </a:solidFill>
-                <a:latin typeface="Arial" pitchFamily="34" charset="0"/>
-                <a:ea typeface="Arial" pitchFamily="34" charset="-122"/>
-                <a:cs typeface="Arial" pitchFamily="34" charset="-120"/>
-              </a:rPr>
-              <a:t>Treat development of American talent as investment in productive capacity</a:t>
-            </a:r>
-            <a:endParaRPr lang="en-US" sz="1300" dirty="0"/>
-          </a:p>
-        </p:txBody>
-      </p:sp>
-      <p:sp>
-        <p:nvSpPr>
-          <p:cNvPr id="13" name="Text 11"/>
-          <p:cNvSpPr/>
-          <p:nvPr/>
-        </p:nvSpPr>
-        <p:spPr>
-          <a:xfrm>
-            <a:off x="457200" y="3566160"/>
-            <a:ext cx="640080" cy="548640"/>
-          </a:xfrm>
-          <a:prstGeom prst="rect">
-            <a:avLst/>
-          </a:prstGeom>
-          <a:noFill/>
-          <a:ln/>
-        </p:spPr>
-        <p:txBody>
-          <a:bodyPr wrap="square" lIns="0" tIns="0" rIns="0" bIns="0" rtlCol="0" anchor="ctr"/>
-          <a:lstStyle/>
-          <a:p>
-            <a:pPr indent="0" marL="0">
-              <a:buNone/>
-            </a:pPr>
-            <a:r>
-              <a:rPr lang="en-US" sz="1800" b="1" dirty="0">
-                <a:solidFill>
-                  <a:srgbClr val="555555"/>
-                </a:solidFill>
-                <a:latin typeface="Arial" pitchFamily="34" charset="0"/>
-                <a:ea typeface="Arial" pitchFamily="34" charset="-122"/>
-                <a:cs typeface="Arial" pitchFamily="34" charset="-120"/>
-              </a:rPr>
-              <a:t>04</a:t>
-            </a:r>
-            <a:endParaRPr lang="en-US" sz="1800" dirty="0"/>
-          </a:p>
-        </p:txBody>
-      </p:sp>
-      <p:sp>
-        <p:nvSpPr>
-          <p:cNvPr id="14" name="Text 12"/>
-          <p:cNvSpPr/>
-          <p:nvPr/>
-        </p:nvSpPr>
-        <p:spPr>
-          <a:xfrm>
-            <a:off x="1280160" y="3566160"/>
-            <a:ext cx="7132320" cy="256032"/>
-          </a:xfrm>
-          <a:prstGeom prst="rect">
-            <a:avLst/>
-          </a:prstGeom>
-          <a:noFill/>
-          <a:ln/>
-        </p:spPr>
-        <p:txBody>
-          <a:bodyPr wrap="square" lIns="0" tIns="0" rIns="0" bIns="0" rtlCol="0" anchor="ctr"/>
-          <a:lstStyle/>
-          <a:p>
-            <a:pPr indent="0" marL="0">
-              <a:buNone/>
-            </a:pPr>
-            <a:r>
-              <a:rPr lang="en-US" sz="1500" b="1" dirty="0">
-                <a:solidFill>
-                  <a:srgbClr val="1A1A1A"/>
-                </a:solidFill>
-                <a:latin typeface="Arial" pitchFamily="34" charset="0"/>
-                <a:ea typeface="Arial" pitchFamily="34" charset="-122"/>
-                <a:cs typeface="Arial" pitchFamily="34" charset="-120"/>
-              </a:rPr>
-              <a:t>People, Process, Place</a:t>
-            </a:r>
-            <a:endParaRPr lang="en-US" sz="1500" dirty="0"/>
-          </a:p>
-        </p:txBody>
-      </p:sp>
-      <p:sp>
-        <p:nvSpPr>
-          <p:cNvPr id="15" name="Text 13"/>
-          <p:cNvSpPr/>
-          <p:nvPr/>
-        </p:nvSpPr>
-        <p:spPr>
-          <a:xfrm>
-            <a:off x="1280160" y="3822192"/>
-            <a:ext cx="7132320" cy="256032"/>
-          </a:xfrm>
-          <a:prstGeom prst="rect">
-            <a:avLst/>
-          </a:prstGeom>
-          <a:noFill/>
-          <a:ln/>
-        </p:spPr>
-        <p:txBody>
-          <a:bodyPr wrap="square" lIns="0" tIns="0" rIns="0" bIns="0" rtlCol="0" anchor="ctr"/>
-          <a:lstStyle/>
-          <a:p>
-            <a:pPr indent="0" marL="0">
-              <a:buNone/>
-            </a:pPr>
-            <a:r>
-              <a:rPr lang="en-US" sz="1300" dirty="0">
-                <a:solidFill>
-                  <a:srgbClr val="555555"/>
-                </a:solidFill>
-                <a:latin typeface="Arial" pitchFamily="34" charset="0"/>
-                <a:ea typeface="Arial" pitchFamily="34" charset="-122"/>
-                <a:cs typeface="Arial" pitchFamily="34" charset="-120"/>
-              </a:rPr>
-              <a:t>Workforce, operating model, and location decisions reinforce one another</a:t>
-            </a:r>
-            <a:endParaRPr lang="en-US" sz="1300" dirty="0"/>
-          </a:p>
-        </p:txBody>
-      </p:sp>
-      <p:sp>
-        <p:nvSpPr>
-          <p:cNvPr id="16" name="Text 14"/>
+          <p:cNvPr id="17" name="Text 15"/>
           <p:cNvSpPr/>
           <p:nvPr/>
         </p:nvSpPr>
         <p:spPr>
           <a:xfrm>
             <a:off x="457200" y="4800600"/>
-            <a:ext cx="5943600" cy="228600"/>
-          </a:xfrm>
-          <a:prstGeom prst="rect">
-            <a:avLst/>
-          </a:prstGeom>
-          <a:noFill/>
-          <a:ln/>
-        </p:spPr>
-        <p:txBody>
-          <a:bodyPr wrap="square" lIns="0" tIns="0" rIns="0" bIns="0" rtlCol="0" anchor="ctr"/>
-          <a:lstStyle/>
-          <a:p>
-            <a:pPr indent="0" marL="0">
-              <a:buNone/>
-            </a:pPr>
-            <a:r>
-              <a:rPr lang="en-US" sz="1000" dirty="0">
-                <a:solidFill>
-                  <a:srgbClr val="555555"/>
+            <a:ext cx="5943600" cy="256032"/>
+          </a:xfrm>
+          <a:prstGeom prst="rect">
+            <a:avLst/>
+          </a:prstGeom>
+          <a:noFill/>
+          <a:ln/>
+        </p:spPr>
+        <p:txBody>
+          <a:bodyPr wrap="square" lIns="0" tIns="0" rIns="0" bIns="0" rtlCol="0" anchor="ctr"/>
+          <a:lstStyle/>
+          <a:p>
+            <a:pPr indent="0" marL="0">
+              <a:buNone/>
+            </a:pPr>
+            <a:r>
+              <a:rPr lang="en-US" sz="1100" dirty="0">
+                <a:solidFill>
+                  <a:srgbClr val="6A6A6A"/>
                 </a:solidFill>
                 <a:latin typeface="Arial" pitchFamily="34" charset="0"/>
                 <a:ea typeface="Arial" pitchFamily="34" charset="-122"/>
@@ -4792,20 +5253,20 @@
               </a:rPr>
               <a:t>Joshua Konkle  |  Chief of Staff Strategist</a:t>
             </a:r>
-            <a:endParaRPr lang="en-US" sz="1000" dirty="0"/>
-          </a:p>
-        </p:txBody>
-      </p:sp>
-      <p:sp>
-        <p:nvSpPr>
-          <p:cNvPr id="17" name="Text 15"/>
-          <p:cNvSpPr/>
-          <p:nvPr/>
-        </p:nvSpPr>
-        <p:spPr>
-          <a:xfrm>
-            <a:off x="7772400" y="4800600"/>
-            <a:ext cx="914400" cy="228600"/>
+            <a:endParaRPr lang="en-US" sz="1100" dirty="0"/>
+          </a:p>
+        </p:txBody>
+      </p:sp>
+      <p:sp>
+        <p:nvSpPr>
+          <p:cNvPr id="18" name="Text 16"/>
+          <p:cNvSpPr/>
+          <p:nvPr/>
+        </p:nvSpPr>
+        <p:spPr>
+          <a:xfrm>
+            <a:off x="7498080" y="4800600"/>
+            <a:ext cx="1188720" cy="256032"/>
           </a:xfrm>
           <a:prstGeom prst="rect">
             <a:avLst/>
@@ -4821,9 +5282,9 @@
               <a:buNone/>
             </a:pPr>
             <a:r>
-              <a:rPr lang="en-US" sz="1000" dirty="0">
-                <a:solidFill>
-                  <a:srgbClr val="555555"/>
+              <a:rPr lang="en-US" sz="1100" dirty="0">
+                <a:solidFill>
+                  <a:srgbClr val="6A6A6A"/>
                 </a:solidFill>
                 <a:latin typeface="Arial" pitchFamily="34" charset="0"/>
                 <a:ea typeface="Arial" pitchFamily="34" charset="-122"/>
@@ -4831,7 +5292,7 @@
               </a:rPr>
               <a:t>4 / 12</a:t>
             </a:r>
-            <a:endParaRPr lang="en-US" sz="1000" dirty="0"/>
+            <a:endParaRPr lang="en-US" sz="1100" dirty="0"/>
           </a:p>
         </p:txBody>
       </p:sp>
@@ -4846,13 +5307,6 @@
 <file path=ppt/slides/slide5.xml><?xml version="1.0" encoding="utf-8"?>
 <p:sld xmlns:a="http://schemas.openxmlformats.org/drawingml/2006/main" xmlns:r="http://schemas.openxmlformats.org/officeDocument/2006/relationships" xmlns:p="http://schemas.openxmlformats.org/presentationml/2006/main">
   <p:cSld name="Slide 5">
-    <p:bg>
-      <p:bgPr>
-        <a:solidFill>
-          <a:srgbClr val="FFFFFF"/>
-        </a:solidFill>
-      </p:bgPr>
-    </p:bg>
     <p:spTree>
       <p:nvGrpSpPr>
         <p:cNvPr id="1" name=""/>
@@ -4869,32 +5323,57 @@
       </p:grpSpPr>
       <p:sp>
         <p:nvSpPr>
-          <p:cNvPr id="2" name="Text 0"/>
+          <p:cNvPr id="2" name="Shape 0"/>
+          <p:cNvSpPr/>
+          <p:nvPr/>
+        </p:nvSpPr>
+        <p:spPr>
+          <a:xfrm>
+            <a:off x="0" y="0"/>
+            <a:ext cx="9144000" cy="5143500"/>
+          </a:xfrm>
+          <a:prstGeom prst="rect">
+            <a:avLst/>
+          </a:prstGeom>
+          <a:solidFill>
+            <a:srgbClr val="FFFFFF"/>
+          </a:solidFill>
+          <a:ln w="12700">
+            <a:solidFill>
+              <a:srgbClr val="FFFFFF"/>
+            </a:solidFill>
+            <a:prstDash val="solid"/>
+          </a:ln>
+        </p:spPr>
+      </p:sp>
+      <p:sp>
+        <p:nvSpPr>
+          <p:cNvPr id="3" name="Text 1"/>
           <p:cNvSpPr/>
           <p:nvPr/>
         </p:nvSpPr>
         <p:spPr>
           <a:xfrm>
             <a:off x="457200" y="274320"/>
-            <a:ext cx="8229600" cy="411480"/>
-          </a:xfrm>
-          <a:prstGeom prst="rect">
-            <a:avLst/>
-          </a:prstGeom>
-          <a:noFill/>
-          <a:ln/>
-        </p:spPr>
-        <p:txBody>
-          <a:bodyPr wrap="square" lIns="0" tIns="0" rIns="0" bIns="0" rtlCol="0" anchor="ctr"/>
-          <a:lstStyle/>
-          <a:p>
-            <a:pPr indent="0" marL="0">
-              <a:buNone/>
-            </a:pPr>
-            <a:r>
-              <a:rPr lang="en-US" sz="2600" b="1" dirty="0">
-                <a:solidFill>
-                  <a:srgbClr val="1A1A1A"/>
+            <a:ext cx="8229600" cy="365760"/>
+          </a:xfrm>
+          <a:prstGeom prst="rect">
+            <a:avLst/>
+          </a:prstGeom>
+          <a:noFill/>
+          <a:ln/>
+        </p:spPr>
+        <p:txBody>
+          <a:bodyPr wrap="square" lIns="0" tIns="0" rIns="0" bIns="0" rtlCol="0" anchor="ctr"/>
+          <a:lstStyle/>
+          <a:p>
+            <a:pPr indent="0" marL="0">
+              <a:buNone/>
+            </a:pPr>
+            <a:r>
+              <a:rPr lang="en-US" sz="2200" b="1" dirty="0">
+                <a:solidFill>
+                  <a:srgbClr val="1B2A4A"/>
                 </a:solidFill>
                 <a:latin typeface="Arial" pitchFamily="34" charset="0"/>
                 <a:ea typeface="Arial" pitchFamily="34" charset="-122"/>
@@ -4902,58 +5381,90 @@
               </a:rPr>
               <a:t>Current Reality</a:t>
             </a:r>
-            <a:endParaRPr lang="en-US" sz="2600" dirty="0"/>
-          </a:p>
-        </p:txBody>
-      </p:sp>
-      <p:sp>
-        <p:nvSpPr>
-          <p:cNvPr id="3" name="Shape 1"/>
-          <p:cNvSpPr/>
-          <p:nvPr/>
-        </p:nvSpPr>
-        <p:spPr>
-          <a:xfrm>
-            <a:off x="457200" y="914400"/>
-            <a:ext cx="73152" cy="640080"/>
-          </a:xfrm>
-          <a:prstGeom prst="rect">
-            <a:avLst/>
+            <a:endParaRPr lang="en-US" sz="2200" dirty="0"/>
+          </a:p>
+        </p:txBody>
+      </p:sp>
+      <p:sp>
+        <p:nvSpPr>
+          <p:cNvPr id="4" name="Shape 2"/>
+          <p:cNvSpPr/>
+          <p:nvPr/>
+        </p:nvSpPr>
+        <p:spPr>
+          <a:xfrm>
+            <a:off x="457200" y="868680"/>
+            <a:ext cx="8229600" cy="685800"/>
+          </a:xfrm>
+          <a:prstGeom prst="roundRect">
+            <a:avLst>
+              <a:gd name="adj" fmla="val 8000"/>
+            </a:avLst>
           </a:prstGeom>
           <a:solidFill>
-            <a:srgbClr val="1A1A1A"/>
+            <a:srgbClr val="F7F5F0"/>
           </a:solidFill>
-          <a:ln/>
-        </p:spPr>
-      </p:sp>
-      <p:sp>
-        <p:nvSpPr>
-          <p:cNvPr id="4" name="Text 2"/>
-          <p:cNvSpPr/>
-          <p:nvPr/>
-        </p:nvSpPr>
-        <p:spPr>
-          <a:xfrm>
-            <a:off x="777240" y="914400"/>
-            <a:ext cx="7772400" cy="640080"/>
-          </a:xfrm>
-          <a:prstGeom prst="rect">
-            <a:avLst/>
-          </a:prstGeom>
-          <a:noFill/>
-          <a:ln/>
-        </p:spPr>
-        <p:txBody>
-          <a:bodyPr wrap="square" lIns="0" tIns="0" rIns="0" bIns="0" rtlCol="0" anchor="ctr"/>
-          <a:lstStyle/>
-          <a:p>
-            <a:pPr indent="0" marL="0">
-              <a:buNone/>
-            </a:pPr>
-            <a:r>
-              <a:rPr lang="en-US" sz="1500" dirty="0">
-                <a:solidFill>
-                  <a:srgbClr val="1A1A1A"/>
+          <a:ln w="12700">
+            <a:solidFill>
+              <a:srgbClr val="F7F5F0"/>
+            </a:solidFill>
+            <a:prstDash val="solid"/>
+          </a:ln>
+        </p:spPr>
+      </p:sp>
+      <p:sp>
+        <p:nvSpPr>
+          <p:cNvPr id="5" name="Shape 3"/>
+          <p:cNvSpPr/>
+          <p:nvPr/>
+        </p:nvSpPr>
+        <p:spPr>
+          <a:xfrm>
+            <a:off x="457200" y="868680"/>
+            <a:ext cx="73152" cy="685800"/>
+          </a:xfrm>
+          <a:prstGeom prst="rect">
+            <a:avLst/>
+          </a:prstGeom>
+          <a:solidFill>
+            <a:srgbClr val="C9A227"/>
+          </a:solidFill>
+          <a:ln w="12700">
+            <a:solidFill>
+              <a:srgbClr val="C9A227"/>
+            </a:solidFill>
+            <a:prstDash val="solid"/>
+          </a:ln>
+        </p:spPr>
+      </p:sp>
+      <p:sp>
+        <p:nvSpPr>
+          <p:cNvPr id="6" name="Text 4"/>
+          <p:cNvSpPr/>
+          <p:nvPr/>
+        </p:nvSpPr>
+        <p:spPr>
+          <a:xfrm>
+            <a:off x="731520" y="1005840"/>
+            <a:ext cx="7772400" cy="457200"/>
+          </a:xfrm>
+          <a:prstGeom prst="rect">
+            <a:avLst/>
+          </a:prstGeom>
+          <a:noFill/>
+          <a:ln/>
+        </p:spPr>
+        <p:txBody>
+          <a:bodyPr wrap="square" lIns="0" tIns="0" rIns="0" bIns="0" rtlCol="0" anchor="ctr"/>
+          <a:lstStyle/>
+          <a:p>
+            <a:pPr indent="0" marL="0">
+              <a:buNone/>
+            </a:pPr>
+            <a:r>
+              <a:rPr lang="en-US" sz="1400" dirty="0">
+                <a:solidFill>
+                  <a:srgbClr val="2A2A2A"/>
                 </a:solidFill>
                 <a:latin typeface="Arial" pitchFamily="34" charset="0"/>
                 <a:ea typeface="Arial" pitchFamily="34" charset="-122"/>
@@ -4961,58 +5472,90 @@
               </a:rPr>
               <a:t>Ongoing difficulty developing and retaining skilled trades and technical talent among American workers</a:t>
             </a:r>
-            <a:endParaRPr lang="en-US" sz="1500" dirty="0"/>
-          </a:p>
-        </p:txBody>
-      </p:sp>
-      <p:sp>
-        <p:nvSpPr>
-          <p:cNvPr id="5" name="Shape 3"/>
-          <p:cNvSpPr/>
-          <p:nvPr/>
-        </p:nvSpPr>
-        <p:spPr>
-          <a:xfrm>
-            <a:off x="457200" y="1737360"/>
-            <a:ext cx="73152" cy="640080"/>
-          </a:xfrm>
-          <a:prstGeom prst="rect">
-            <a:avLst/>
+            <a:endParaRPr lang="en-US" sz="1400" dirty="0"/>
+          </a:p>
+        </p:txBody>
+      </p:sp>
+      <p:sp>
+        <p:nvSpPr>
+          <p:cNvPr id="7" name="Shape 5"/>
+          <p:cNvSpPr/>
+          <p:nvPr/>
+        </p:nvSpPr>
+        <p:spPr>
+          <a:xfrm>
+            <a:off x="457200" y="1691640"/>
+            <a:ext cx="8229600" cy="685800"/>
+          </a:xfrm>
+          <a:prstGeom prst="roundRect">
+            <a:avLst>
+              <a:gd name="adj" fmla="val 8000"/>
+            </a:avLst>
           </a:prstGeom>
           <a:solidFill>
-            <a:srgbClr val="1A1A1A"/>
+            <a:srgbClr val="F7F5F0"/>
           </a:solidFill>
-          <a:ln/>
-        </p:spPr>
-      </p:sp>
-      <p:sp>
-        <p:nvSpPr>
-          <p:cNvPr id="6" name="Text 4"/>
-          <p:cNvSpPr/>
-          <p:nvPr/>
-        </p:nvSpPr>
-        <p:spPr>
-          <a:xfrm>
-            <a:off x="777240" y="1737360"/>
-            <a:ext cx="7772400" cy="640080"/>
-          </a:xfrm>
-          <a:prstGeom prst="rect">
-            <a:avLst/>
-          </a:prstGeom>
-          <a:noFill/>
-          <a:ln/>
-        </p:spPr>
-        <p:txBody>
-          <a:bodyPr wrap="square" lIns="0" tIns="0" rIns="0" bIns="0" rtlCol="0" anchor="ctr"/>
-          <a:lstStyle/>
-          <a:p>
-            <a:pPr indent="0" marL="0">
-              <a:buNone/>
-            </a:pPr>
-            <a:r>
-              <a:rPr lang="en-US" sz="1500" dirty="0">
-                <a:solidFill>
-                  <a:srgbClr val="1A1A1A"/>
+          <a:ln w="12700">
+            <a:solidFill>
+              <a:srgbClr val="F7F5F0"/>
+            </a:solidFill>
+            <a:prstDash val="solid"/>
+          </a:ln>
+        </p:spPr>
+      </p:sp>
+      <p:sp>
+        <p:nvSpPr>
+          <p:cNvPr id="8" name="Shape 6"/>
+          <p:cNvSpPr/>
+          <p:nvPr/>
+        </p:nvSpPr>
+        <p:spPr>
+          <a:xfrm>
+            <a:off x="457200" y="1691640"/>
+            <a:ext cx="73152" cy="685800"/>
+          </a:xfrm>
+          <a:prstGeom prst="rect">
+            <a:avLst/>
+          </a:prstGeom>
+          <a:solidFill>
+            <a:srgbClr val="C9A227"/>
+          </a:solidFill>
+          <a:ln w="12700">
+            <a:solidFill>
+              <a:srgbClr val="C9A227"/>
+            </a:solidFill>
+            <a:prstDash val="solid"/>
+          </a:ln>
+        </p:spPr>
+      </p:sp>
+      <p:sp>
+        <p:nvSpPr>
+          <p:cNvPr id="9" name="Text 7"/>
+          <p:cNvSpPr/>
+          <p:nvPr/>
+        </p:nvSpPr>
+        <p:spPr>
+          <a:xfrm>
+            <a:off x="731520" y="1828800"/>
+            <a:ext cx="7772400" cy="457200"/>
+          </a:xfrm>
+          <a:prstGeom prst="rect">
+            <a:avLst/>
+          </a:prstGeom>
+          <a:noFill/>
+          <a:ln/>
+        </p:spPr>
+        <p:txBody>
+          <a:bodyPr wrap="square" lIns="0" tIns="0" rIns="0" bIns="0" rtlCol="0" anchor="ctr"/>
+          <a:lstStyle/>
+          <a:p>
+            <a:pPr indent="0" marL="0">
+              <a:buNone/>
+            </a:pPr>
+            <a:r>
+              <a:rPr lang="en-US" sz="1400" dirty="0">
+                <a:solidFill>
+                  <a:srgbClr val="2A2A2A"/>
                 </a:solidFill>
                 <a:latin typeface="Arial" pitchFamily="34" charset="0"/>
                 <a:ea typeface="Arial" pitchFamily="34" charset="-122"/>
@@ -5020,58 +5563,90 @@
               </a:rPr>
               <a:t>Growing dependence on temporary or short-cycle non-sovereign labor for core roles</a:t>
             </a:r>
-            <a:endParaRPr lang="en-US" sz="1500" dirty="0"/>
-          </a:p>
-        </p:txBody>
-      </p:sp>
-      <p:sp>
-        <p:nvSpPr>
-          <p:cNvPr id="7" name="Shape 5"/>
-          <p:cNvSpPr/>
-          <p:nvPr/>
-        </p:nvSpPr>
-        <p:spPr>
-          <a:xfrm>
-            <a:off x="457200" y="2560320"/>
-            <a:ext cx="73152" cy="640080"/>
-          </a:xfrm>
-          <a:prstGeom prst="rect">
-            <a:avLst/>
+            <a:endParaRPr lang="en-US" sz="1400" dirty="0"/>
+          </a:p>
+        </p:txBody>
+      </p:sp>
+      <p:sp>
+        <p:nvSpPr>
+          <p:cNvPr id="10" name="Shape 8"/>
+          <p:cNvSpPr/>
+          <p:nvPr/>
+        </p:nvSpPr>
+        <p:spPr>
+          <a:xfrm>
+            <a:off x="457200" y="2514600"/>
+            <a:ext cx="8229600" cy="685800"/>
+          </a:xfrm>
+          <a:prstGeom prst="roundRect">
+            <a:avLst>
+              <a:gd name="adj" fmla="val 8000"/>
+            </a:avLst>
           </a:prstGeom>
           <a:solidFill>
-            <a:srgbClr val="1A1A1A"/>
+            <a:srgbClr val="F7F5F0"/>
           </a:solidFill>
-          <a:ln/>
-        </p:spPr>
-      </p:sp>
-      <p:sp>
-        <p:nvSpPr>
-          <p:cNvPr id="8" name="Text 6"/>
-          <p:cNvSpPr/>
-          <p:nvPr/>
-        </p:nvSpPr>
-        <p:spPr>
-          <a:xfrm>
-            <a:off x="777240" y="2560320"/>
-            <a:ext cx="7772400" cy="640080"/>
-          </a:xfrm>
-          <a:prstGeom prst="rect">
-            <a:avLst/>
-          </a:prstGeom>
-          <a:noFill/>
-          <a:ln/>
-        </p:spPr>
-        <p:txBody>
-          <a:bodyPr wrap="square" lIns="0" tIns="0" rIns="0" bIns="0" rtlCol="0" anchor="ctr"/>
-          <a:lstStyle/>
-          <a:p>
-            <a:pPr indent="0" marL="0">
-              <a:buNone/>
-            </a:pPr>
-            <a:r>
-              <a:rPr lang="en-US" sz="1500" dirty="0">
-                <a:solidFill>
-                  <a:srgbClr val="1A1A1A"/>
+          <a:ln w="12700">
+            <a:solidFill>
+              <a:srgbClr val="F7F5F0"/>
+            </a:solidFill>
+            <a:prstDash val="solid"/>
+          </a:ln>
+        </p:spPr>
+      </p:sp>
+      <p:sp>
+        <p:nvSpPr>
+          <p:cNvPr id="11" name="Shape 9"/>
+          <p:cNvSpPr/>
+          <p:nvPr/>
+        </p:nvSpPr>
+        <p:spPr>
+          <a:xfrm>
+            <a:off x="457200" y="2514600"/>
+            <a:ext cx="73152" cy="685800"/>
+          </a:xfrm>
+          <a:prstGeom prst="rect">
+            <a:avLst/>
+          </a:prstGeom>
+          <a:solidFill>
+            <a:srgbClr val="C9A227"/>
+          </a:solidFill>
+          <a:ln w="12700">
+            <a:solidFill>
+              <a:srgbClr val="C9A227"/>
+            </a:solidFill>
+            <a:prstDash val="solid"/>
+          </a:ln>
+        </p:spPr>
+      </p:sp>
+      <p:sp>
+        <p:nvSpPr>
+          <p:cNvPr id="12" name="Text 10"/>
+          <p:cNvSpPr/>
+          <p:nvPr/>
+        </p:nvSpPr>
+        <p:spPr>
+          <a:xfrm>
+            <a:off x="731520" y="2651760"/>
+            <a:ext cx="7772400" cy="457200"/>
+          </a:xfrm>
+          <a:prstGeom prst="rect">
+            <a:avLst/>
+          </a:prstGeom>
+          <a:noFill/>
+          <a:ln/>
+        </p:spPr>
+        <p:txBody>
+          <a:bodyPr wrap="square" lIns="0" tIns="0" rIns="0" bIns="0" rtlCol="0" anchor="ctr"/>
+          <a:lstStyle/>
+          <a:p>
+            <a:pPr indent="0" marL="0">
+              <a:buNone/>
+            </a:pPr>
+            <a:r>
+              <a:rPr lang="en-US" sz="1400" dirty="0">
+                <a:solidFill>
+                  <a:srgbClr val="2A2A2A"/>
                 </a:solidFill>
                 <a:latin typeface="Arial" pitchFamily="34" charset="0"/>
                 <a:ea typeface="Arial" pitchFamily="34" charset="-122"/>
@@ -5079,58 +5654,90 @@
               </a:rPr>
               <a:t>Loss of institutional knowledge every time a rotation ends</a:t>
             </a:r>
-            <a:endParaRPr lang="en-US" sz="1500" dirty="0"/>
-          </a:p>
-        </p:txBody>
-      </p:sp>
-      <p:sp>
-        <p:nvSpPr>
-          <p:cNvPr id="9" name="Shape 7"/>
-          <p:cNvSpPr/>
-          <p:nvPr/>
-        </p:nvSpPr>
-        <p:spPr>
-          <a:xfrm>
-            <a:off x="457200" y="3383280"/>
-            <a:ext cx="73152" cy="640080"/>
-          </a:xfrm>
-          <a:prstGeom prst="rect">
-            <a:avLst/>
+            <a:endParaRPr lang="en-US" sz="1400" dirty="0"/>
+          </a:p>
+        </p:txBody>
+      </p:sp>
+      <p:sp>
+        <p:nvSpPr>
+          <p:cNvPr id="13" name="Shape 11"/>
+          <p:cNvSpPr/>
+          <p:nvPr/>
+        </p:nvSpPr>
+        <p:spPr>
+          <a:xfrm>
+            <a:off x="457200" y="3337560"/>
+            <a:ext cx="8229600" cy="685800"/>
+          </a:xfrm>
+          <a:prstGeom prst="roundRect">
+            <a:avLst>
+              <a:gd name="adj" fmla="val 8000"/>
+            </a:avLst>
           </a:prstGeom>
           <a:solidFill>
-            <a:srgbClr val="1A1A1A"/>
+            <a:srgbClr val="F7F5F0"/>
           </a:solidFill>
-          <a:ln/>
-        </p:spPr>
-      </p:sp>
-      <p:sp>
-        <p:nvSpPr>
-          <p:cNvPr id="10" name="Text 8"/>
-          <p:cNvSpPr/>
-          <p:nvPr/>
-        </p:nvSpPr>
-        <p:spPr>
-          <a:xfrm>
-            <a:off x="777240" y="3383280"/>
-            <a:ext cx="7772400" cy="640080"/>
-          </a:xfrm>
-          <a:prstGeom prst="rect">
-            <a:avLst/>
-          </a:prstGeom>
-          <a:noFill/>
-          <a:ln/>
-        </p:spPr>
-        <p:txBody>
-          <a:bodyPr wrap="square" lIns="0" tIns="0" rIns="0" bIns="0" rtlCol="0" anchor="ctr"/>
-          <a:lstStyle/>
-          <a:p>
-            <a:pPr indent="0" marL="0">
-              <a:buNone/>
-            </a:pPr>
-            <a:r>
-              <a:rPr lang="en-US" sz="1500" dirty="0">
-                <a:solidFill>
-                  <a:srgbClr val="1A1A1A"/>
+          <a:ln w="12700">
+            <a:solidFill>
+              <a:srgbClr val="F7F5F0"/>
+            </a:solidFill>
+            <a:prstDash val="solid"/>
+          </a:ln>
+        </p:spPr>
+      </p:sp>
+      <p:sp>
+        <p:nvSpPr>
+          <p:cNvPr id="14" name="Shape 12"/>
+          <p:cNvSpPr/>
+          <p:nvPr/>
+        </p:nvSpPr>
+        <p:spPr>
+          <a:xfrm>
+            <a:off x="457200" y="3337560"/>
+            <a:ext cx="73152" cy="685800"/>
+          </a:xfrm>
+          <a:prstGeom prst="rect">
+            <a:avLst/>
+          </a:prstGeom>
+          <a:solidFill>
+            <a:srgbClr val="C9A227"/>
+          </a:solidFill>
+          <a:ln w="12700">
+            <a:solidFill>
+              <a:srgbClr val="C9A227"/>
+            </a:solidFill>
+            <a:prstDash val="solid"/>
+          </a:ln>
+        </p:spPr>
+      </p:sp>
+      <p:sp>
+        <p:nvSpPr>
+          <p:cNvPr id="15" name="Text 13"/>
+          <p:cNvSpPr/>
+          <p:nvPr/>
+        </p:nvSpPr>
+        <p:spPr>
+          <a:xfrm>
+            <a:off x="731520" y="3474720"/>
+            <a:ext cx="7772400" cy="457200"/>
+          </a:xfrm>
+          <a:prstGeom prst="rect">
+            <a:avLst/>
+          </a:prstGeom>
+          <a:noFill/>
+          <a:ln/>
+        </p:spPr>
+        <p:txBody>
+          <a:bodyPr wrap="square" lIns="0" tIns="0" rIns="0" bIns="0" rtlCol="0" anchor="ctr"/>
+          <a:lstStyle/>
+          <a:p>
+            <a:pPr indent="0" marL="0">
+              <a:buNone/>
+            </a:pPr>
+            <a:r>
+              <a:rPr lang="en-US" sz="1400" dirty="0">
+                <a:solidFill>
+                  <a:srgbClr val="2A2A2A"/>
                 </a:solidFill>
                 <a:latin typeface="Arial" pitchFamily="34" charset="0"/>
                 <a:ea typeface="Arial" pitchFamily="34" charset="-122"/>
@@ -5138,38 +5745,38 @@
               </a:rPr>
               <a:t>Innovation and continuous-improvement capacity that never compounds</a:t>
             </a:r>
-            <a:endParaRPr lang="en-US" sz="1500" dirty="0"/>
-          </a:p>
-        </p:txBody>
-      </p:sp>
-      <p:sp>
-        <p:nvSpPr>
-          <p:cNvPr id="11" name="Text 9"/>
+            <a:endParaRPr lang="en-US" sz="1400" dirty="0"/>
+          </a:p>
+        </p:txBody>
+      </p:sp>
+      <p:sp>
+        <p:nvSpPr>
+          <p:cNvPr id="16" name="Text 14"/>
           <p:cNvSpPr/>
           <p:nvPr/>
         </p:nvSpPr>
         <p:spPr>
           <a:xfrm>
             <a:off x="457200" y="4800600"/>
-            <a:ext cx="5943600" cy="228600"/>
-          </a:xfrm>
-          <a:prstGeom prst="rect">
-            <a:avLst/>
-          </a:prstGeom>
-          <a:noFill/>
-          <a:ln/>
-        </p:spPr>
-        <p:txBody>
-          <a:bodyPr wrap="square" lIns="0" tIns="0" rIns="0" bIns="0" rtlCol="0" anchor="ctr"/>
-          <a:lstStyle/>
-          <a:p>
-            <a:pPr indent="0" marL="0">
-              <a:buNone/>
-            </a:pPr>
-            <a:r>
-              <a:rPr lang="en-US" sz="1000" dirty="0">
-                <a:solidFill>
-                  <a:srgbClr val="555555"/>
+            <a:ext cx="5943600" cy="256032"/>
+          </a:xfrm>
+          <a:prstGeom prst="rect">
+            <a:avLst/>
+          </a:prstGeom>
+          <a:noFill/>
+          <a:ln/>
+        </p:spPr>
+        <p:txBody>
+          <a:bodyPr wrap="square" lIns="0" tIns="0" rIns="0" bIns="0" rtlCol="0" anchor="ctr"/>
+          <a:lstStyle/>
+          <a:p>
+            <a:pPr indent="0" marL="0">
+              <a:buNone/>
+            </a:pPr>
+            <a:r>
+              <a:rPr lang="en-US" sz="1100" dirty="0">
+                <a:solidFill>
+                  <a:srgbClr val="6A6A6A"/>
                 </a:solidFill>
                 <a:latin typeface="Arial" pitchFamily="34" charset="0"/>
                 <a:ea typeface="Arial" pitchFamily="34" charset="-122"/>
@@ -5177,20 +5784,20 @@
               </a:rPr>
               <a:t>Joshua Konkle  |  Chief of Staff Strategist</a:t>
             </a:r>
-            <a:endParaRPr lang="en-US" sz="1000" dirty="0"/>
-          </a:p>
-        </p:txBody>
-      </p:sp>
-      <p:sp>
-        <p:nvSpPr>
-          <p:cNvPr id="12" name="Text 10"/>
-          <p:cNvSpPr/>
-          <p:nvPr/>
-        </p:nvSpPr>
-        <p:spPr>
-          <a:xfrm>
-            <a:off x="7772400" y="4800600"/>
-            <a:ext cx="914400" cy="228600"/>
+            <a:endParaRPr lang="en-US" sz="1100" dirty="0"/>
+          </a:p>
+        </p:txBody>
+      </p:sp>
+      <p:sp>
+        <p:nvSpPr>
+          <p:cNvPr id="17" name="Text 15"/>
+          <p:cNvSpPr/>
+          <p:nvPr/>
+        </p:nvSpPr>
+        <p:spPr>
+          <a:xfrm>
+            <a:off x="7498080" y="4800600"/>
+            <a:ext cx="1188720" cy="256032"/>
           </a:xfrm>
           <a:prstGeom prst="rect">
             <a:avLst/>
@@ -5206,9 +5813,9 @@
               <a:buNone/>
             </a:pPr>
             <a:r>
-              <a:rPr lang="en-US" sz="1000" dirty="0">
-                <a:solidFill>
-                  <a:srgbClr val="555555"/>
+              <a:rPr lang="en-US" sz="1100" dirty="0">
+                <a:solidFill>
+                  <a:srgbClr val="6A6A6A"/>
                 </a:solidFill>
                 <a:latin typeface="Arial" pitchFamily="34" charset="0"/>
                 <a:ea typeface="Arial" pitchFamily="34" charset="-122"/>
@@ -5216,7 +5823,7 @@
               </a:rPr>
               <a:t>5 / 12</a:t>
             </a:r>
-            <a:endParaRPr lang="en-US" sz="1000" dirty="0"/>
+            <a:endParaRPr lang="en-US" sz="1100" dirty="0"/>
           </a:p>
         </p:txBody>
       </p:sp>
@@ -5231,13 +5838,6 @@
 <file path=ppt/slides/slide6.xml><?xml version="1.0" encoding="utf-8"?>
 <p:sld xmlns:a="http://schemas.openxmlformats.org/drawingml/2006/main" xmlns:r="http://schemas.openxmlformats.org/officeDocument/2006/relationships" xmlns:p="http://schemas.openxmlformats.org/presentationml/2006/main">
   <p:cSld name="Slide 6">
-    <p:bg>
-      <p:bgPr>
-        <a:solidFill>
-          <a:srgbClr val="FFFFFF"/>
-        </a:solidFill>
-      </p:bgPr>
-    </p:bg>
     <p:spTree>
       <p:nvGrpSpPr>
         <p:cNvPr id="1" name=""/>
@@ -5254,32 +5854,57 @@
       </p:grpSpPr>
       <p:sp>
         <p:nvSpPr>
-          <p:cNvPr id="2" name="Text 0"/>
-          <p:cNvSpPr/>
-          <p:nvPr/>
-        </p:nvSpPr>
-        <p:spPr>
-          <a:xfrm>
-            <a:off x="457200" y="274320"/>
-            <a:ext cx="8229600" cy="411480"/>
-          </a:xfrm>
-          <a:prstGeom prst="rect">
-            <a:avLst/>
-          </a:prstGeom>
-          <a:noFill/>
-          <a:ln/>
-        </p:spPr>
-        <p:txBody>
-          <a:bodyPr wrap="square" lIns="0" tIns="0" rIns="0" bIns="0" rtlCol="0" anchor="ctr"/>
-          <a:lstStyle/>
-          <a:p>
-            <a:pPr indent="0" marL="0">
-              <a:buNone/>
-            </a:pPr>
-            <a:r>
-              <a:rPr lang="en-US" sz="2600" b="1" dirty="0">
-                <a:solidFill>
-                  <a:srgbClr val="1A1A1A"/>
+          <p:cNvPr id="2" name="Shape 0"/>
+          <p:cNvSpPr/>
+          <p:nvPr/>
+        </p:nvSpPr>
+        <p:spPr>
+          <a:xfrm>
+            <a:off x="0" y="0"/>
+            <a:ext cx="9144000" cy="5143500"/>
+          </a:xfrm>
+          <a:prstGeom prst="rect">
+            <a:avLst/>
+          </a:prstGeom>
+          <a:solidFill>
+            <a:srgbClr val="FFFFFF"/>
+          </a:solidFill>
+          <a:ln w="12700">
+            <a:solidFill>
+              <a:srgbClr val="FFFFFF"/>
+            </a:solidFill>
+            <a:prstDash val="solid"/>
+          </a:ln>
+        </p:spPr>
+      </p:sp>
+      <p:sp>
+        <p:nvSpPr>
+          <p:cNvPr id="3" name="Text 1"/>
+          <p:cNvSpPr/>
+          <p:nvPr/>
+        </p:nvSpPr>
+        <p:spPr>
+          <a:xfrm>
+            <a:off x="457200" y="228600"/>
+            <a:ext cx="8229600" cy="320040"/>
+          </a:xfrm>
+          <a:prstGeom prst="rect">
+            <a:avLst/>
+          </a:prstGeom>
+          <a:noFill/>
+          <a:ln/>
+        </p:spPr>
+        <p:txBody>
+          <a:bodyPr wrap="square" lIns="0" tIns="0" rIns="0" bIns="0" rtlCol="0" anchor="ctr"/>
+          <a:lstStyle/>
+          <a:p>
+            <a:pPr indent="0" marL="0">
+              <a:buNone/>
+            </a:pPr>
+            <a:r>
+              <a:rPr lang="en-US" sz="2200" b="1" dirty="0">
+                <a:solidFill>
+                  <a:srgbClr val="1B2A4A"/>
                 </a:solidFill>
                 <a:latin typeface="Arial" pitchFamily="34" charset="0"/>
                 <a:ea typeface="Arial" pitchFamily="34" charset="-122"/>
@@ -5287,20 +5912,59 @@
               </a:rPr>
               <a:t>Diagnostic Questions</a:t>
             </a:r>
-            <a:endParaRPr lang="en-US" sz="2600" dirty="0"/>
-          </a:p>
-        </p:txBody>
-      </p:sp>
-      <p:sp>
-        <p:nvSpPr>
-          <p:cNvPr id="3" name="Text 1"/>
-          <p:cNvSpPr/>
-          <p:nvPr/>
-        </p:nvSpPr>
-        <p:spPr>
-          <a:xfrm>
-            <a:off x="457200" y="777240"/>
-            <a:ext cx="8229600" cy="320040"/>
+            <a:endParaRPr lang="en-US" sz="2200" dirty="0"/>
+          </a:p>
+        </p:txBody>
+      </p:sp>
+      <p:sp>
+        <p:nvSpPr>
+          <p:cNvPr id="4" name="Text 2"/>
+          <p:cNvSpPr/>
+          <p:nvPr/>
+        </p:nvSpPr>
+        <p:spPr>
+          <a:xfrm>
+            <a:off x="457200" y="640080"/>
+            <a:ext cx="8229600" cy="274320"/>
+          </a:xfrm>
+          <a:prstGeom prst="rect">
+            <a:avLst/>
+          </a:prstGeom>
+          <a:noFill/>
+          <a:ln/>
+        </p:spPr>
+        <p:txBody>
+          <a:bodyPr wrap="square" lIns="0" tIns="0" rIns="0" bIns="0" rtlCol="0" anchor="ctr"/>
+          <a:lstStyle/>
+          <a:p>
+            <a:pPr indent="0" marL="0">
+              <a:buNone/>
+            </a:pPr>
+            <a:r>
+              <a:rPr lang="en-US" sz="1300" dirty="0">
+                <a:solidFill>
+                  <a:srgbClr val="5A5A5A"/>
+                </a:solidFill>
+                <a:latin typeface="Arial" pitchFamily="34" charset="0"/>
+                <a:ea typeface="Arial" pitchFamily="34" charset="-122"/>
+                <a:cs typeface="Arial" pitchFamily="34" charset="-120"/>
+              </a:rPr>
+              <a:t>Every leadership team should be able to answer these:</a:t>
+            </a:r>
+            <a:endParaRPr lang="en-US" sz="1300" dirty="0"/>
+          </a:p>
+        </p:txBody>
+      </p:sp>
+      <p:sp>
+        <p:nvSpPr>
+          <p:cNvPr id="5" name="Text 3"/>
+          <p:cNvSpPr/>
+          <p:nvPr/>
+        </p:nvSpPr>
+        <p:spPr>
+          <a:xfrm>
+            <a:off x="457200" y="1097280"/>
+            <a:ext cx="8229600" cy="685800"/>
           </a:xfrm>
           <a:prstGeom prst="rect">
             <a:avLst/>
@@ -5318,13 +5982,13 @@
             <a:r>
               <a:rPr lang="en-US" sz="1400" dirty="0">
                 <a:solidFill>
-                  <a:srgbClr val="555555"/>
-                </a:solidFill>
-                <a:latin typeface="Arial" pitchFamily="34" charset="0"/>
-                <a:ea typeface="Arial" pitchFamily="34" charset="-122"/>
-                <a:cs typeface="Arial" pitchFamily="34" charset="-120"/>
-              </a:rPr>
-              <a:t>Every leadership team should be able to answer these:</a:t>
+                  <a:srgbClr val="2A2A2A"/>
+                </a:solidFill>
+                <a:latin typeface="Arial" pitchFamily="34" charset="0"/>
+                <a:ea typeface="Arial" pitchFamily="34" charset="-122"/>
+                <a:cs typeface="Arial" pitchFamily="34" charset="-120"/>
+              </a:rPr>
+              <a:t>1.  Which role families are truly critical to our productive capacity over the next 3–5 years?</a:t>
             </a:r>
             <a:endParaRPr lang="en-US" sz="1400" dirty="0"/>
           </a:p>
@@ -5332,14 +5996,14 @@
       </p:sp>
       <p:sp>
         <p:nvSpPr>
-          <p:cNvPr id="4" name="Text 2"/>
-          <p:cNvSpPr/>
-          <p:nvPr/>
-        </p:nvSpPr>
-        <p:spPr>
-          <a:xfrm>
-            <a:off x="457200" y="1280160"/>
-            <a:ext cx="8229600" cy="640080"/>
+          <p:cNvPr id="6" name="Text 4"/>
+          <p:cNvSpPr/>
+          <p:nvPr/>
+        </p:nvSpPr>
+        <p:spPr>
+          <a:xfrm>
+            <a:off x="457200" y="1874520"/>
+            <a:ext cx="8229600" cy="685800"/>
           </a:xfrm>
           <a:prstGeom prst="rect">
             <a:avLst/>
@@ -5357,13 +6021,13 @@
             <a:r>
               <a:rPr lang="en-US" sz="1400" dirty="0">
                 <a:solidFill>
-                  <a:srgbClr val="1A1A1A"/>
-                </a:solidFill>
-                <a:latin typeface="Arial" pitchFamily="34" charset="0"/>
-                <a:ea typeface="Arial" pitchFamily="34" charset="-122"/>
-                <a:cs typeface="Arial" pitchFamily="34" charset="-120"/>
-              </a:rPr>
-              <a:t>1.  Which role families are truly critical to our productive capacity over the next 3–5 years?</a:t>
+                  <a:srgbClr val="2A2A2A"/>
+                </a:solidFill>
+                <a:latin typeface="Arial" pitchFamily="34" charset="0"/>
+                <a:ea typeface="Arial" pitchFamily="34" charset="-122"/>
+                <a:cs typeface="Arial" pitchFamily="34" charset="-120"/>
+              </a:rPr>
+              <a:t>2.  What percentage of those roles are filled by long-term American workers versus temporary or short-cycle non-sovereign labor?</a:t>
             </a:r>
             <a:endParaRPr lang="en-US" sz="1400" dirty="0"/>
           </a:p>
@@ -5371,14 +6035,14 @@
       </p:sp>
       <p:sp>
         <p:nvSpPr>
-          <p:cNvPr id="5" name="Text 3"/>
-          <p:cNvSpPr/>
-          <p:nvPr/>
-        </p:nvSpPr>
-        <p:spPr>
-          <a:xfrm>
-            <a:off x="457200" y="2011680"/>
-            <a:ext cx="8229600" cy="640080"/>
+          <p:cNvPr id="7" name="Text 5"/>
+          <p:cNvSpPr/>
+          <p:nvPr/>
+        </p:nvSpPr>
+        <p:spPr>
+          <a:xfrm>
+            <a:off x="457200" y="2651760"/>
+            <a:ext cx="8229600" cy="685800"/>
           </a:xfrm>
           <a:prstGeom prst="rect">
             <a:avLst/>
@@ -5396,13 +6060,13 @@
             <a:r>
               <a:rPr lang="en-US" sz="1400" dirty="0">
                 <a:solidFill>
-                  <a:srgbClr val="1A1A1A"/>
-                </a:solidFill>
-                <a:latin typeface="Arial" pitchFamily="34" charset="0"/>
-                <a:ea typeface="Arial" pitchFamily="34" charset="-122"/>
-                <a:cs typeface="Arial" pitchFamily="34" charset="-120"/>
-              </a:rPr>
-              <a:t>2.  What percentage of those roles are filled by long-term American workers versus temporary or short-cycle non-sovereign labor?</a:t>
+                  <a:srgbClr val="2A2A2A"/>
+                </a:solidFill>
+                <a:latin typeface="Arial" pitchFamily="34" charset="0"/>
+                <a:ea typeface="Arial" pitchFamily="34" charset="-122"/>
+                <a:cs typeface="Arial" pitchFamily="34" charset="-120"/>
+              </a:rPr>
+              <a:t>3.  Do we have deliberate pipelines (internal development, apprenticeships, veterans pathways, local partnerships) that produce American talent for those roles?</a:t>
             </a:r>
             <a:endParaRPr lang="en-US" sz="1400" dirty="0"/>
           </a:p>
@@ -5410,14 +6074,14 @@
       </p:sp>
       <p:sp>
         <p:nvSpPr>
-          <p:cNvPr id="6" name="Text 4"/>
-          <p:cNvSpPr/>
-          <p:nvPr/>
-        </p:nvSpPr>
-        <p:spPr>
-          <a:xfrm>
-            <a:off x="457200" y="2743200"/>
-            <a:ext cx="8229600" cy="640080"/>
+          <p:cNvPr id="8" name="Text 6"/>
+          <p:cNvSpPr/>
+          <p:nvPr/>
+        </p:nvSpPr>
+        <p:spPr>
+          <a:xfrm>
+            <a:off x="457200" y="3429000"/>
+            <a:ext cx="8229600" cy="685800"/>
           </a:xfrm>
           <a:prstGeom prst="rect">
             <a:avLst/>
@@ -5435,13 +6099,13 @@
             <a:r>
               <a:rPr lang="en-US" sz="1400" dirty="0">
                 <a:solidFill>
-                  <a:srgbClr val="1A1A1A"/>
-                </a:solidFill>
-                <a:latin typeface="Arial" pitchFamily="34" charset="0"/>
-                <a:ea typeface="Arial" pitchFamily="34" charset="-122"/>
-                <a:cs typeface="Arial" pitchFamily="34" charset="-120"/>
-              </a:rPr>
-              <a:t>3.  Do we have deliberate pipelines (internal development, apprenticeships, veterans pathways, local partnerships) that produce American talent for those roles?</a:t>
+                  <a:srgbClr val="2A2A2A"/>
+                </a:solidFill>
+                <a:latin typeface="Arial" pitchFamily="34" charset="0"/>
+                <a:ea typeface="Arial" pitchFamily="34" charset="-122"/>
+                <a:cs typeface="Arial" pitchFamily="34" charset="-120"/>
+              </a:rPr>
+              <a:t>4.  Are we measuring success by capability growth and retention — or primarily by time-to-fill and labor cost?</a:t>
             </a:r>
             <a:endParaRPr lang="en-US" sz="1400" dirty="0"/>
           </a:p>
@@ -5449,71 +6113,32 @@
       </p:sp>
       <p:sp>
         <p:nvSpPr>
-          <p:cNvPr id="7" name="Text 5"/>
-          <p:cNvSpPr/>
-          <p:nvPr/>
-        </p:nvSpPr>
-        <p:spPr>
-          <a:xfrm>
-            <a:off x="457200" y="3474720"/>
-            <a:ext cx="8229600" cy="640080"/>
-          </a:xfrm>
-          <a:prstGeom prst="rect">
-            <a:avLst/>
-          </a:prstGeom>
-          <a:noFill/>
-          <a:ln/>
-        </p:spPr>
-        <p:txBody>
-          <a:bodyPr wrap="square" lIns="0" tIns="0" rIns="0" bIns="0" rtlCol="0" anchor="ctr"/>
-          <a:lstStyle/>
-          <a:p>
-            <a:pPr indent="0" marL="0">
-              <a:buNone/>
-            </a:pPr>
-            <a:r>
-              <a:rPr lang="en-US" sz="1400" dirty="0">
-                <a:solidFill>
-                  <a:srgbClr val="1A1A1A"/>
-                </a:solidFill>
-                <a:latin typeface="Arial" pitchFamily="34" charset="0"/>
-                <a:ea typeface="Arial" pitchFamily="34" charset="-122"/>
-                <a:cs typeface="Arial" pitchFamily="34" charset="-120"/>
-              </a:rPr>
-              <a:t>4.  Are we measuring success by capability growth and retention of high performers, or primarily by time-to-fill and labor cost?</a:t>
-            </a:r>
-            <a:endParaRPr lang="en-US" sz="1400" dirty="0"/>
-          </a:p>
-        </p:txBody>
-      </p:sp>
-      <p:sp>
-        <p:nvSpPr>
-          <p:cNvPr id="8" name="Text 6"/>
+          <p:cNvPr id="9" name="Text 7"/>
           <p:cNvSpPr/>
           <p:nvPr/>
         </p:nvSpPr>
         <p:spPr>
           <a:xfrm>
             <a:off x="457200" y="4800600"/>
-            <a:ext cx="5943600" cy="228600"/>
-          </a:xfrm>
-          <a:prstGeom prst="rect">
-            <a:avLst/>
-          </a:prstGeom>
-          <a:noFill/>
-          <a:ln/>
-        </p:spPr>
-        <p:txBody>
-          <a:bodyPr wrap="square" lIns="0" tIns="0" rIns="0" bIns="0" rtlCol="0" anchor="ctr"/>
-          <a:lstStyle/>
-          <a:p>
-            <a:pPr indent="0" marL="0">
-              <a:buNone/>
-            </a:pPr>
-            <a:r>
-              <a:rPr lang="en-US" sz="1000" dirty="0">
-                <a:solidFill>
-                  <a:srgbClr val="555555"/>
+            <a:ext cx="5943600" cy="256032"/>
+          </a:xfrm>
+          <a:prstGeom prst="rect">
+            <a:avLst/>
+          </a:prstGeom>
+          <a:noFill/>
+          <a:ln/>
+        </p:spPr>
+        <p:txBody>
+          <a:bodyPr wrap="square" lIns="0" tIns="0" rIns="0" bIns="0" rtlCol="0" anchor="ctr"/>
+          <a:lstStyle/>
+          <a:p>
+            <a:pPr indent="0" marL="0">
+              <a:buNone/>
+            </a:pPr>
+            <a:r>
+              <a:rPr lang="en-US" sz="1100" dirty="0">
+                <a:solidFill>
+                  <a:srgbClr val="6A6A6A"/>
                 </a:solidFill>
                 <a:latin typeface="Arial" pitchFamily="34" charset="0"/>
                 <a:ea typeface="Arial" pitchFamily="34" charset="-122"/>
@@ -5521,20 +6146,20 @@
               </a:rPr>
               <a:t>Joshua Konkle  |  Chief of Staff Strategist</a:t>
             </a:r>
-            <a:endParaRPr lang="en-US" sz="1000" dirty="0"/>
-          </a:p>
-        </p:txBody>
-      </p:sp>
-      <p:sp>
-        <p:nvSpPr>
-          <p:cNvPr id="9" name="Text 7"/>
-          <p:cNvSpPr/>
-          <p:nvPr/>
-        </p:nvSpPr>
-        <p:spPr>
-          <a:xfrm>
-            <a:off x="7772400" y="4800600"/>
-            <a:ext cx="914400" cy="228600"/>
+            <a:endParaRPr lang="en-US" sz="1100" dirty="0"/>
+          </a:p>
+        </p:txBody>
+      </p:sp>
+      <p:sp>
+        <p:nvSpPr>
+          <p:cNvPr id="10" name="Text 8"/>
+          <p:cNvSpPr/>
+          <p:nvPr/>
+        </p:nvSpPr>
+        <p:spPr>
+          <a:xfrm>
+            <a:off x="7498080" y="4800600"/>
+            <a:ext cx="1188720" cy="256032"/>
           </a:xfrm>
           <a:prstGeom prst="rect">
             <a:avLst/>
@@ -5550,9 +6175,9 @@
               <a:buNone/>
             </a:pPr>
             <a:r>
-              <a:rPr lang="en-US" sz="1000" dirty="0">
-                <a:solidFill>
-                  <a:srgbClr val="555555"/>
+              <a:rPr lang="en-US" sz="1100" dirty="0">
+                <a:solidFill>
+                  <a:srgbClr val="6A6A6A"/>
                 </a:solidFill>
                 <a:latin typeface="Arial" pitchFamily="34" charset="0"/>
                 <a:ea typeface="Arial" pitchFamily="34" charset="-122"/>
@@ -5560,7 +6185,7 @@
               </a:rPr>
               <a:t>6 / 12</a:t>
             </a:r>
-            <a:endParaRPr lang="en-US" sz="1000" dirty="0"/>
+            <a:endParaRPr lang="en-US" sz="1100" dirty="0"/>
           </a:p>
         </p:txBody>
       </p:sp>
@@ -5575,13 +6200,6 @@
 <file path=ppt/slides/slide7.xml><?xml version="1.0" encoding="utf-8"?>
 <p:sld xmlns:a="http://schemas.openxmlformats.org/drawingml/2006/main" xmlns:r="http://schemas.openxmlformats.org/officeDocument/2006/relationships" xmlns:p="http://schemas.openxmlformats.org/presentationml/2006/main">
   <p:cSld name="Slide 7">
-    <p:bg>
-      <p:bgPr>
-        <a:solidFill>
-          <a:srgbClr val="FFFFFF"/>
-        </a:solidFill>
-      </p:bgPr>
-    </p:bg>
     <p:spTree>
       <p:nvGrpSpPr>
         <p:cNvPr id="1" name=""/>
@@ -5598,63 +6216,24 @@
       </p:grpSpPr>
       <p:sp>
         <p:nvSpPr>
-          <p:cNvPr id="2" name="Text 0"/>
-          <p:cNvSpPr/>
-          <p:nvPr/>
-        </p:nvSpPr>
-        <p:spPr>
-          <a:xfrm>
-            <a:off x="457200" y="274320"/>
-            <a:ext cx="8229600" cy="411480"/>
-          </a:xfrm>
-          <a:prstGeom prst="rect">
-            <a:avLst/>
-          </a:prstGeom>
-          <a:noFill/>
-          <a:ln/>
-        </p:spPr>
-        <p:txBody>
-          <a:bodyPr wrap="square" lIns="0" tIns="0" rIns="0" bIns="0" rtlCol="0" anchor="ctr"/>
-          <a:lstStyle/>
-          <a:p>
-            <a:pPr indent="0" marL="0">
-              <a:buNone/>
-            </a:pPr>
-            <a:r>
-              <a:rPr lang="en-US" sz="2600" b="1" dirty="0">
-                <a:solidFill>
-                  <a:srgbClr val="1A1A1A"/>
-                </a:solidFill>
-                <a:latin typeface="Arial" pitchFamily="34" charset="0"/>
-                <a:ea typeface="Arial" pitchFamily="34" charset="-122"/>
-                <a:cs typeface="Arial" pitchFamily="34" charset="-120"/>
-              </a:rPr>
-              <a:t>Two Competing Models</a:t>
-            </a:r>
-            <a:endParaRPr lang="en-US" sz="2600" dirty="0"/>
-          </a:p>
-        </p:txBody>
-      </p:sp>
-      <p:sp>
-        <p:nvSpPr>
-          <p:cNvPr id="3" name="Shape 1"/>
-          <p:cNvSpPr/>
-          <p:nvPr/>
-        </p:nvSpPr>
-        <p:spPr>
-          <a:xfrm>
-            <a:off x="365760" y="914400"/>
-            <a:ext cx="4023360" cy="3200400"/>
+          <p:cNvPr id="2" name="Shape 0"/>
+          <p:cNvSpPr/>
+          <p:nvPr/>
+        </p:nvSpPr>
+        <p:spPr>
+          <a:xfrm>
+            <a:off x="0" y="0"/>
+            <a:ext cx="9144000" cy="5143500"/>
           </a:xfrm>
           <a:prstGeom prst="rect">
             <a:avLst/>
           </a:prstGeom>
           <a:solidFill>
-            <a:srgbClr val="F7F7F7"/>
+            <a:srgbClr val="FFFFFF"/>
           </a:solidFill>
           <a:ln w="12700">
             <a:solidFill>
-              <a:srgbClr val="CCCCCC"/>
+              <a:srgbClr val="FFFFFF"/>
             </a:solidFill>
             <a:prstDash val="solid"/>
           </a:ln>
@@ -5662,32 +6241,98 @@
       </p:sp>
       <p:sp>
         <p:nvSpPr>
-          <p:cNvPr id="4" name="Text 2"/>
-          <p:cNvSpPr/>
-          <p:nvPr/>
-        </p:nvSpPr>
-        <p:spPr>
-          <a:xfrm>
-            <a:off x="548640" y="1097280"/>
-            <a:ext cx="3657600" cy="365760"/>
-          </a:xfrm>
-          <a:prstGeom prst="rect">
-            <a:avLst/>
-          </a:prstGeom>
-          <a:noFill/>
-          <a:ln/>
-        </p:spPr>
-        <p:txBody>
-          <a:bodyPr wrap="square" lIns="0" tIns="0" rIns="0" bIns="0" rtlCol="0" anchor="ctr"/>
-          <a:lstStyle/>
-          <a:p>
-            <a:pPr indent="0" marL="0">
-              <a:buNone/>
-            </a:pPr>
-            <a:r>
-              <a:rPr lang="en-US" sz="1300" b="1" dirty="0">
-                <a:solidFill>
-                  <a:srgbClr val="555555"/>
+          <p:cNvPr id="3" name="Text 1"/>
+          <p:cNvSpPr/>
+          <p:nvPr/>
+        </p:nvSpPr>
+        <p:spPr>
+          <a:xfrm>
+            <a:off x="457200" y="228600"/>
+            <a:ext cx="8229600" cy="320040"/>
+          </a:xfrm>
+          <a:prstGeom prst="rect">
+            <a:avLst/>
+          </a:prstGeom>
+          <a:noFill/>
+          <a:ln/>
+        </p:spPr>
+        <p:txBody>
+          <a:bodyPr wrap="square" lIns="0" tIns="0" rIns="0" bIns="0" rtlCol="0" anchor="ctr"/>
+          <a:lstStyle/>
+          <a:p>
+            <a:pPr indent="0" marL="0">
+              <a:buNone/>
+            </a:pPr>
+            <a:r>
+              <a:rPr lang="en-US" sz="2200" b="1" dirty="0">
+                <a:solidFill>
+                  <a:srgbClr val="1B2A4A"/>
+                </a:solidFill>
+                <a:latin typeface="Arial" pitchFamily="34" charset="0"/>
+                <a:ea typeface="Arial" pitchFamily="34" charset="-122"/>
+                <a:cs typeface="Arial" pitchFamily="34" charset="-120"/>
+              </a:rPr>
+              <a:t>Two Competing Models</a:t>
+            </a:r>
+            <a:endParaRPr lang="en-US" sz="2200" dirty="0"/>
+          </a:p>
+        </p:txBody>
+      </p:sp>
+      <p:sp>
+        <p:nvSpPr>
+          <p:cNvPr id="4" name="Shape 2"/>
+          <p:cNvSpPr/>
+          <p:nvPr/>
+        </p:nvSpPr>
+        <p:spPr>
+          <a:xfrm>
+            <a:off x="457200" y="777240"/>
+            <a:ext cx="3931920" cy="3383280"/>
+          </a:xfrm>
+          <a:prstGeom prst="roundRect">
+            <a:avLst>
+              <a:gd name="adj" fmla="val 2162"/>
+            </a:avLst>
+          </a:prstGeom>
+          <a:solidFill>
+            <a:srgbClr val="3A3A3A"/>
+          </a:solidFill>
+          <a:ln w="12700">
+            <a:solidFill>
+              <a:srgbClr val="3A3A3A"/>
+            </a:solidFill>
+            <a:prstDash val="solid"/>
+          </a:ln>
+        </p:spPr>
+      </p:sp>
+      <p:sp>
+        <p:nvSpPr>
+          <p:cNvPr id="5" name="Text 3"/>
+          <p:cNvSpPr/>
+          <p:nvPr/>
+        </p:nvSpPr>
+        <p:spPr>
+          <a:xfrm>
+            <a:off x="685800" y="1005840"/>
+            <a:ext cx="3566160" cy="457200"/>
+          </a:xfrm>
+          <a:prstGeom prst="rect">
+            <a:avLst/>
+          </a:prstGeom>
+          <a:noFill/>
+          <a:ln/>
+        </p:spPr>
+        <p:txBody>
+          <a:bodyPr wrap="square" lIns="0" tIns="0" rIns="0" bIns="0" rtlCol="0" anchor="ctr"/>
+          <a:lstStyle/>
+          <a:p>
+            <a:pPr indent="0" marL="0">
+              <a:buNone/>
+            </a:pPr>
+            <a:r>
+              <a:rPr lang="en-US" sz="1200" b="1" dirty="0">
+                <a:solidFill>
+                  <a:srgbClr val="C9A227"/>
                 </a:solidFill>
                 <a:latin typeface="Arial" pitchFamily="34" charset="0"/>
                 <a:ea typeface="Arial" pitchFamily="34" charset="-122"/>
@@ -5695,59 +6340,164 @@
               </a:rPr>
               <a:t>SHORT-CYCLE LABOR MODEL</a:t>
             </a:r>
+            <a:endParaRPr lang="en-US" sz="1200" dirty="0"/>
+          </a:p>
+        </p:txBody>
+      </p:sp>
+      <p:sp>
+        <p:nvSpPr>
+          <p:cNvPr id="6" name="Text 4"/>
+          <p:cNvSpPr/>
+          <p:nvPr/>
+        </p:nvSpPr>
+        <p:spPr>
+          <a:xfrm>
+            <a:off x="685800" y="1554480"/>
+            <a:ext cx="3566160" cy="914400"/>
+          </a:xfrm>
+          <a:prstGeom prst="rect">
+            <a:avLst/>
+          </a:prstGeom>
+          <a:noFill/>
+          <a:ln/>
+        </p:spPr>
+        <p:txBody>
+          <a:bodyPr wrap="square" lIns="0" tIns="0" rIns="0" bIns="0" rtlCol="0" anchor="ctr"/>
+          <a:lstStyle/>
+          <a:p>
+            <a:pPr indent="0" marL="0">
+              <a:buNone/>
+            </a:pPr>
+            <a:r>
+              <a:rPr lang="en-US" sz="1400" dirty="0">
+                <a:solidFill>
+                  <a:srgbClr val="FFFFFF"/>
+                </a:solidFill>
+                <a:latin typeface="Arial" pitchFamily="34" charset="0"/>
+                <a:ea typeface="Arial" pitchFamily="34" charset="-122"/>
+                <a:cs typeface="Arial" pitchFamily="34" charset="-120"/>
+              </a:rPr>
+              <a:t>“How do we keep the seats filled at the lowest possible cost?”</a:t>
+            </a:r>
+            <a:endParaRPr lang="en-US" sz="1400" dirty="0"/>
+          </a:p>
+        </p:txBody>
+      </p:sp>
+      <p:sp>
+        <p:nvSpPr>
+          <p:cNvPr id="7" name="Text 5"/>
+          <p:cNvSpPr/>
+          <p:nvPr/>
+        </p:nvSpPr>
+        <p:spPr>
+          <a:xfrm>
+            <a:off x="685800" y="2651760"/>
+            <a:ext cx="3566160" cy="1188720"/>
+          </a:xfrm>
+          <a:prstGeom prst="rect">
+            <a:avLst/>
+          </a:prstGeom>
+          <a:noFill/>
+          <a:ln/>
+        </p:spPr>
+        <p:txBody>
+          <a:bodyPr wrap="square" lIns="0" tIns="0" rIns="0" bIns="0" rtlCol="0" anchor="ctr"/>
+          <a:lstStyle/>
+          <a:p>
+            <a:pPr indent="0" marL="0">
+              <a:buNone/>
+            </a:pPr>
+            <a:r>
+              <a:rPr lang="en-US" sz="1300" dirty="0">
+                <a:solidFill>
+                  <a:srgbClr val="C8C8C8"/>
+                </a:solidFill>
+                <a:latin typeface="Arial" pitchFamily="34" charset="0"/>
+                <a:ea typeface="Arial" pitchFamily="34" charset="-122"/>
+                <a:cs typeface="Arial" pitchFamily="34" charset="-120"/>
+              </a:rPr>
+              <a:t>Optimizes for speed-to-fill, cost-per-hire, and maximum labor flexibility — often via temporary non-sovereign labor.</a:t>
+            </a:r>
             <a:endParaRPr lang="en-US" sz="1300" dirty="0"/>
           </a:p>
         </p:txBody>
       </p:sp>
       <p:sp>
         <p:nvSpPr>
-          <p:cNvPr id="5" name="Text 3"/>
-          <p:cNvSpPr/>
-          <p:nvPr/>
-        </p:nvSpPr>
-        <p:spPr>
-          <a:xfrm>
-            <a:off x="548640" y="1645920"/>
-            <a:ext cx="3657600" cy="914400"/>
-          </a:xfrm>
-          <a:prstGeom prst="rect">
-            <a:avLst/>
-          </a:prstGeom>
-          <a:noFill/>
-          <a:ln/>
-        </p:spPr>
-        <p:txBody>
-          <a:bodyPr wrap="square" lIns="0" tIns="0" rIns="0" bIns="0" rtlCol="0" anchor="ctr"/>
-          <a:lstStyle/>
-          <a:p>
-            <a:pPr indent="0" marL="0">
-              <a:buNone/>
-            </a:pPr>
-            <a:r>
-              <a:rPr lang="en-US" sz="1600" b="1" dirty="0">
-                <a:solidFill>
-                  <a:srgbClr val="1A1A1A"/>
-                </a:solidFill>
-                <a:latin typeface="Arial" pitchFamily="34" charset="0"/>
-                <a:ea typeface="Arial" pitchFamily="34" charset="-122"/>
-                <a:cs typeface="Arial" pitchFamily="34" charset="-120"/>
-              </a:rPr>
-              <a:t>“How do we keep the seats filled at the lowest possible cost?”</a:t>
-            </a:r>
-            <a:endParaRPr lang="en-US" sz="1600" dirty="0"/>
-          </a:p>
-        </p:txBody>
-      </p:sp>
-      <p:sp>
-        <p:nvSpPr>
-          <p:cNvPr id="6" name="Text 4"/>
-          <p:cNvSpPr/>
-          <p:nvPr/>
-        </p:nvSpPr>
-        <p:spPr>
-          <a:xfrm>
-            <a:off x="548640" y="2743200"/>
-            <a:ext cx="3657600" cy="1097280"/>
+          <p:cNvPr id="8" name="Shape 6"/>
+          <p:cNvSpPr/>
+          <p:nvPr/>
+        </p:nvSpPr>
+        <p:spPr>
+          <a:xfrm>
+            <a:off x="4754880" y="777240"/>
+            <a:ext cx="3931920" cy="3383280"/>
+          </a:xfrm>
+          <a:prstGeom prst="roundRect">
+            <a:avLst>
+              <a:gd name="adj" fmla="val 2162"/>
+            </a:avLst>
+          </a:prstGeom>
+          <a:solidFill>
+            <a:srgbClr val="1B2A4A"/>
+          </a:solidFill>
+          <a:ln w="12700">
+            <a:solidFill>
+              <a:srgbClr val="1B2A4A"/>
+            </a:solidFill>
+            <a:prstDash val="solid"/>
+          </a:ln>
+        </p:spPr>
+      </p:sp>
+      <p:sp>
+        <p:nvSpPr>
+          <p:cNvPr id="9" name="Text 7"/>
+          <p:cNvSpPr/>
+          <p:nvPr/>
+        </p:nvSpPr>
+        <p:spPr>
+          <a:xfrm>
+            <a:off x="4983480" y="1005840"/>
+            <a:ext cx="3566160" cy="457200"/>
+          </a:xfrm>
+          <a:prstGeom prst="rect">
+            <a:avLst/>
+          </a:prstGeom>
+          <a:noFill/>
+          <a:ln/>
+        </p:spPr>
+        <p:txBody>
+          <a:bodyPr wrap="square" lIns="0" tIns="0" rIns="0" bIns="0" rtlCol="0" anchor="ctr"/>
+          <a:lstStyle/>
+          <a:p>
+            <a:pPr indent="0" marL="0">
+              <a:buNone/>
+            </a:pPr>
+            <a:r>
+              <a:rPr lang="en-US" sz="1200" b="1" dirty="0">
+                <a:solidFill>
+                  <a:srgbClr val="C9A227"/>
+                </a:solidFill>
+                <a:latin typeface="Arial" pitchFamily="34" charset="0"/>
+                <a:ea typeface="Arial" pitchFamily="34" charset="-122"/>
+                <a:cs typeface="Arial" pitchFamily="34" charset="-120"/>
+              </a:rPr>
+              <a:t>SOVEREIGN CAPABILITY MODEL</a:t>
+            </a:r>
+            <a:endParaRPr lang="en-US" sz="1200" dirty="0"/>
+          </a:p>
+        </p:txBody>
+      </p:sp>
+      <p:sp>
+        <p:nvSpPr>
+          <p:cNvPr id="10" name="Text 8"/>
+          <p:cNvSpPr/>
+          <p:nvPr/>
+        </p:nvSpPr>
+        <p:spPr>
+          <a:xfrm>
+            <a:off x="4983480" y="1554480"/>
+            <a:ext cx="3566160" cy="914400"/>
           </a:xfrm>
           <a:prstGeom prst="rect">
             <a:avLst/>
@@ -5765,13 +6515,13 @@
             <a:r>
               <a:rPr lang="en-US" sz="1400" dirty="0">
                 <a:solidFill>
-                  <a:srgbClr val="555555"/>
-                </a:solidFill>
-                <a:latin typeface="Arial" pitchFamily="34" charset="0"/>
-                <a:ea typeface="Arial" pitchFamily="34" charset="-122"/>
-                <a:cs typeface="Arial" pitchFamily="34" charset="-120"/>
-              </a:rPr>
-              <a:t>Optimizes for speed-to-fill, cost-per-hire, and maximum labor flexibility — often via temporary non-sovereign labor.</a:t>
+                  <a:srgbClr val="FFFFFF"/>
+                </a:solidFill>
+                <a:latin typeface="Arial" pitchFamily="34" charset="0"/>
+                <a:ea typeface="Arial" pitchFamily="34" charset="-122"/>
+                <a:cs typeface="Arial" pitchFamily="34" charset="-120"/>
+              </a:rPr>
+              <a:t>“How do we build a workforce that gets better every year and makes the operation harder to copy?”</a:t>
             </a:r>
             <a:endParaRPr lang="en-US" sz="1400" dirty="0"/>
           </a:p>
@@ -5779,58 +6529,38 @@
       </p:sp>
       <p:sp>
         <p:nvSpPr>
-          <p:cNvPr id="7" name="Shape 5"/>
-          <p:cNvSpPr/>
-          <p:nvPr/>
-        </p:nvSpPr>
-        <p:spPr>
-          <a:xfrm>
-            <a:off x="4754880" y="914400"/>
-            <a:ext cx="4023360" cy="3200400"/>
-          </a:xfrm>
-          <a:prstGeom prst="rect">
-            <a:avLst/>
-          </a:prstGeom>
-          <a:solidFill>
-            <a:srgbClr val="111111"/>
-          </a:solidFill>
-          <a:ln/>
-        </p:spPr>
-      </p:sp>
-      <p:sp>
-        <p:nvSpPr>
-          <p:cNvPr id="8" name="Text 6"/>
-          <p:cNvSpPr/>
-          <p:nvPr/>
-        </p:nvSpPr>
-        <p:spPr>
-          <a:xfrm>
-            <a:off x="4937760" y="1097280"/>
-            <a:ext cx="3657600" cy="365760"/>
-          </a:xfrm>
-          <a:prstGeom prst="rect">
-            <a:avLst/>
-          </a:prstGeom>
-          <a:noFill/>
-          <a:ln/>
-        </p:spPr>
-        <p:txBody>
-          <a:bodyPr wrap="square" lIns="0" tIns="0" rIns="0" bIns="0" rtlCol="0" anchor="ctr"/>
-          <a:lstStyle/>
-          <a:p>
-            <a:pPr indent="0" marL="0">
-              <a:buNone/>
-            </a:pPr>
-            <a:r>
-              <a:rPr lang="en-US" sz="1300" b="1" dirty="0">
-                <a:solidFill>
-                  <a:srgbClr val="AAAAAA"/>
-                </a:solidFill>
-                <a:latin typeface="Arial" pitchFamily="34" charset="0"/>
-                <a:ea typeface="Arial" pitchFamily="34" charset="-122"/>
-                <a:cs typeface="Arial" pitchFamily="34" charset="-120"/>
-              </a:rPr>
-              <a:t>SOVEREIGN CAPABILITY MODEL</a:t>
+          <p:cNvPr id="11" name="Text 9"/>
+          <p:cNvSpPr/>
+          <p:nvPr/>
+        </p:nvSpPr>
+        <p:spPr>
+          <a:xfrm>
+            <a:off x="4983480" y="2651760"/>
+            <a:ext cx="3566160" cy="1188720"/>
+          </a:xfrm>
+          <a:prstGeom prst="rect">
+            <a:avLst/>
+          </a:prstGeom>
+          <a:noFill/>
+          <a:ln/>
+        </p:spPr>
+        <p:txBody>
+          <a:bodyPr wrap="square" lIns="0" tIns="0" rIns="0" bIns="0" rtlCol="0" anchor="ctr"/>
+          <a:lstStyle/>
+          <a:p>
+            <a:pPr indent="0" marL="0">
+              <a:buNone/>
+            </a:pPr>
+            <a:r>
+              <a:rPr lang="en-US" sz="1300" dirty="0">
+                <a:solidFill>
+                  <a:srgbClr val="C8C8C8"/>
+                </a:solidFill>
+                <a:latin typeface="Arial" pitchFamily="34" charset="0"/>
+                <a:ea typeface="Arial" pitchFamily="34" charset="-122"/>
+                <a:cs typeface="Arial" pitchFamily="34" charset="-120"/>
+              </a:rPr>
+              <a:t>Optimizes for compounding capability, knowledge retention, and high-skill American talent.</a:t>
             </a:r>
             <a:endParaRPr lang="en-US" sz="1300" dirty="0"/>
           </a:p>
@@ -5838,110 +6568,32 @@
       </p:sp>
       <p:sp>
         <p:nvSpPr>
-          <p:cNvPr id="9" name="Text 7"/>
-          <p:cNvSpPr/>
-          <p:nvPr/>
-        </p:nvSpPr>
-        <p:spPr>
-          <a:xfrm>
-            <a:off x="4937760" y="1645920"/>
-            <a:ext cx="3657600" cy="1097280"/>
-          </a:xfrm>
-          <a:prstGeom prst="rect">
-            <a:avLst/>
-          </a:prstGeom>
-          <a:noFill/>
-          <a:ln/>
-        </p:spPr>
-        <p:txBody>
-          <a:bodyPr wrap="square" lIns="0" tIns="0" rIns="0" bIns="0" rtlCol="0" anchor="ctr"/>
-          <a:lstStyle/>
-          <a:p>
-            <a:pPr indent="0" marL="0">
-              <a:buNone/>
-            </a:pPr>
-            <a:r>
-              <a:rPr lang="en-US" sz="1600" b="1" dirty="0">
-                <a:solidFill>
-                  <a:srgbClr val="F5F5F5"/>
-                </a:solidFill>
-                <a:latin typeface="Arial" pitchFamily="34" charset="0"/>
-                <a:ea typeface="Arial" pitchFamily="34" charset="-122"/>
-                <a:cs typeface="Arial" pitchFamily="34" charset="-120"/>
-              </a:rPr>
-              <a:t>“How do we build a workforce that gets better every year and makes the operation harder to copy?”</a:t>
-            </a:r>
-            <a:endParaRPr lang="en-US" sz="1600" dirty="0"/>
-          </a:p>
-        </p:txBody>
-      </p:sp>
-      <p:sp>
-        <p:nvSpPr>
-          <p:cNvPr id="10" name="Text 8"/>
-          <p:cNvSpPr/>
-          <p:nvPr/>
-        </p:nvSpPr>
-        <p:spPr>
-          <a:xfrm>
-            <a:off x="4937760" y="2926080"/>
-            <a:ext cx="3657600" cy="914400"/>
-          </a:xfrm>
-          <a:prstGeom prst="rect">
-            <a:avLst/>
-          </a:prstGeom>
-          <a:noFill/>
-          <a:ln/>
-        </p:spPr>
-        <p:txBody>
-          <a:bodyPr wrap="square" lIns="0" tIns="0" rIns="0" bIns="0" rtlCol="0" anchor="ctr"/>
-          <a:lstStyle/>
-          <a:p>
-            <a:pPr indent="0" marL="0">
-              <a:buNone/>
-            </a:pPr>
-            <a:r>
-              <a:rPr lang="en-US" sz="1400" dirty="0">
-                <a:solidFill>
-                  <a:srgbClr val="CCCCCC"/>
-                </a:solidFill>
-                <a:latin typeface="Arial" pitchFamily="34" charset="0"/>
-                <a:ea typeface="Arial" pitchFamily="34" charset="-122"/>
-                <a:cs typeface="Arial" pitchFamily="34" charset="-120"/>
-              </a:rPr>
-              <a:t>Optimizes for compounding capability, knowledge retention, and high-skill American talent.</a:t>
-            </a:r>
-            <a:endParaRPr lang="en-US" sz="1400" dirty="0"/>
-          </a:p>
-        </p:txBody>
-      </p:sp>
-      <p:sp>
-        <p:nvSpPr>
-          <p:cNvPr id="11" name="Text 9"/>
+          <p:cNvPr id="12" name="Text 10"/>
           <p:cNvSpPr/>
           <p:nvPr/>
         </p:nvSpPr>
         <p:spPr>
           <a:xfrm>
             <a:off x="457200" y="4800600"/>
-            <a:ext cx="5943600" cy="228600"/>
-          </a:xfrm>
-          <a:prstGeom prst="rect">
-            <a:avLst/>
-          </a:prstGeom>
-          <a:noFill/>
-          <a:ln/>
-        </p:spPr>
-        <p:txBody>
-          <a:bodyPr wrap="square" lIns="0" tIns="0" rIns="0" bIns="0" rtlCol="0" anchor="ctr"/>
-          <a:lstStyle/>
-          <a:p>
-            <a:pPr indent="0" marL="0">
-              <a:buNone/>
-            </a:pPr>
-            <a:r>
-              <a:rPr lang="en-US" sz="1000" dirty="0">
-                <a:solidFill>
-                  <a:srgbClr val="555555"/>
+            <a:ext cx="5943600" cy="256032"/>
+          </a:xfrm>
+          <a:prstGeom prst="rect">
+            <a:avLst/>
+          </a:prstGeom>
+          <a:noFill/>
+          <a:ln/>
+        </p:spPr>
+        <p:txBody>
+          <a:bodyPr wrap="square" lIns="0" tIns="0" rIns="0" bIns="0" rtlCol="0" anchor="ctr"/>
+          <a:lstStyle/>
+          <a:p>
+            <a:pPr indent="0" marL="0">
+              <a:buNone/>
+            </a:pPr>
+            <a:r>
+              <a:rPr lang="en-US" sz="1100" dirty="0">
+                <a:solidFill>
+                  <a:srgbClr val="6A6A6A"/>
                 </a:solidFill>
                 <a:latin typeface="Arial" pitchFamily="34" charset="0"/>
                 <a:ea typeface="Arial" pitchFamily="34" charset="-122"/>
@@ -5949,20 +6601,20 @@
               </a:rPr>
               <a:t>Joshua Konkle  |  Chief of Staff Strategist</a:t>
             </a:r>
-            <a:endParaRPr lang="en-US" sz="1000" dirty="0"/>
-          </a:p>
-        </p:txBody>
-      </p:sp>
-      <p:sp>
-        <p:nvSpPr>
-          <p:cNvPr id="12" name="Text 10"/>
-          <p:cNvSpPr/>
-          <p:nvPr/>
-        </p:nvSpPr>
-        <p:spPr>
-          <a:xfrm>
-            <a:off x="7772400" y="4800600"/>
-            <a:ext cx="914400" cy="228600"/>
+            <a:endParaRPr lang="en-US" sz="1100" dirty="0"/>
+          </a:p>
+        </p:txBody>
+      </p:sp>
+      <p:sp>
+        <p:nvSpPr>
+          <p:cNvPr id="13" name="Text 11"/>
+          <p:cNvSpPr/>
+          <p:nvPr/>
+        </p:nvSpPr>
+        <p:spPr>
+          <a:xfrm>
+            <a:off x="7498080" y="4800600"/>
+            <a:ext cx="1188720" cy="256032"/>
           </a:xfrm>
           <a:prstGeom prst="rect">
             <a:avLst/>
@@ -5978,9 +6630,9 @@
               <a:buNone/>
             </a:pPr>
             <a:r>
-              <a:rPr lang="en-US" sz="1000" dirty="0">
-                <a:solidFill>
-                  <a:srgbClr val="555555"/>
+              <a:rPr lang="en-US" sz="1100" dirty="0">
+                <a:solidFill>
+                  <a:srgbClr val="6A6A6A"/>
                 </a:solidFill>
                 <a:latin typeface="Arial" pitchFamily="34" charset="0"/>
                 <a:ea typeface="Arial" pitchFamily="34" charset="-122"/>
@@ -5988,7 +6640,7 @@
               </a:rPr>
               <a:t>7 / 12</a:t>
             </a:r>
-            <a:endParaRPr lang="en-US" sz="1000" dirty="0"/>
+            <a:endParaRPr lang="en-US" sz="1100" dirty="0"/>
           </a:p>
         </p:txBody>
       </p:sp>
@@ -6003,13 +6655,6 @@
 <file path=ppt/slides/slide8.xml><?xml version="1.0" encoding="utf-8"?>
 <p:sld xmlns:a="http://schemas.openxmlformats.org/drawingml/2006/main" xmlns:r="http://schemas.openxmlformats.org/officeDocument/2006/relationships" xmlns:p="http://schemas.openxmlformats.org/presentationml/2006/main">
   <p:cSld name="Slide 8">
-    <p:bg>
-      <p:bgPr>
-        <a:solidFill>
-          <a:srgbClr val="FFFFFF"/>
-        </a:solidFill>
-      </p:bgPr>
-    </p:bg>
     <p:spTree>
       <p:nvGrpSpPr>
         <p:cNvPr id="1" name=""/>
@@ -6026,32 +6671,57 @@
       </p:grpSpPr>
       <p:sp>
         <p:nvSpPr>
-          <p:cNvPr id="2" name="Text 0"/>
-          <p:cNvSpPr/>
-          <p:nvPr/>
-        </p:nvSpPr>
-        <p:spPr>
-          <a:xfrm>
-            <a:off x="457200" y="228600"/>
-            <a:ext cx="8229600" cy="411480"/>
-          </a:xfrm>
-          <a:prstGeom prst="rect">
-            <a:avLst/>
-          </a:prstGeom>
-          <a:noFill/>
-          <a:ln/>
-        </p:spPr>
-        <p:txBody>
-          <a:bodyPr wrap="square" lIns="0" tIns="0" rIns="0" bIns="0" rtlCol="0" anchor="ctr"/>
-          <a:lstStyle/>
-          <a:p>
-            <a:pPr indent="0" marL="0">
-              <a:buNone/>
-            </a:pPr>
-            <a:r>
-              <a:rPr lang="en-US" sz="2000" b="1" dirty="0">
-                <a:solidFill>
-                  <a:srgbClr val="1A1A1A"/>
+          <p:cNvPr id="2" name="Shape 0"/>
+          <p:cNvSpPr/>
+          <p:nvPr/>
+        </p:nvSpPr>
+        <p:spPr>
+          <a:xfrm>
+            <a:off x="0" y="0"/>
+            <a:ext cx="9144000" cy="5143500"/>
+          </a:xfrm>
+          <a:prstGeom prst="rect">
+            <a:avLst/>
+          </a:prstGeom>
+          <a:solidFill>
+            <a:srgbClr val="FFFFFF"/>
+          </a:solidFill>
+          <a:ln w="12700">
+            <a:solidFill>
+              <a:srgbClr val="FFFFFF"/>
+            </a:solidFill>
+            <a:prstDash val="solid"/>
+          </a:ln>
+        </p:spPr>
+      </p:sp>
+      <p:sp>
+        <p:nvSpPr>
+          <p:cNvPr id="3" name="Text 1"/>
+          <p:cNvSpPr/>
+          <p:nvPr/>
+        </p:nvSpPr>
+        <p:spPr>
+          <a:xfrm>
+            <a:off x="457200" y="182880"/>
+            <a:ext cx="8229600" cy="320040"/>
+          </a:xfrm>
+          <a:prstGeom prst="rect">
+            <a:avLst/>
+          </a:prstGeom>
+          <a:noFill/>
+          <a:ln/>
+        </p:spPr>
+        <p:txBody>
+          <a:bodyPr wrap="square" lIns="0" tIns="0" rIns="0" bIns="0" rtlCol="0" anchor="ctr"/>
+          <a:lstStyle/>
+          <a:p>
+            <a:pPr indent="0" marL="0">
+              <a:buNone/>
+            </a:pPr>
+            <a:r>
+              <a:rPr lang="en-US" sz="1800" b="1" dirty="0">
+                <a:solidFill>
+                  <a:srgbClr val="1B2A4A"/>
                 </a:solidFill>
                 <a:latin typeface="Arial" pitchFamily="34" charset="0"/>
                 <a:ea typeface="Arial" pitchFamily="34" charset="-122"/>
@@ -6059,79 +6729,164 @@
               </a:rPr>
               <a:t>Current Example – Sovereign Workforce in Action</a:t>
             </a:r>
-            <a:endParaRPr lang="en-US" sz="2000" dirty="0"/>
-          </a:p>
-        </p:txBody>
-      </p:sp>
-      <p:sp>
-        <p:nvSpPr>
-          <p:cNvPr id="3" name="Shape 1"/>
-          <p:cNvSpPr/>
-          <p:nvPr/>
-        </p:nvSpPr>
-        <p:spPr>
-          <a:xfrm>
-            <a:off x="457200" y="822960"/>
-            <a:ext cx="8229600" cy="3383280"/>
-          </a:xfrm>
-          <a:prstGeom prst="rect">
-            <a:avLst/>
+            <a:endParaRPr lang="en-US" sz="1800" dirty="0"/>
+          </a:p>
+        </p:txBody>
+      </p:sp>
+      <p:sp>
+        <p:nvSpPr>
+          <p:cNvPr id="4" name="Text 2"/>
+          <p:cNvSpPr/>
+          <p:nvPr/>
+        </p:nvSpPr>
+        <p:spPr>
+          <a:xfrm>
+            <a:off x="457200" y="548640"/>
+            <a:ext cx="8229600" cy="274320"/>
+          </a:xfrm>
+          <a:prstGeom prst="rect">
+            <a:avLst/>
+          </a:prstGeom>
+          <a:noFill/>
+          <a:ln/>
+        </p:spPr>
+        <p:txBody>
+          <a:bodyPr wrap="square" lIns="0" tIns="0" rIns="0" bIns="0" rtlCol="0" anchor="ctr"/>
+          <a:lstStyle/>
+          <a:p>
+            <a:pPr indent="0" marL="0">
+              <a:buNone/>
+            </a:pPr>
+            <a:r>
+              <a:rPr lang="en-US" sz="1400" b="1" dirty="0">
+                <a:solidFill>
+                  <a:srgbClr val="C9A227"/>
+                </a:solidFill>
+                <a:latin typeface="Arial" pitchFamily="34" charset="0"/>
+                <a:ea typeface="Arial" pitchFamily="34" charset="-122"/>
+                <a:cs typeface="Arial" pitchFamily="34" charset="-120"/>
+              </a:rPr>
+              <a:t>Department of Transportation / Freedom Haulers</a:t>
+            </a:r>
+            <a:endParaRPr lang="en-US" sz="1400" dirty="0"/>
+          </a:p>
+        </p:txBody>
+      </p:sp>
+      <p:sp>
+        <p:nvSpPr>
+          <p:cNvPr id="5" name="Text 3"/>
+          <p:cNvSpPr/>
+          <p:nvPr/>
+        </p:nvSpPr>
+        <p:spPr>
+          <a:xfrm>
+            <a:off x="457200" y="960120"/>
+            <a:ext cx="8229600" cy="1097280"/>
+          </a:xfrm>
+          <a:prstGeom prst="rect">
+            <a:avLst/>
+          </a:prstGeom>
+          <a:noFill/>
+          <a:ln/>
+        </p:spPr>
+        <p:txBody>
+          <a:bodyPr wrap="square" lIns="0" tIns="0" rIns="0" bIns="0" rtlCol="0" anchor="ctr"/>
+          <a:lstStyle/>
+          <a:p>
+            <a:pPr indent="0" marL="0">
+              <a:buNone/>
+            </a:pPr>
+            <a:r>
+              <a:rPr lang="en-US" sz="1400" dirty="0">
+                <a:solidFill>
+                  <a:srgbClr val="2A2A2A"/>
+                </a:solidFill>
+                <a:latin typeface="Arial" pitchFamily="34" charset="0"/>
+                <a:ea typeface="Arial" pitchFamily="34" charset="-122"/>
+                <a:cs typeface="Arial" pitchFamily="34" charset="-120"/>
+              </a:rPr>
+              <a:t>Rather than treating CDL driving roles as a permanent temporary-labor problem, the department is actively removing non-sovereign drivers and expanding pathways for American veterans who already possess the relevant experience through programs such as Freedom Haulers.</a:t>
+            </a:r>
+            <a:endParaRPr lang="en-US" sz="1400" dirty="0"/>
+          </a:p>
+        </p:txBody>
+      </p:sp>
+      <p:sp>
+        <p:nvSpPr>
+          <p:cNvPr id="6" name="Text 4"/>
+          <p:cNvSpPr/>
+          <p:nvPr/>
+        </p:nvSpPr>
+        <p:spPr>
+          <a:xfrm>
+            <a:off x="457200" y="2148840"/>
+            <a:ext cx="8229600" cy="502920"/>
+          </a:xfrm>
+          <a:prstGeom prst="rect">
+            <a:avLst/>
+          </a:prstGeom>
+          <a:noFill/>
+          <a:ln/>
+        </p:spPr>
+        <p:txBody>
+          <a:bodyPr wrap="square" lIns="0" tIns="0" rIns="0" bIns="0" rtlCol="0" anchor="ctr"/>
+          <a:lstStyle/>
+          <a:p>
+            <a:pPr indent="0" marL="0">
+              <a:buNone/>
+            </a:pPr>
+            <a:r>
+              <a:rPr lang="en-US" sz="1400" dirty="0">
+                <a:solidFill>
+                  <a:srgbClr val="2A2A2A"/>
+                </a:solidFill>
+                <a:latin typeface="Arial" pitchFamily="34" charset="0"/>
+                <a:ea typeface="Arial" pitchFamily="34" charset="-122"/>
+                <a:cs typeface="Arial" pitchFamily="34" charset="-120"/>
+              </a:rPr>
+              <a:t>This approach simultaneously strengthens the domestic workforce and contributes to a more secure supply chain.</a:t>
+            </a:r>
+            <a:endParaRPr lang="en-US" sz="1400" dirty="0"/>
+          </a:p>
+        </p:txBody>
+      </p:sp>
+      <p:sp>
+        <p:nvSpPr>
+          <p:cNvPr id="7" name="Shape 5"/>
+          <p:cNvSpPr/>
+          <p:nvPr/>
+        </p:nvSpPr>
+        <p:spPr>
+          <a:xfrm>
+            <a:off x="457200" y="2834640"/>
+            <a:ext cx="8229600" cy="1417320"/>
+          </a:xfrm>
+          <a:prstGeom prst="roundRect">
+            <a:avLst>
+              <a:gd name="adj" fmla="val 5161"/>
+            </a:avLst>
           </a:prstGeom>
           <a:solidFill>
-            <a:srgbClr val="F7F7F7"/>
+            <a:srgbClr val="1B2A4A"/>
           </a:solidFill>
-          <a:ln/>
-        </p:spPr>
-      </p:sp>
-      <p:sp>
-        <p:nvSpPr>
-          <p:cNvPr id="4" name="Text 2"/>
-          <p:cNvSpPr/>
-          <p:nvPr/>
-        </p:nvSpPr>
-        <p:spPr>
-          <a:xfrm>
-            <a:off x="731520" y="1051560"/>
-            <a:ext cx="7680960" cy="365760"/>
-          </a:xfrm>
-          <a:prstGeom prst="rect">
-            <a:avLst/>
-          </a:prstGeom>
-          <a:noFill/>
-          <a:ln/>
-        </p:spPr>
-        <p:txBody>
-          <a:bodyPr wrap="square" lIns="0" tIns="0" rIns="0" bIns="0" rtlCol="0" anchor="ctr"/>
-          <a:lstStyle/>
-          <a:p>
-            <a:pPr indent="0" marL="0">
-              <a:buNone/>
-            </a:pPr>
-            <a:r>
-              <a:rPr lang="en-US" sz="1600" b="1" dirty="0">
-                <a:solidFill>
-                  <a:srgbClr val="1A1A1A"/>
-                </a:solidFill>
-                <a:latin typeface="Arial" pitchFamily="34" charset="0"/>
-                <a:ea typeface="Arial" pitchFamily="34" charset="-122"/>
-                <a:cs typeface="Arial" pitchFamily="34" charset="-120"/>
-              </a:rPr>
-              <a:t>Department of Transportation / Freedom Haulers</a:t>
-            </a:r>
-            <a:endParaRPr lang="en-US" sz="1600" dirty="0"/>
-          </a:p>
-        </p:txBody>
-      </p:sp>
-      <p:sp>
-        <p:nvSpPr>
-          <p:cNvPr id="5" name="Text 3"/>
-          <p:cNvSpPr/>
-          <p:nvPr/>
-        </p:nvSpPr>
-        <p:spPr>
-          <a:xfrm>
-            <a:off x="731520" y="1554480"/>
-            <a:ext cx="7680960" cy="2377440"/>
+          <a:ln w="12700">
+            <a:solidFill>
+              <a:srgbClr val="1B2A4A"/>
+            </a:solidFill>
+            <a:prstDash val="solid"/>
+          </a:ln>
+        </p:spPr>
+      </p:sp>
+      <p:sp>
+        <p:nvSpPr>
+          <p:cNvPr id="8" name="Text 6"/>
+          <p:cNvSpPr/>
+          <p:nvPr/>
+        </p:nvSpPr>
+        <p:spPr>
+          <a:xfrm>
+            <a:off x="731520" y="3063240"/>
+            <a:ext cx="7680960" cy="1051560"/>
           </a:xfrm>
           <a:prstGeom prst="rect">
             <a:avLst/>
@@ -6149,92 +6904,46 @@
             <a:r>
               <a:rPr lang="en-US" sz="1400" dirty="0">
                 <a:solidFill>
-                  <a:srgbClr val="1A1A1A"/>
-                </a:solidFill>
-                <a:latin typeface="Arial" pitchFamily="34" charset="0"/>
-                <a:ea typeface="Arial" pitchFamily="34" charset="-122"/>
-                <a:cs typeface="Arial" pitchFamily="34" charset="-120"/>
-              </a:rPr>
-              <a:t>Rather than treating CDL driving roles as a permanent temporary-labor problem, the department is actively removing non-sovereign drivers and expanding pathways for American veterans who already possess the relevant experience through programs such as Freedom Haulers.</a:t>
+                  <a:srgbClr val="FFFFFF"/>
+                </a:solidFill>
+                <a:latin typeface="Arial" pitchFamily="34" charset="0"/>
+                <a:ea typeface="Arial" pitchFamily="34" charset="-122"/>
+                <a:cs typeface="Arial" pitchFamily="34" charset="-120"/>
+              </a:rPr>
+              <a:t>It is what a sovereign workforce strategy looks like in practice: identify the critical capability, stop defaulting to short-cycle non-sovereign labor, and deliberately build an American pipeline that compounds skill and reliability over time.</a:t>
             </a:r>
             <a:endParaRPr lang="en-US" sz="1400" dirty="0"/>
           </a:p>
-          <a:p>
-            <a:pPr indent="0" marL="0">
-              <a:buNone/>
-            </a:pPr>
-            <a:endParaRPr lang="en-US" sz="1400" dirty="0"/>
-          </a:p>
-          <a:p>
-            <a:pPr indent="0" marL="0">
-              <a:buNone/>
-            </a:pPr>
-            <a:r>
-              <a:rPr lang="en-US" sz="1400" dirty="0">
-                <a:solidFill>
-                  <a:srgbClr val="1A1A1A"/>
-                </a:solidFill>
-                <a:latin typeface="Arial" pitchFamily="34" charset="0"/>
-                <a:ea typeface="Arial" pitchFamily="34" charset="-122"/>
-                <a:cs typeface="Arial" pitchFamily="34" charset="-120"/>
-              </a:rPr>
-              <a:t>This approach simultaneously strengthens the domestic workforce and contributes to a more secure supply chain.</a:t>
-            </a:r>
-            <a:endParaRPr lang="en-US" sz="1400" dirty="0"/>
-          </a:p>
-          <a:p>
-            <a:pPr indent="0" marL="0">
-              <a:buNone/>
-            </a:pPr>
-            <a:endParaRPr lang="en-US" sz="1400" dirty="0"/>
-          </a:p>
-          <a:p>
-            <a:pPr indent="0" marL="0">
-              <a:buNone/>
-            </a:pPr>
-            <a:r>
-              <a:rPr lang="en-US" sz="1400" dirty="0">
-                <a:solidFill>
-                  <a:srgbClr val="1A1A1A"/>
-                </a:solidFill>
-                <a:latin typeface="Arial" pitchFamily="34" charset="0"/>
-                <a:ea typeface="Arial" pitchFamily="34" charset="-122"/>
-                <a:cs typeface="Arial" pitchFamily="34" charset="-120"/>
-              </a:rPr>
-              <a:t>It is what a sovereign workforce strategy looks like in practice: identify the critical capability, stop defaulting to short-cycle non-sovereign labor, and deliberately build an American pipeline that compounds skill and reliability over time.</a:t>
-            </a:r>
-            <a:endParaRPr lang="en-US" sz="1400" dirty="0"/>
-          </a:p>
-        </p:txBody>
-      </p:sp>
-      <p:sp>
-        <p:nvSpPr>
-          <p:cNvPr id="6" name="Text 4"/>
+        </p:txBody>
+      </p:sp>
+      <p:sp>
+        <p:nvSpPr>
+          <p:cNvPr id="9" name="Text 7"/>
           <p:cNvSpPr/>
           <p:nvPr/>
         </p:nvSpPr>
         <p:spPr>
           <a:xfrm>
             <a:off x="457200" y="4800600"/>
-            <a:ext cx="5943600" cy="228600"/>
-          </a:xfrm>
-          <a:prstGeom prst="rect">
-            <a:avLst/>
-          </a:prstGeom>
-          <a:noFill/>
-          <a:ln/>
-        </p:spPr>
-        <p:txBody>
-          <a:bodyPr wrap="square" lIns="0" tIns="0" rIns="0" bIns="0" rtlCol="0" anchor="ctr"/>
-          <a:lstStyle/>
-          <a:p>
-            <a:pPr indent="0" marL="0">
-              <a:buNone/>
-            </a:pPr>
-            <a:r>
-              <a:rPr lang="en-US" sz="1000" dirty="0">
-                <a:solidFill>
-                  <a:srgbClr val="555555"/>
+            <a:ext cx="5943600" cy="256032"/>
+          </a:xfrm>
+          <a:prstGeom prst="rect">
+            <a:avLst/>
+          </a:prstGeom>
+          <a:noFill/>
+          <a:ln/>
+        </p:spPr>
+        <p:txBody>
+          <a:bodyPr wrap="square" lIns="0" tIns="0" rIns="0" bIns="0" rtlCol="0" anchor="ctr"/>
+          <a:lstStyle/>
+          <a:p>
+            <a:pPr indent="0" marL="0">
+              <a:buNone/>
+            </a:pPr>
+            <a:r>
+              <a:rPr lang="en-US" sz="1100" dirty="0">
+                <a:solidFill>
+                  <a:srgbClr val="6A6A6A"/>
                 </a:solidFill>
                 <a:latin typeface="Arial" pitchFamily="34" charset="0"/>
                 <a:ea typeface="Arial" pitchFamily="34" charset="-122"/>
@@ -6242,20 +6951,20 @@
               </a:rPr>
               <a:t>Joshua Konkle  |  Chief of Staff Strategist</a:t>
             </a:r>
-            <a:endParaRPr lang="en-US" sz="1000" dirty="0"/>
-          </a:p>
-        </p:txBody>
-      </p:sp>
-      <p:sp>
-        <p:nvSpPr>
-          <p:cNvPr id="7" name="Text 5"/>
-          <p:cNvSpPr/>
-          <p:nvPr/>
-        </p:nvSpPr>
-        <p:spPr>
-          <a:xfrm>
-            <a:off x="7772400" y="4800600"/>
-            <a:ext cx="914400" cy="228600"/>
+            <a:endParaRPr lang="en-US" sz="1100" dirty="0"/>
+          </a:p>
+        </p:txBody>
+      </p:sp>
+      <p:sp>
+        <p:nvSpPr>
+          <p:cNvPr id="10" name="Text 8"/>
+          <p:cNvSpPr/>
+          <p:nvPr/>
+        </p:nvSpPr>
+        <p:spPr>
+          <a:xfrm>
+            <a:off x="7498080" y="4800600"/>
+            <a:ext cx="1188720" cy="256032"/>
           </a:xfrm>
           <a:prstGeom prst="rect">
             <a:avLst/>
@@ -6271,9 +6980,9 @@
               <a:buNone/>
             </a:pPr>
             <a:r>
-              <a:rPr lang="en-US" sz="1000" dirty="0">
-                <a:solidFill>
-                  <a:srgbClr val="555555"/>
+              <a:rPr lang="en-US" sz="1100" dirty="0">
+                <a:solidFill>
+                  <a:srgbClr val="6A6A6A"/>
                 </a:solidFill>
                 <a:latin typeface="Arial" pitchFamily="34" charset="0"/>
                 <a:ea typeface="Arial" pitchFamily="34" charset="-122"/>
@@ -6281,7 +6990,7 @@
               </a:rPr>
               <a:t>8 / 12</a:t>
             </a:r>
-            <a:endParaRPr lang="en-US" sz="1000" dirty="0"/>
+            <a:endParaRPr lang="en-US" sz="1100" dirty="0"/>
           </a:p>
         </p:txBody>
       </p:sp>
@@ -6296,13 +7005,6 @@
 <file path=ppt/slides/slide9.xml><?xml version="1.0" encoding="utf-8"?>
 <p:sld xmlns:a="http://schemas.openxmlformats.org/drawingml/2006/main" xmlns:r="http://schemas.openxmlformats.org/officeDocument/2006/relationships" xmlns:p="http://schemas.openxmlformats.org/presentationml/2006/main">
   <p:cSld name="Slide 9">
-    <p:bg>
-      <p:bgPr>
-        <a:solidFill>
-          <a:srgbClr val="FFFFFF"/>
-        </a:solidFill>
-      </p:bgPr>
-    </p:bg>
     <p:spTree>
       <p:nvGrpSpPr>
         <p:cNvPr id="1" name=""/>
@@ -6319,32 +7021,57 @@
       </p:grpSpPr>
       <p:sp>
         <p:nvSpPr>
-          <p:cNvPr id="2" name="Text 0"/>
-          <p:cNvSpPr/>
-          <p:nvPr/>
-        </p:nvSpPr>
-        <p:spPr>
-          <a:xfrm>
-            <a:off x="457200" y="274320"/>
-            <a:ext cx="8229600" cy="411480"/>
-          </a:xfrm>
-          <a:prstGeom prst="rect">
-            <a:avLst/>
-          </a:prstGeom>
-          <a:noFill/>
-          <a:ln/>
-        </p:spPr>
-        <p:txBody>
-          <a:bodyPr wrap="square" lIns="0" tIns="0" rIns="0" bIns="0" rtlCol="0" anchor="ctr"/>
-          <a:lstStyle/>
-          <a:p>
-            <a:pPr indent="0" marL="0">
-              <a:buNone/>
-            </a:pPr>
-            <a:r>
-              <a:rPr lang="en-US" sz="2400" b="1" dirty="0">
-                <a:solidFill>
-                  <a:srgbClr val="1A1A1A"/>
+          <p:cNvPr id="2" name="Shape 0"/>
+          <p:cNvSpPr/>
+          <p:nvPr/>
+        </p:nvSpPr>
+        <p:spPr>
+          <a:xfrm>
+            <a:off x="0" y="0"/>
+            <a:ext cx="9144000" cy="5143500"/>
+          </a:xfrm>
+          <a:prstGeom prst="rect">
+            <a:avLst/>
+          </a:prstGeom>
+          <a:solidFill>
+            <a:srgbClr val="FFFFFF"/>
+          </a:solidFill>
+          <a:ln w="12700">
+            <a:solidFill>
+              <a:srgbClr val="FFFFFF"/>
+            </a:solidFill>
+            <a:prstDash val="solid"/>
+          </a:ln>
+        </p:spPr>
+      </p:sp>
+      <p:sp>
+        <p:nvSpPr>
+          <p:cNvPr id="3" name="Text 1"/>
+          <p:cNvSpPr/>
+          <p:nvPr/>
+        </p:nvSpPr>
+        <p:spPr>
+          <a:xfrm>
+            <a:off x="457200" y="228600"/>
+            <a:ext cx="8229600" cy="320040"/>
+          </a:xfrm>
+          <a:prstGeom prst="rect">
+            <a:avLst/>
+          </a:prstGeom>
+          <a:noFill/>
+          <a:ln/>
+        </p:spPr>
+        <p:txBody>
+          <a:bodyPr wrap="square" lIns="0" tIns="0" rIns="0" bIns="0" rtlCol="0" anchor="ctr"/>
+          <a:lstStyle/>
+          <a:p>
+            <a:pPr indent="0" marL="0">
+              <a:buNone/>
+            </a:pPr>
+            <a:r>
+              <a:rPr lang="en-US" sz="2000" b="1" dirty="0">
+                <a:solidFill>
+                  <a:srgbClr val="1B2A4A"/>
                 </a:solidFill>
                 <a:latin typeface="Arial" pitchFamily="34" charset="0"/>
                 <a:ea typeface="Arial" pitchFamily="34" charset="-122"/>
@@ -6352,19 +7079,19 @@
               </a:rPr>
               <a:t>Hamiltonian Redesign Principles</a:t>
             </a:r>
-            <a:endParaRPr lang="en-US" sz="2400" dirty="0"/>
-          </a:p>
-        </p:txBody>
-      </p:sp>
-      <p:sp>
-        <p:nvSpPr>
-          <p:cNvPr id="3" name="Text 1"/>
-          <p:cNvSpPr/>
-          <p:nvPr/>
-        </p:nvSpPr>
-        <p:spPr>
-          <a:xfrm>
-            <a:off x="457200" y="868680"/>
+            <a:endParaRPr lang="en-US" sz="2000" dirty="0"/>
+          </a:p>
+        </p:txBody>
+      </p:sp>
+      <p:sp>
+        <p:nvSpPr>
+          <p:cNvPr id="4" name="Text 2"/>
+          <p:cNvSpPr/>
+          <p:nvPr/>
+        </p:nvSpPr>
+        <p:spPr>
+          <a:xfrm>
+            <a:off x="457200" y="685800"/>
             <a:ext cx="8229600" cy="274320"/>
           </a:xfrm>
           <a:prstGeom prst="rect">
@@ -6381,9 +7108,9 @@
               <a:buNone/>
             </a:pPr>
             <a:r>
-              <a:rPr lang="en-US" sz="1500" b="1" dirty="0">
-                <a:solidFill>
-                  <a:srgbClr val="1A1A1A"/>
+              <a:rPr lang="en-US" sz="1400" b="1" dirty="0">
+                <a:solidFill>
+                  <a:srgbClr val="C9A227"/>
                 </a:solidFill>
                 <a:latin typeface="Arial" pitchFamily="34" charset="0"/>
                 <a:ea typeface="Arial" pitchFamily="34" charset="-122"/>
@@ -6391,20 +7118,20 @@
               </a:rPr>
               <a:t>Treat talent development as investment</a:t>
             </a:r>
-            <a:endParaRPr lang="en-US" sz="1500" dirty="0"/>
-          </a:p>
-        </p:txBody>
-      </p:sp>
-      <p:sp>
-        <p:nvSpPr>
-          <p:cNvPr id="4" name="Text 2"/>
-          <p:cNvSpPr/>
-          <p:nvPr/>
-        </p:nvSpPr>
-        <p:spPr>
-          <a:xfrm>
-            <a:off x="457200" y="1161288"/>
-            <a:ext cx="8229600" cy="411480"/>
+            <a:endParaRPr lang="en-US" sz="1400" dirty="0"/>
+          </a:p>
+        </p:txBody>
+      </p:sp>
+      <p:sp>
+        <p:nvSpPr>
+          <p:cNvPr id="5" name="Text 3"/>
+          <p:cNvSpPr/>
+          <p:nvPr/>
+        </p:nvSpPr>
+        <p:spPr>
+          <a:xfrm>
+            <a:off x="457200" y="960120"/>
+            <a:ext cx="8229600" cy="502920"/>
           </a:xfrm>
           <a:prstGeom prst="rect">
             <a:avLst/>
@@ -6422,7 +7149,7 @@
             <a:r>
               <a:rPr lang="en-US" sz="1300" dirty="0">
                 <a:solidFill>
-                  <a:srgbClr val="555555"/>
+                  <a:srgbClr val="2A2A2A"/>
                 </a:solidFill>
                 <a:latin typeface="Arial" pitchFamily="34" charset="0"/>
                 <a:ea typeface="Arial" pitchFamily="34" charset="-122"/>
@@ -6436,13 +7163,13 @@
       </p:sp>
       <p:sp>
         <p:nvSpPr>
-          <p:cNvPr id="5" name="Text 3"/>
-          <p:cNvSpPr/>
-          <p:nvPr/>
-        </p:nvSpPr>
-        <p:spPr>
-          <a:xfrm>
-            <a:off x="457200" y="1737360"/>
+          <p:cNvPr id="6" name="Text 4"/>
+          <p:cNvSpPr/>
+          <p:nvPr/>
+        </p:nvSpPr>
+        <p:spPr>
+          <a:xfrm>
+            <a:off x="457200" y="1600200"/>
             <a:ext cx="8229600" cy="274320"/>
           </a:xfrm>
           <a:prstGeom prst="rect">
@@ -6459,9 +7186,9 @@
               <a:buNone/>
             </a:pPr>
             <a:r>
-              <a:rPr lang="en-US" sz="1500" b="1" dirty="0">
-                <a:solidFill>
-                  <a:srgbClr val="1A1A1A"/>
+              <a:rPr lang="en-US" sz="1400" b="1" dirty="0">
+                <a:solidFill>
+                  <a:srgbClr val="C9A227"/>
                 </a:solidFill>
                 <a:latin typeface="Arial" pitchFamily="34" charset="0"/>
                 <a:ea typeface="Arial" pitchFamily="34" charset="-122"/>
@@ -6469,20 +7196,20 @@
               </a:rPr>
               <a:t>Design deliberate pipelines</a:t>
             </a:r>
-            <a:endParaRPr lang="en-US" sz="1500" dirty="0"/>
-          </a:p>
-        </p:txBody>
-      </p:sp>
-      <p:sp>
-        <p:nvSpPr>
-          <p:cNvPr id="6" name="Text 4"/>
-          <p:cNvSpPr/>
-          <p:nvPr/>
-        </p:nvSpPr>
-        <p:spPr>
-          <a:xfrm>
-            <a:off x="457200" y="2029968"/>
-            <a:ext cx="8229600" cy="411480"/>
+            <a:endParaRPr lang="en-US" sz="1400" dirty="0"/>
+          </a:p>
+        </p:txBody>
+      </p:sp>
+      <p:sp>
+        <p:nvSpPr>
+          <p:cNvPr id="7" name="Text 5"/>
+          <p:cNvSpPr/>
+          <p:nvPr/>
+        </p:nvSpPr>
+        <p:spPr>
+          <a:xfrm>
+            <a:off x="457200" y="1874520"/>
+            <a:ext cx="8229600" cy="502920"/>
           </a:xfrm>
           <a:prstGeom prst="rect">
             <a:avLst/>
@@ -6500,7 +7227,7 @@
             <a:r>
               <a:rPr lang="en-US" sz="1300" dirty="0">
                 <a:solidFill>
-                  <a:srgbClr val="555555"/>
+                  <a:srgbClr val="2A2A2A"/>
                 </a:solidFill>
                 <a:latin typeface="Arial" pitchFamily="34" charset="0"/>
                 <a:ea typeface="Arial" pitchFamily="34" charset="-122"/>
@@ -6514,13 +7241,13 @@
       </p:sp>
       <p:sp>
         <p:nvSpPr>
-          <p:cNvPr id="7" name="Text 5"/>
-          <p:cNvSpPr/>
-          <p:nvPr/>
-        </p:nvSpPr>
-        <p:spPr>
-          <a:xfrm>
-            <a:off x="457200" y="2606040"/>
+          <p:cNvPr id="8" name="Text 6"/>
+          <p:cNvSpPr/>
+          <p:nvPr/>
+        </p:nvSpPr>
+        <p:spPr>
+          <a:xfrm>
+            <a:off x="457200" y="2514600"/>
             <a:ext cx="8229600" cy="274320"/>
           </a:xfrm>
           <a:prstGeom prst="rect">
@@ -6537,9 +7264,9 @@
               <a:buNone/>
             </a:pPr>
             <a:r>
-              <a:rPr lang="en-US" sz="1500" b="1" dirty="0">
-                <a:solidFill>
-                  <a:srgbClr val="1A1A1A"/>
+              <a:rPr lang="en-US" sz="1400" b="1" dirty="0">
+                <a:solidFill>
+                  <a:srgbClr val="C9A227"/>
                 </a:solidFill>
                 <a:latin typeface="Arial" pitchFamily="34" charset="0"/>
                 <a:ea typeface="Arial" pitchFamily="34" charset="-122"/>
@@ -6547,20 +7274,20 @@
               </a:rPr>
               <a:t>Measure what matters</a:t>
             </a:r>
-            <a:endParaRPr lang="en-US" sz="1500" dirty="0"/>
-          </a:p>
-        </p:txBody>
-      </p:sp>
-      <p:sp>
-        <p:nvSpPr>
-          <p:cNvPr id="8" name="Text 6"/>
-          <p:cNvSpPr/>
-          <p:nvPr/>
-        </p:nvSpPr>
-        <p:spPr>
-          <a:xfrm>
-            <a:off x="457200" y="2898648"/>
-            <a:ext cx="8229600" cy="411480"/>
+            <a:endParaRPr lang="en-US" sz="1400" dirty="0"/>
+          </a:p>
+        </p:txBody>
+      </p:sp>
+      <p:sp>
+        <p:nvSpPr>
+          <p:cNvPr id="9" name="Text 7"/>
+          <p:cNvSpPr/>
+          <p:nvPr/>
+        </p:nvSpPr>
+        <p:spPr>
+          <a:xfrm>
+            <a:off x="457200" y="2788920"/>
+            <a:ext cx="8229600" cy="502920"/>
           </a:xfrm>
           <a:prstGeom prst="rect">
             <a:avLst/>
@@ -6578,7 +7305,7 @@
             <a:r>
               <a:rPr lang="en-US" sz="1300" dirty="0">
                 <a:solidFill>
-                  <a:srgbClr val="555555"/>
+                  <a:srgbClr val="2A2A2A"/>
                 </a:solidFill>
                 <a:latin typeface="Arial" pitchFamily="34" charset="0"/>
                 <a:ea typeface="Arial" pitchFamily="34" charset="-122"/>
@@ -6592,13 +7319,13 @@
       </p:sp>
       <p:sp>
         <p:nvSpPr>
-          <p:cNvPr id="9" name="Text 7"/>
-          <p:cNvSpPr/>
-          <p:nvPr/>
-        </p:nvSpPr>
-        <p:spPr>
-          <a:xfrm>
-            <a:off x="457200" y="3474720"/>
+          <p:cNvPr id="10" name="Text 8"/>
+          <p:cNvSpPr/>
+          <p:nvPr/>
+        </p:nvSpPr>
+        <p:spPr>
+          <a:xfrm>
+            <a:off x="457200" y="3429000"/>
             <a:ext cx="8229600" cy="274320"/>
           </a:xfrm>
           <a:prstGeom prst="rect">
@@ -6615,9 +7342,9 @@
               <a:buNone/>
             </a:pPr>
             <a:r>
-              <a:rPr lang="en-US" sz="1500" b="1" dirty="0">
-                <a:solidFill>
-                  <a:srgbClr val="1A1A1A"/>
+              <a:rPr lang="en-US" sz="1400" b="1" dirty="0">
+                <a:solidFill>
+                  <a:srgbClr val="C9A227"/>
                 </a:solidFill>
                 <a:latin typeface="Arial" pitchFamily="34" charset="0"/>
                 <a:ea typeface="Arial" pitchFamily="34" charset="-122"/>
@@ -6625,20 +7352,20 @@
               </a:rPr>
               <a:t>Use technology to elevate roles</a:t>
             </a:r>
-            <a:endParaRPr lang="en-US" sz="1500" dirty="0"/>
-          </a:p>
-        </p:txBody>
-      </p:sp>
-      <p:sp>
-        <p:nvSpPr>
-          <p:cNvPr id="10" name="Text 8"/>
-          <p:cNvSpPr/>
-          <p:nvPr/>
-        </p:nvSpPr>
-        <p:spPr>
-          <a:xfrm>
-            <a:off x="457200" y="3767328"/>
-            <a:ext cx="8229600" cy="411480"/>
+            <a:endParaRPr lang="en-US" sz="1400" dirty="0"/>
+          </a:p>
+        </p:txBody>
+      </p:sp>
+      <p:sp>
+        <p:nvSpPr>
+          <p:cNvPr id="11" name="Text 9"/>
+          <p:cNvSpPr/>
+          <p:nvPr/>
+        </p:nvSpPr>
+        <p:spPr>
+          <a:xfrm>
+            <a:off x="457200" y="3703320"/>
+            <a:ext cx="8229600" cy="502920"/>
           </a:xfrm>
           <a:prstGeom prst="rect">
             <a:avLst/>
@@ -6656,7 +7383,7 @@
             <a:r>
               <a:rPr lang="en-US" sz="1300" dirty="0">
                 <a:solidFill>
-                  <a:srgbClr val="555555"/>
+                  <a:srgbClr val="2A2A2A"/>
                 </a:solidFill>
                 <a:latin typeface="Arial" pitchFamily="34" charset="0"/>
                 <a:ea typeface="Arial" pitchFamily="34" charset="-122"/>
@@ -6670,32 +7397,32 @@
       </p:sp>
       <p:sp>
         <p:nvSpPr>
-          <p:cNvPr id="11" name="Text 9"/>
+          <p:cNvPr id="12" name="Text 10"/>
           <p:cNvSpPr/>
           <p:nvPr/>
         </p:nvSpPr>
         <p:spPr>
           <a:xfrm>
             <a:off x="457200" y="4800600"/>
-            <a:ext cx="5943600" cy="228600"/>
-          </a:xfrm>
-          <a:prstGeom prst="rect">
-            <a:avLst/>
-          </a:prstGeom>
-          <a:noFill/>
-          <a:ln/>
-        </p:spPr>
-        <p:txBody>
-          <a:bodyPr wrap="square" lIns="0" tIns="0" rIns="0" bIns="0" rtlCol="0" anchor="ctr"/>
-          <a:lstStyle/>
-          <a:p>
-            <a:pPr indent="0" marL="0">
-              <a:buNone/>
-            </a:pPr>
-            <a:r>
-              <a:rPr lang="en-US" sz="1000" dirty="0">
-                <a:solidFill>
-                  <a:srgbClr val="555555"/>
+            <a:ext cx="5943600" cy="256032"/>
+          </a:xfrm>
+          <a:prstGeom prst="rect">
+            <a:avLst/>
+          </a:prstGeom>
+          <a:noFill/>
+          <a:ln/>
+        </p:spPr>
+        <p:txBody>
+          <a:bodyPr wrap="square" lIns="0" tIns="0" rIns="0" bIns="0" rtlCol="0" anchor="ctr"/>
+          <a:lstStyle/>
+          <a:p>
+            <a:pPr indent="0" marL="0">
+              <a:buNone/>
+            </a:pPr>
+            <a:r>
+              <a:rPr lang="en-US" sz="1100" dirty="0">
+                <a:solidFill>
+                  <a:srgbClr val="6A6A6A"/>
                 </a:solidFill>
                 <a:latin typeface="Arial" pitchFamily="34" charset="0"/>
                 <a:ea typeface="Arial" pitchFamily="34" charset="-122"/>
@@ -6703,20 +7430,20 @@
               </a:rPr>
               <a:t>Joshua Konkle  |  Chief of Staff Strategist</a:t>
             </a:r>
-            <a:endParaRPr lang="en-US" sz="1000" dirty="0"/>
-          </a:p>
-        </p:txBody>
-      </p:sp>
-      <p:sp>
-        <p:nvSpPr>
-          <p:cNvPr id="12" name="Text 10"/>
-          <p:cNvSpPr/>
-          <p:nvPr/>
-        </p:nvSpPr>
-        <p:spPr>
-          <a:xfrm>
-            <a:off x="7772400" y="4800600"/>
-            <a:ext cx="914400" cy="228600"/>
+            <a:endParaRPr lang="en-US" sz="1100" dirty="0"/>
+          </a:p>
+        </p:txBody>
+      </p:sp>
+      <p:sp>
+        <p:nvSpPr>
+          <p:cNvPr id="13" name="Text 11"/>
+          <p:cNvSpPr/>
+          <p:nvPr/>
+        </p:nvSpPr>
+        <p:spPr>
+          <a:xfrm>
+            <a:off x="7498080" y="4800600"/>
+            <a:ext cx="1188720" cy="256032"/>
           </a:xfrm>
           <a:prstGeom prst="rect">
             <a:avLst/>
@@ -6732,9 +7459,9 @@
               <a:buNone/>
             </a:pPr>
             <a:r>
-              <a:rPr lang="en-US" sz="1000" dirty="0">
-                <a:solidFill>
-                  <a:srgbClr val="555555"/>
+              <a:rPr lang="en-US" sz="1100" dirty="0">
+                <a:solidFill>
+                  <a:srgbClr val="6A6A6A"/>
                 </a:solidFill>
                 <a:latin typeface="Arial" pitchFamily="34" charset="0"/>
                 <a:ea typeface="Arial" pitchFamily="34" charset="-122"/>
@@ -6742,7 +7469,7 @@
               </a:rPr>
               <a:t>9 / 12</a:t>
             </a:r>
-            <a:endParaRPr lang="en-US" sz="1000" dirty="0"/>
+            <a:endParaRPr lang="en-US" sz="1100" dirty="0"/>
           </a:p>
         </p:txBody>
       </p:sp>
